--- a/Data/Презентация.pptx
+++ b/Data/Презентация.pptx
@@ -206,7 +206,7 @@
           <a:p>
             <a:fld id="{94389266-1B27-4525-B165-AD1A73342BE1}" type="datetimeFigureOut">
               <a:rPr lang="en-US" smtClean="0"/>
-              <a:t>5/21/2026</a:t>
+              <a:t>5/24/2026</a:t>
             </a:fld>
             <a:endParaRPr lang="en-US"/>
           </a:p>
@@ -1574,7 +1574,7 @@
                 <a:ea typeface="+mn-ea"/>
                 <a:cs typeface="+mn-cs"/>
               </a:rPr>
-              <a:t>На этапе проектирования базы данных, была построена ER-модель базы данных ……., которая содержит …..(вставить количество)  таблиц….</a:t>
+              <a:t>На этапе проектирования базы данных, была построена ER-модель базы данных ……., которая содержит 23  таблиц….</a:t>
             </a:r>
             <a:endParaRPr lang="ru-RU" dirty="0"/>
           </a:p>
@@ -1976,7 +1976,7 @@
           <a:p>
             <a:fld id="{DEA76DA3-B598-4B8A-8255-3391DDF783A7}" type="datetimeFigureOut">
               <a:rPr lang="ru-RU" smtClean="0"/>
-              <a:t>21.05.2026</a:t>
+              <a:t>24.05.2026</a:t>
             </a:fld>
             <a:endParaRPr lang="ru-RU"/>
           </a:p>
@@ -2174,7 +2174,7 @@
           <a:p>
             <a:fld id="{DEA76DA3-B598-4B8A-8255-3391DDF783A7}" type="datetimeFigureOut">
               <a:rPr lang="ru-RU" smtClean="0"/>
-              <a:t>21.05.2026</a:t>
+              <a:t>24.05.2026</a:t>
             </a:fld>
             <a:endParaRPr lang="ru-RU"/>
           </a:p>
@@ -2382,7 +2382,7 @@
           <a:p>
             <a:fld id="{DEA76DA3-B598-4B8A-8255-3391DDF783A7}" type="datetimeFigureOut">
               <a:rPr lang="ru-RU" smtClean="0"/>
-              <a:t>21.05.2026</a:t>
+              <a:t>24.05.2026</a:t>
             </a:fld>
             <a:endParaRPr lang="ru-RU"/>
           </a:p>
@@ -2489,7 +2489,7 @@
           <a:p>
             <a:fld id="{F93A723B-5719-4EEA-B777-EAF3DA7FDF21}" type="datetimeFigureOut">
               <a:rPr lang="ru-RU" smtClean="0"/>
-              <a:t>21.05.2026</a:t>
+              <a:t>24.05.2026</a:t>
             </a:fld>
             <a:endParaRPr lang="ru-RU"/>
           </a:p>
@@ -2755,7 +2755,7 @@
           <a:p>
             <a:fld id="{DEA76DA3-B598-4B8A-8255-3391DDF783A7}" type="datetimeFigureOut">
               <a:rPr lang="ru-RU" smtClean="0"/>
-              <a:t>21.05.2026</a:t>
+              <a:t>24.05.2026</a:t>
             </a:fld>
             <a:endParaRPr lang="ru-RU"/>
           </a:p>
@@ -3030,7 +3030,7 @@
           <a:p>
             <a:fld id="{DEA76DA3-B598-4B8A-8255-3391DDF783A7}" type="datetimeFigureOut">
               <a:rPr lang="ru-RU" smtClean="0"/>
-              <a:t>21.05.2026</a:t>
+              <a:t>24.05.2026</a:t>
             </a:fld>
             <a:endParaRPr lang="ru-RU"/>
           </a:p>
@@ -3295,7 +3295,7 @@
           <a:p>
             <a:fld id="{DEA76DA3-B598-4B8A-8255-3391DDF783A7}" type="datetimeFigureOut">
               <a:rPr lang="ru-RU" smtClean="0"/>
-              <a:t>21.05.2026</a:t>
+              <a:t>24.05.2026</a:t>
             </a:fld>
             <a:endParaRPr lang="ru-RU"/>
           </a:p>
@@ -3707,7 +3707,7 @@
           <a:p>
             <a:fld id="{DEA76DA3-B598-4B8A-8255-3391DDF783A7}" type="datetimeFigureOut">
               <a:rPr lang="ru-RU" smtClean="0"/>
-              <a:t>21.05.2026</a:t>
+              <a:t>24.05.2026</a:t>
             </a:fld>
             <a:endParaRPr lang="ru-RU"/>
           </a:p>
@@ -3848,7 +3848,7 @@
           <a:p>
             <a:fld id="{DEA76DA3-B598-4B8A-8255-3391DDF783A7}" type="datetimeFigureOut">
               <a:rPr lang="ru-RU" smtClean="0"/>
-              <a:t>21.05.2026</a:t>
+              <a:t>24.05.2026</a:t>
             </a:fld>
             <a:endParaRPr lang="ru-RU"/>
           </a:p>
@@ -3961,7 +3961,7 @@
           <a:p>
             <a:fld id="{DEA76DA3-B598-4B8A-8255-3391DDF783A7}" type="datetimeFigureOut">
               <a:rPr lang="ru-RU" smtClean="0"/>
-              <a:t>21.05.2026</a:t>
+              <a:t>24.05.2026</a:t>
             </a:fld>
             <a:endParaRPr lang="ru-RU"/>
           </a:p>
@@ -4272,7 +4272,7 @@
           <a:p>
             <a:fld id="{DEA76DA3-B598-4B8A-8255-3391DDF783A7}" type="datetimeFigureOut">
               <a:rPr lang="ru-RU" smtClean="0"/>
-              <a:t>21.05.2026</a:t>
+              <a:t>24.05.2026</a:t>
             </a:fld>
             <a:endParaRPr lang="ru-RU"/>
           </a:p>
@@ -4560,7 +4560,7 @@
           <a:p>
             <a:fld id="{DEA76DA3-B598-4B8A-8255-3391DDF783A7}" type="datetimeFigureOut">
               <a:rPr lang="ru-RU" smtClean="0"/>
-              <a:t>21.05.2026</a:t>
+              <a:t>24.05.2026</a:t>
             </a:fld>
             <a:endParaRPr lang="ru-RU"/>
           </a:p>
@@ -4801,7 +4801,7 @@
           <a:p>
             <a:fld id="{DEA76DA3-B598-4B8A-8255-3391DDF783A7}" type="datetimeFigureOut">
               <a:rPr lang="ru-RU" smtClean="0"/>
-              <a:t>21.05.2026</a:t>
+              <a:t>24.05.2026</a:t>
             </a:fld>
             <a:endParaRPr lang="ru-RU"/>
           </a:p>
@@ -5235,8 +5235,8 @@
         </p:nvSpPr>
         <p:spPr>
           <a:xfrm>
-            <a:off x="2956347" y="2166319"/>
-            <a:ext cx="6279306" cy="2233154"/>
+            <a:off x="270456" y="2166319"/>
+            <a:ext cx="11281893" cy="2233154"/>
           </a:xfrm>
           <a:prstGeom prst="rect">
             <a:avLst/>
@@ -5244,7 +5244,7 @@
         </p:spPr>
         <p:txBody>
           <a:bodyPr vert="horz" lIns="91440" tIns="45720" rIns="91440" bIns="45720" rtlCol="0" anchor="b">
-            <a:normAutofit fontScale="70000" lnSpcReduction="20000"/>
+            <a:normAutofit fontScale="85000" lnSpcReduction="10000"/>
           </a:bodyPr>
           <a:lstStyle>
             <a:lvl1pPr algn="ctr" defTabSz="914400" rtl="0" eaLnBrk="1" latinLnBrk="0" hangingPunct="1">
@@ -5685,14 +5685,14 @@
           <p:nvPr>
             <p:extLst>
               <p:ext uri="{D42A27DB-BD31-4B8C-83A1-F6EECF244321}">
-                <p14:modId xmlns:p14="http://schemas.microsoft.com/office/powerpoint/2010/main" val="242996682"/>
+                <p14:modId xmlns:p14="http://schemas.microsoft.com/office/powerpoint/2010/main" val="77269769"/>
               </p:ext>
             </p:extLst>
           </p:nvPr>
         </p:nvGraphicFramePr>
         <p:xfrm>
           <a:off x="351692" y="1005840"/>
-          <a:ext cx="11215893" cy="5242560"/>
+          <a:ext cx="11215893" cy="4328160"/>
         </p:xfrm>
         <a:graphic>
           <a:graphicData uri="http://schemas.openxmlformats.org/drawingml/2006/table">
@@ -5803,23 +5803,25 @@
                     <a:bodyPr/>
                     <a:lstStyle/>
                     <a:p>
-                      <a:pPr marL="0" algn="l" defTabSz="914400" rtl="0" eaLnBrk="1" latinLnBrk="0" hangingPunct="1"/>
+                      <a:pPr marL="0" marR="0" lvl="0" indent="0" algn="l" defTabSz="914400" rtl="0" eaLnBrk="1" fontAlgn="auto" latinLnBrk="0" hangingPunct="1">
+                        <a:lnSpc>
+                          <a:spcPct val="100000"/>
+                        </a:lnSpc>
+                        <a:spcBef>
+                          <a:spcPts val="0"/>
+                        </a:spcBef>
+                        <a:spcAft>
+                          <a:spcPts val="0"/>
+                        </a:spcAft>
+                        <a:buClrTx/>
+                        <a:buSzTx/>
+                        <a:buFontTx/>
+                        <a:buNone/>
+                        <a:tabLst/>
+                        <a:defRPr/>
+                      </a:pPr>
                       <a:r>
-                        <a:rPr lang="ru-RU" sz="1400" b="1" kern="1200" dirty="0">
-                          <a:solidFill>
-                            <a:schemeClr val="dk1"/>
-                          </a:solidFill>
-                          <a:latin typeface="Arial" panose="020B0604020202020204" pitchFamily="34" charset="0"/>
-                          <a:ea typeface="+mn-ea"/>
-                          <a:cs typeface="Arial" panose="020B0604020202020204" pitchFamily="34" charset="0"/>
-                        </a:rPr>
-                        <a:t>Вид деятельности (напечатать вид деятельности)</a:t>
-                      </a:r>
-                    </a:p>
-                    <a:p>
-                      <a:pPr marL="361950" indent="0" algn="l" defTabSz="914400" rtl="0" eaLnBrk="1" latinLnBrk="0" hangingPunct="1"/>
-                      <a:r>
-                        <a:rPr lang="ru-RU" sz="1400" kern="1200" dirty="0">
+                        <a:rPr lang="ru-RU" sz="1800" b="1" kern="1200" dirty="0">
                           <a:solidFill>
                             <a:schemeClr val="dk1"/>
                           </a:solidFill>
@@ -5828,23 +5830,14 @@
                           <a:ea typeface="+mn-ea"/>
                           <a:cs typeface="+mn-cs"/>
                         </a:rPr>
-                        <a:t>текст.</a:t>
+                        <a:t>Осуществление интеграции программных модулей.</a:t>
                       </a:r>
+                      <a:endParaRPr lang="ru-RU" sz="1400" dirty="0">
+                        <a:effectLst/>
+                      </a:endParaRPr>
                     </a:p>
                     <a:p>
-                      <a:pPr marL="361950" indent="0" algn="l" defTabSz="914400" rtl="0" eaLnBrk="1" latinLnBrk="0" hangingPunct="1"/>
-                      <a:r>
-                        <a:rPr lang="ru-RU" sz="1400" b="1" kern="1200" dirty="0">
-                          <a:solidFill>
-                            <a:schemeClr val="dk1"/>
-                          </a:solidFill>
-                          <a:effectLst/>
-                          <a:latin typeface="+mn-lt"/>
-                          <a:ea typeface="+mn-ea"/>
-                          <a:cs typeface="+mn-cs"/>
-                        </a:rPr>
-                        <a:t>…..</a:t>
-                      </a:r>
+                      <a:pPr marL="0" algn="l" defTabSz="914400" rtl="0" eaLnBrk="1" latinLnBrk="0" hangingPunct="1"/>
                       <a:endParaRPr lang="ru-RU" sz="1400" dirty="0"/>
                     </a:p>
                   </a:txBody>
@@ -5869,43 +5862,17 @@
                           <a:ea typeface="Times New Roman" panose="02020603050405020304" pitchFamily="18" charset="0"/>
                           <a:cs typeface="Arial" panose="020B0604020202020204" pitchFamily="34" charset="0"/>
                         </a:rPr>
-                        <a:t>Из задания на ДП (перечень что реализовать в программном продукте)</a:t>
+                        <a:t>Интеграция с сервисом </a:t>
                       </a:r>
-                    </a:p>
-                    <a:p>
-                      <a:pPr marL="0" marR="165100" lvl="0" indent="0" algn="just" defTabSz="914400" rtl="0" eaLnBrk="1" fontAlgn="auto" latinLnBrk="0" hangingPunct="1">
-                        <a:lnSpc>
-                          <a:spcPct val="100000"/>
-                        </a:lnSpc>
-                        <a:spcBef>
-                          <a:spcPts val="0"/>
-                        </a:spcBef>
-                        <a:spcAft>
-                          <a:spcPts val="0"/>
-                        </a:spcAft>
-                        <a:buClrTx/>
-                        <a:buSzTx/>
-                        <a:buFont typeface="Symbol" panose="05050102010706020507" pitchFamily="18" charset="2"/>
-                        <a:buNone/>
-                        <a:tabLst/>
-                        <a:defRPr/>
-                      </a:pPr>
                       <a:r>
-                        <a:rPr lang="ru-RU" sz="1400" dirty="0">
+                        <a:rPr lang="ru-RU" sz="1400" dirty="0" err="1">
+                          <a:effectLst/>
                           <a:latin typeface="Arial" panose="020B0604020202020204" pitchFamily="34" charset="0"/>
+                          <a:ea typeface="Times New Roman" panose="02020603050405020304" pitchFamily="18" charset="0"/>
                           <a:cs typeface="Arial" panose="020B0604020202020204" pitchFamily="34" charset="0"/>
                         </a:rPr>
-                        <a:t>текст</a:t>
+                        <a:t>DaData</a:t>
                       </a:r>
-                    </a:p>
-                    <a:p>
-                      <a:pPr marL="0" marR="165100" lvl="0" indent="0" algn="just">
-                        <a:spcAft>
-                          <a:spcPts val="0"/>
-                        </a:spcAft>
-                        <a:buFont typeface="Symbol" panose="05050102010706020507" pitchFamily="18" charset="2"/>
-                        <a:buNone/>
-                      </a:pPr>
                       <a:r>
                         <a:rPr lang="ru-RU" sz="1400" dirty="0">
                           <a:effectLst/>
@@ -5913,7 +5880,7 @@
                           <a:ea typeface="Times New Roman" panose="02020603050405020304" pitchFamily="18" charset="0"/>
                           <a:cs typeface="Arial" panose="020B0604020202020204" pitchFamily="34" charset="0"/>
                         </a:rPr>
-                        <a:t>..</a:t>
+                        <a:t> для подсказки и нормализации адресов подразделений; связка модулей заявок, склада, подразделений и отчётов по макетам в единой ИС.</a:t>
                       </a:r>
                     </a:p>
                   </a:txBody>
@@ -5931,23 +5898,25 @@
                     <a:bodyPr/>
                     <a:lstStyle/>
                     <a:p>
-                      <a:pPr marL="0" algn="l" defTabSz="914400" rtl="0" eaLnBrk="1" latinLnBrk="0" hangingPunct="1"/>
+                      <a:pPr marL="0" marR="0" lvl="0" indent="0" algn="l" defTabSz="914400" rtl="0" eaLnBrk="1" fontAlgn="auto" latinLnBrk="0" hangingPunct="1">
+                        <a:lnSpc>
+                          <a:spcPct val="100000"/>
+                        </a:lnSpc>
+                        <a:spcBef>
+                          <a:spcPts val="0"/>
+                        </a:spcBef>
+                        <a:spcAft>
+                          <a:spcPts val="0"/>
+                        </a:spcAft>
+                        <a:buClrTx/>
+                        <a:buSzTx/>
+                        <a:buFontTx/>
+                        <a:buNone/>
+                        <a:tabLst/>
+                        <a:defRPr/>
+                      </a:pPr>
                       <a:r>
-                        <a:rPr lang="ru-RU" sz="1400" b="1" kern="1200" dirty="0">
-                          <a:solidFill>
-                            <a:schemeClr val="dk1"/>
-                          </a:solidFill>
-                          <a:latin typeface="Arial" panose="020B0604020202020204" pitchFamily="34" charset="0"/>
-                          <a:ea typeface="+mn-ea"/>
-                          <a:cs typeface="Arial" panose="020B0604020202020204" pitchFamily="34" charset="0"/>
-                        </a:rPr>
-                        <a:t>Вид деятельности (напечатать вид деятельности)</a:t>
-                      </a:r>
-                    </a:p>
-                    <a:p>
-                      <a:pPr marL="361950" indent="0" algn="l" defTabSz="914400" rtl="0" eaLnBrk="1" latinLnBrk="0" hangingPunct="1"/>
-                      <a:r>
-                        <a:rPr lang="ru-RU" sz="1400" kern="1200" dirty="0">
+                        <a:rPr lang="ru-RU" sz="1800" b="1" kern="1200" dirty="0" err="1">
                           <a:solidFill>
                             <a:schemeClr val="dk1"/>
                           </a:solidFill>
@@ -5956,13 +5925,10 @@
                           <a:ea typeface="+mn-ea"/>
                           <a:cs typeface="+mn-cs"/>
                         </a:rPr>
-                        <a:t>текст. </a:t>
+                        <a:t>Ревьюирование</a:t>
                       </a:r>
-                    </a:p>
-                    <a:p>
-                      <a:pPr marL="361950" indent="0" algn="l" defTabSz="914400" rtl="0" eaLnBrk="1" latinLnBrk="0" hangingPunct="1"/>
                       <a:r>
-                        <a:rPr lang="ru-RU" sz="1400" b="1" kern="1200" dirty="0">
+                        <a:rPr lang="ru-RU" sz="1800" b="1" kern="1200" dirty="0">
                           <a:solidFill>
                             <a:schemeClr val="dk1"/>
                           </a:solidFill>
@@ -5971,8 +5937,14 @@
                           <a:ea typeface="+mn-ea"/>
                           <a:cs typeface="+mn-cs"/>
                         </a:rPr>
-                        <a:t>…..</a:t>
+                        <a:t> программных продуктов.</a:t>
                       </a:r>
+                      <a:endParaRPr lang="ru-RU" sz="1400" dirty="0">
+                        <a:effectLst/>
+                      </a:endParaRPr>
+                    </a:p>
+                    <a:p>
+                      <a:pPr marL="0" algn="l" defTabSz="914400" rtl="0" eaLnBrk="1" latinLnBrk="0" hangingPunct="1"/>
                       <a:endParaRPr lang="ru-RU" sz="1400" dirty="0"/>
                     </a:p>
                   </a:txBody>
@@ -5997,51 +5969,7 @@
                           <a:ea typeface="Times New Roman" panose="02020603050405020304" pitchFamily="18" charset="0"/>
                           <a:cs typeface="Arial" panose="020B0604020202020204" pitchFamily="34" charset="0"/>
                         </a:rPr>
-                        <a:t>Из задания на ДП (перечень что реализовать в программном продукте)</a:t>
-                      </a:r>
-                    </a:p>
-                    <a:p>
-                      <a:pPr marL="0" marR="165100" lvl="0" indent="0" algn="just" defTabSz="914400" rtl="0" eaLnBrk="1" fontAlgn="auto" latinLnBrk="0" hangingPunct="1">
-                        <a:lnSpc>
-                          <a:spcPct val="100000"/>
-                        </a:lnSpc>
-                        <a:spcBef>
-                          <a:spcPts val="0"/>
-                        </a:spcBef>
-                        <a:spcAft>
-                          <a:spcPts val="0"/>
-                        </a:spcAft>
-                        <a:buClrTx/>
-                        <a:buSzTx/>
-                        <a:buFont typeface="Symbol" panose="05050102010706020507" pitchFamily="18" charset="2"/>
-                        <a:buNone/>
-                        <a:tabLst/>
-                        <a:defRPr/>
-                      </a:pPr>
-                      <a:r>
-                        <a:rPr lang="ru-RU" sz="1400" dirty="0">
-                          <a:latin typeface="Arial" panose="020B0604020202020204" pitchFamily="34" charset="0"/>
-                          <a:cs typeface="Arial" panose="020B0604020202020204" pitchFamily="34" charset="0"/>
-                        </a:rPr>
-                        <a:t>текст</a:t>
-                      </a:r>
-                    </a:p>
-                    <a:p>
-                      <a:pPr marL="0" marR="165100" lvl="0" indent="0" algn="just">
-                        <a:spcAft>
-                          <a:spcPts val="0"/>
-                        </a:spcAft>
-                        <a:buFont typeface="Symbol" panose="05050102010706020507" pitchFamily="18" charset="2"/>
-                        <a:buNone/>
-                      </a:pPr>
-                      <a:r>
-                        <a:rPr lang="ru-RU" sz="1400" dirty="0">
-                          <a:effectLst/>
-                          <a:latin typeface="Arial" panose="020B0604020202020204" pitchFamily="34" charset="0"/>
-                          <a:ea typeface="Times New Roman" panose="02020603050405020304" pitchFamily="18" charset="0"/>
-                          <a:cs typeface="Arial" panose="020B0604020202020204" pitchFamily="34" charset="0"/>
-                        </a:rPr>
-                        <a:t>..</a:t>
+                        <a:t>Проверка соответствия реализованных функций требованиям жизненный цикл заявок, разграничение прав по ролям, валидация данных, обработка ошибок; функциональное и нагрузочное тестирование.</a:t>
                       </a:r>
                       <a:endParaRPr lang="ru-RU" sz="1400" dirty="0">
                         <a:latin typeface="Arial" panose="020B0604020202020204" pitchFamily="34" charset="0"/>
@@ -6063,23 +5991,25 @@
                     <a:bodyPr/>
                     <a:lstStyle/>
                     <a:p>
-                      <a:pPr marL="0" algn="l" defTabSz="914400" rtl="0" eaLnBrk="1" latinLnBrk="0" hangingPunct="1"/>
+                      <a:pPr marL="0" marR="0" lvl="0" indent="0" algn="l" defTabSz="914400" rtl="0" eaLnBrk="1" fontAlgn="auto" latinLnBrk="0" hangingPunct="1">
+                        <a:lnSpc>
+                          <a:spcPct val="100000"/>
+                        </a:lnSpc>
+                        <a:spcBef>
+                          <a:spcPts val="0"/>
+                        </a:spcBef>
+                        <a:spcAft>
+                          <a:spcPts val="0"/>
+                        </a:spcAft>
+                        <a:buClrTx/>
+                        <a:buSzTx/>
+                        <a:buFontTx/>
+                        <a:buNone/>
+                        <a:tabLst/>
+                        <a:defRPr/>
+                      </a:pPr>
                       <a:r>
-                        <a:rPr lang="ru-RU" sz="1400" b="1" kern="1200" dirty="0">
-                          <a:solidFill>
-                            <a:schemeClr val="dk1"/>
-                          </a:solidFill>
-                          <a:latin typeface="Arial" panose="020B0604020202020204" pitchFamily="34" charset="0"/>
-                          <a:ea typeface="+mn-ea"/>
-                          <a:cs typeface="Arial" panose="020B0604020202020204" pitchFamily="34" charset="0"/>
-                        </a:rPr>
-                        <a:t>Вид деятельности (напечатать вид деятельности)</a:t>
-                      </a:r>
-                    </a:p>
-                    <a:p>
-                      <a:pPr marL="361950" indent="0" algn="l" defTabSz="914400" rtl="0" eaLnBrk="1" latinLnBrk="0" hangingPunct="1"/>
-                      <a:r>
-                        <a:rPr lang="ru-RU" sz="1400" kern="1200" dirty="0">
+                        <a:rPr lang="ru-RU" sz="1800" b="1" kern="1200" dirty="0">
                           <a:solidFill>
                             <a:schemeClr val="dk1"/>
                           </a:solidFill>
@@ -6088,23 +6018,14 @@
                           <a:ea typeface="+mn-ea"/>
                           <a:cs typeface="+mn-cs"/>
                         </a:rPr>
-                        <a:t>текст</a:t>
+                        <a:t>Проектирование и разработка информационных систем.</a:t>
                       </a:r>
+                      <a:endParaRPr lang="ru-RU" sz="1400" dirty="0">
+                        <a:effectLst/>
+                      </a:endParaRPr>
                     </a:p>
                     <a:p>
-                      <a:pPr marL="361950" indent="0" algn="l" defTabSz="914400" rtl="0" eaLnBrk="1" latinLnBrk="0" hangingPunct="1"/>
-                      <a:r>
-                        <a:rPr lang="ru-RU" sz="1400" b="1" kern="1200" dirty="0">
-                          <a:solidFill>
-                            <a:schemeClr val="dk1"/>
-                          </a:solidFill>
-                          <a:effectLst/>
-                          <a:latin typeface="+mn-lt"/>
-                          <a:ea typeface="+mn-ea"/>
-                          <a:cs typeface="+mn-cs"/>
-                        </a:rPr>
-                        <a:t>…..</a:t>
-                      </a:r>
+                      <a:pPr marL="0" algn="l" defTabSz="914400" rtl="0" eaLnBrk="1" latinLnBrk="0" hangingPunct="1"/>
                       <a:endParaRPr lang="ru-RU" sz="1400" dirty="0"/>
                     </a:p>
                   </a:txBody>
@@ -6129,51 +6050,7 @@
                           <a:ea typeface="Times New Roman" panose="02020603050405020304" pitchFamily="18" charset="0"/>
                           <a:cs typeface="Arial" panose="020B0604020202020204" pitchFamily="34" charset="0"/>
                         </a:rPr>
-                        <a:t>Из задания на ДП (перечень что реализовать в программном продукте)</a:t>
-                      </a:r>
-                    </a:p>
-                    <a:p>
-                      <a:pPr marL="0" marR="165100" lvl="0" indent="0" algn="just" defTabSz="914400" rtl="0" eaLnBrk="1" fontAlgn="auto" latinLnBrk="0" hangingPunct="1">
-                        <a:lnSpc>
-                          <a:spcPct val="100000"/>
-                        </a:lnSpc>
-                        <a:spcBef>
-                          <a:spcPts val="0"/>
-                        </a:spcBef>
-                        <a:spcAft>
-                          <a:spcPts val="0"/>
-                        </a:spcAft>
-                        <a:buClrTx/>
-                        <a:buSzTx/>
-                        <a:buFont typeface="Symbol" panose="05050102010706020507" pitchFamily="18" charset="2"/>
-                        <a:buNone/>
-                        <a:tabLst/>
-                        <a:defRPr/>
-                      </a:pPr>
-                      <a:r>
-                        <a:rPr lang="ru-RU" sz="1400" dirty="0">
-                          <a:latin typeface="Arial" panose="020B0604020202020204" pitchFamily="34" charset="0"/>
-                          <a:cs typeface="Arial" panose="020B0604020202020204" pitchFamily="34" charset="0"/>
-                        </a:rPr>
-                        <a:t>текст</a:t>
-                      </a:r>
-                    </a:p>
-                    <a:p>
-                      <a:pPr marL="0" marR="165100" lvl="0" indent="0" algn="just">
-                        <a:spcAft>
-                          <a:spcPts val="0"/>
-                        </a:spcAft>
-                        <a:buFont typeface="Symbol" panose="05050102010706020507" pitchFamily="18" charset="2"/>
-                        <a:buNone/>
-                      </a:pPr>
-                      <a:r>
-                        <a:rPr lang="ru-RU" sz="1400" dirty="0">
-                          <a:effectLst/>
-                          <a:latin typeface="Arial" panose="020B0604020202020204" pitchFamily="34" charset="0"/>
-                          <a:ea typeface="Times New Roman" panose="02020603050405020304" pitchFamily="18" charset="0"/>
-                          <a:cs typeface="Arial" panose="020B0604020202020204" pitchFamily="34" charset="0"/>
-                        </a:rPr>
-                        <a:t>..</a:t>
+                        <a:t>Создание и согласование заявок, учёт остатков на складах, акты установки, отчёты по макетам, администрирование пользователей.</a:t>
                       </a:r>
                     </a:p>
                   </a:txBody>
@@ -6191,46 +6068,49 @@
                     <a:bodyPr/>
                     <a:lstStyle/>
                     <a:p>
-                      <a:pPr marL="0" algn="l" defTabSz="914400" rtl="0" eaLnBrk="1" latinLnBrk="0" hangingPunct="1"/>
+                      <a:pPr marL="0" marR="0" lvl="0" indent="0" algn="l" defTabSz="914400" rtl="0" eaLnBrk="1" fontAlgn="auto" latinLnBrk="0" hangingPunct="1">
+                        <a:lnSpc>
+                          <a:spcPct val="100000"/>
+                        </a:lnSpc>
+                        <a:spcBef>
+                          <a:spcPts val="0"/>
+                        </a:spcBef>
+                        <a:spcAft>
+                          <a:spcPts val="0"/>
+                        </a:spcAft>
+                        <a:buClrTx/>
+                        <a:buSzTx/>
+                        <a:buFontTx/>
+                        <a:buNone/>
+                        <a:tabLst/>
+                        <a:defRPr/>
+                      </a:pPr>
                       <a:r>
-                        <a:rPr lang="ru-RU" sz="1400" b="1" kern="1200" dirty="0">
+                        <a:rPr lang="ru-RU" sz="1800" b="1" kern="1200" dirty="0">
                           <a:solidFill>
                             <a:schemeClr val="dk1"/>
                           </a:solidFill>
-                          <a:latin typeface="Arial" panose="020B0604020202020204" pitchFamily="34" charset="0"/>
+                          <a:effectLst/>
+                          <a:latin typeface="+mn-lt"/>
                           <a:ea typeface="+mn-ea"/>
-                          <a:cs typeface="Arial" panose="020B0604020202020204" pitchFamily="34" charset="0"/>
+                          <a:cs typeface="+mn-cs"/>
                         </a:rPr>
-                        <a:t>Вид деятельности (напечатать вид деятельности)</a:t>
+                        <a:t>Сопровождение информационных систем.</a:t>
                       </a:r>
+                      <a:endParaRPr lang="ru-RU" sz="1400" dirty="0">
+                        <a:effectLst/>
+                      </a:endParaRPr>
                     </a:p>
                     <a:p>
-                      <a:pPr marL="361950" indent="0" algn="l" defTabSz="914400" rtl="0" eaLnBrk="1" latinLnBrk="0" hangingPunct="1"/>
-                      <a:r>
-                        <a:rPr lang="ru-RU" sz="1400" b="1" kern="1200" dirty="0">
-                          <a:solidFill>
-                            <a:schemeClr val="dk1"/>
-                          </a:solidFill>
-                          <a:latin typeface="Arial" panose="020B0604020202020204" pitchFamily="34" charset="0"/>
-                          <a:ea typeface="+mn-ea"/>
-                          <a:cs typeface="Arial" panose="020B0604020202020204" pitchFamily="34" charset="0"/>
-                        </a:rPr>
-                        <a:t>текст</a:t>
-                      </a:r>
-                    </a:p>
-                    <a:p>
-                      <a:pPr marL="361950" indent="0" algn="l" defTabSz="914400" rtl="0" eaLnBrk="1" latinLnBrk="0" hangingPunct="1"/>
-                      <a:r>
-                        <a:rPr lang="ru-RU" sz="1400" b="1" kern="1200" dirty="0">
-                          <a:solidFill>
-                            <a:schemeClr val="dk1"/>
-                          </a:solidFill>
-                          <a:latin typeface="Arial" panose="020B0604020202020204" pitchFamily="34" charset="0"/>
-                          <a:ea typeface="+mn-ea"/>
-                          <a:cs typeface="Arial" panose="020B0604020202020204" pitchFamily="34" charset="0"/>
-                        </a:rPr>
-                        <a:t>…..</a:t>
-                      </a:r>
+                      <a:pPr marL="0" algn="l" defTabSz="914400" rtl="0" eaLnBrk="1" latinLnBrk="0" hangingPunct="1"/>
+                      <a:endParaRPr lang="ru-RU" sz="1400" b="1" kern="1200" dirty="0">
+                        <a:solidFill>
+                          <a:schemeClr val="dk1"/>
+                        </a:solidFill>
+                        <a:latin typeface="Arial" panose="020B0604020202020204" pitchFamily="34" charset="0"/>
+                        <a:ea typeface="+mn-ea"/>
+                        <a:cs typeface="Arial" panose="020B0604020202020204" pitchFamily="34" charset="0"/>
+                      </a:endParaRPr>
                     </a:p>
                   </a:txBody>
                   <a:tcPr/>
@@ -6257,58 +6137,7 @@
                           <a:ea typeface="Times New Roman" panose="02020603050405020304" pitchFamily="18" charset="0"/>
                           <a:cs typeface="Arial" panose="020B0604020202020204" pitchFamily="34" charset="0"/>
                         </a:rPr>
-                        <a:t>Из задания на ДП (перечень что реализовать в программном продукте)</a:t>
-                      </a:r>
-                    </a:p>
-                    <a:p>
-                      <a:pPr marL="0" marR="165100" lvl="0" indent="0" algn="just" defTabSz="914400" rtl="0" eaLnBrk="1" fontAlgn="auto" latinLnBrk="0" hangingPunct="1">
-                        <a:lnSpc>
-                          <a:spcPct val="100000"/>
-                        </a:lnSpc>
-                        <a:spcBef>
-                          <a:spcPts val="0"/>
-                        </a:spcBef>
-                        <a:spcAft>
-                          <a:spcPts val="0"/>
-                        </a:spcAft>
-                        <a:buClrTx/>
-                        <a:buSzTx/>
-                        <a:buFont typeface="Symbol" panose="05050102010706020507" pitchFamily="18" charset="2"/>
-                        <a:buNone/>
-                        <a:tabLst/>
-                        <a:defRPr/>
-                      </a:pPr>
-                      <a:r>
-                        <a:rPr lang="ru-RU" sz="1400" kern="1200" dirty="0">
-                          <a:solidFill>
-                            <a:schemeClr val="dk1"/>
-                          </a:solidFill>
-                          <a:effectLst/>
-                          <a:latin typeface="Arial" panose="020B0604020202020204" pitchFamily="34" charset="0"/>
-                          <a:cs typeface="Arial" panose="020B0604020202020204" pitchFamily="34" charset="0"/>
-                        </a:rPr>
-                        <a:t>текст</a:t>
-                      </a:r>
-                    </a:p>
-                    <a:p>
-                      <a:pPr marL="0" marR="165100" lvl="0" indent="0" algn="just">
-                        <a:spcAft>
-                          <a:spcPts val="0"/>
-                        </a:spcAft>
-                        <a:buFont typeface="Symbol" panose="05050102010706020507" pitchFamily="18" charset="2"/>
-                        <a:buNone/>
-                      </a:pPr>
-                      <a:r>
-                        <a:rPr lang="ru-RU" sz="1400" kern="1200" dirty="0">
-                          <a:solidFill>
-                            <a:schemeClr val="dk1"/>
-                          </a:solidFill>
-                          <a:effectLst/>
-                          <a:latin typeface="Arial" panose="020B0604020202020204" pitchFamily="34" charset="0"/>
-                          <a:ea typeface="Times New Roman" panose="02020603050405020304" pitchFamily="18" charset="0"/>
-                          <a:cs typeface="Arial" panose="020B0604020202020204" pitchFamily="34" charset="0"/>
-                        </a:rPr>
-                        <a:t>..</a:t>
+                        <a:t>Разработка структуры сопровождения информационной системы; выявление и исправление ошибок в коде.</a:t>
                       </a:r>
                     </a:p>
                   </a:txBody>
@@ -6326,46 +6155,61 @@
                     <a:bodyPr/>
                     <a:lstStyle/>
                     <a:p>
-                      <a:pPr marL="0" algn="l" defTabSz="914400" rtl="0" eaLnBrk="1" latinLnBrk="0" hangingPunct="1"/>
+                      <a:pPr marL="0" marR="0" lvl="0" indent="0" algn="l" defTabSz="914400" rtl="0" eaLnBrk="1" fontAlgn="auto" latinLnBrk="0" hangingPunct="1">
+                        <a:lnSpc>
+                          <a:spcPct val="100000"/>
+                        </a:lnSpc>
+                        <a:spcBef>
+                          <a:spcPts val="0"/>
+                        </a:spcBef>
+                        <a:spcAft>
+                          <a:spcPts val="0"/>
+                        </a:spcAft>
+                        <a:buClrTx/>
+                        <a:buSzTx/>
+                        <a:buFontTx/>
+                        <a:buNone/>
+                        <a:tabLst/>
+                        <a:defRPr/>
+                      </a:pPr>
                       <a:r>
-                        <a:rPr lang="ru-RU" sz="1400" b="1" kern="1200" dirty="0">
+                        <a:rPr lang="ru-RU" sz="1800" b="1" kern="1200" dirty="0" err="1">
                           <a:solidFill>
                             <a:schemeClr val="dk1"/>
                           </a:solidFill>
-                          <a:latin typeface="Arial" panose="020B0604020202020204" pitchFamily="34" charset="0"/>
+                          <a:effectLst/>
+                          <a:latin typeface="+mn-lt"/>
                           <a:ea typeface="+mn-ea"/>
-                          <a:cs typeface="Arial" panose="020B0604020202020204" pitchFamily="34" charset="0"/>
+                          <a:cs typeface="+mn-cs"/>
                         </a:rPr>
-                        <a:t>Вид деятельности (напечатать вид деятельности)</a:t>
+                        <a:t>Соадминистрирование</a:t>
                       </a:r>
-                    </a:p>
-                    <a:p>
-                      <a:pPr marL="361950" indent="0" algn="l" defTabSz="914400" rtl="0" eaLnBrk="1" latinLnBrk="0" hangingPunct="1"/>
                       <a:r>
-                        <a:rPr lang="ru-RU" sz="1400" b="1" kern="1200" dirty="0">
+                        <a:rPr lang="ru-RU" sz="1800" b="1" kern="1200" dirty="0">
                           <a:solidFill>
                             <a:schemeClr val="dk1"/>
                           </a:solidFill>
-                          <a:latin typeface="Arial" panose="020B0604020202020204" pitchFamily="34" charset="0"/>
+                          <a:effectLst/>
+                          <a:latin typeface="+mn-lt"/>
                           <a:ea typeface="+mn-ea"/>
-                          <a:cs typeface="Arial" panose="020B0604020202020204" pitchFamily="34" charset="0"/>
+                          <a:cs typeface="+mn-cs"/>
                         </a:rPr>
-                        <a:t>текст</a:t>
+                        <a:t> баз данных и серверов.</a:t>
                       </a:r>
+                      <a:endParaRPr lang="ru-RU" sz="1400" dirty="0">
+                        <a:effectLst/>
+                      </a:endParaRPr>
                     </a:p>
                     <a:p>
-                      <a:pPr marL="361950" indent="0" algn="l" defTabSz="914400" rtl="0" eaLnBrk="1" latinLnBrk="0" hangingPunct="1"/>
-                      <a:r>
-                        <a:rPr lang="ru-RU" sz="1400" b="1" kern="1200" dirty="0">
-                          <a:solidFill>
-                            <a:schemeClr val="dk1"/>
-                          </a:solidFill>
-                          <a:latin typeface="Arial" panose="020B0604020202020204" pitchFamily="34" charset="0"/>
-                          <a:ea typeface="+mn-ea"/>
-                          <a:cs typeface="Arial" panose="020B0604020202020204" pitchFamily="34" charset="0"/>
-                        </a:rPr>
-                        <a:t>…..</a:t>
-                      </a:r>
+                      <a:pPr marL="0" algn="l" defTabSz="914400" rtl="0" eaLnBrk="1" latinLnBrk="0" hangingPunct="1"/>
+                      <a:endParaRPr lang="ru-RU" sz="1400" b="1" kern="1200" dirty="0">
+                        <a:solidFill>
+                          <a:schemeClr val="dk1"/>
+                        </a:solidFill>
+                        <a:latin typeface="Arial" panose="020B0604020202020204" pitchFamily="34" charset="0"/>
+                        <a:ea typeface="+mn-ea"/>
+                        <a:cs typeface="Arial" panose="020B0604020202020204" pitchFamily="34" charset="0"/>
+                      </a:endParaRPr>
                     </a:p>
                   </a:txBody>
                   <a:tcPr/>
@@ -6392,49 +6236,10 @@
                           <a:ea typeface="Times New Roman" panose="02020603050405020304" pitchFamily="18" charset="0"/>
                           <a:cs typeface="Arial" panose="020B0604020202020204" pitchFamily="34" charset="0"/>
                         </a:rPr>
-                        <a:t>Из задания на ДП (перечень что реализовать в программном продукте)</a:t>
+                        <a:t>Администрирование </a:t>
                       </a:r>
-                    </a:p>
-                    <a:p>
-                      <a:pPr marL="0" marR="165100" lvl="0" indent="0" algn="just" defTabSz="914400" rtl="0" eaLnBrk="1" fontAlgn="auto" latinLnBrk="0" hangingPunct="1">
-                        <a:lnSpc>
-                          <a:spcPct val="100000"/>
-                        </a:lnSpc>
-                        <a:spcBef>
-                          <a:spcPts val="0"/>
-                        </a:spcBef>
-                        <a:spcAft>
-                          <a:spcPts val="0"/>
-                        </a:spcAft>
-                        <a:buClrTx/>
-                        <a:buSzTx/>
-                        <a:buFont typeface="Symbol" panose="05050102010706020507" pitchFamily="18" charset="2"/>
-                        <a:buNone/>
-                        <a:tabLst/>
-                        <a:defRPr/>
-                      </a:pPr>
                       <a:r>
-                        <a:rPr lang="ru-RU" sz="1400" kern="1200" dirty="0">
-                          <a:solidFill>
-                            <a:schemeClr val="dk1"/>
-                          </a:solidFill>
-                          <a:effectLst/>
-                          <a:latin typeface="Arial" panose="020B0604020202020204" pitchFamily="34" charset="0"/>
-                          <a:cs typeface="Arial" panose="020B0604020202020204" pitchFamily="34" charset="0"/>
-                        </a:rPr>
-                        <a:t>текст</a:t>
-                      </a:r>
-                    </a:p>
-                    <a:p>
-                      <a:pPr marL="0" marR="165100" lvl="0" indent="0" algn="just">
-                        <a:spcAft>
-                          <a:spcPts val="0"/>
-                        </a:spcAft>
-                        <a:buFont typeface="Symbol" panose="05050102010706020507" pitchFamily="18" charset="2"/>
-                        <a:buNone/>
-                      </a:pPr>
-                      <a:r>
-                        <a:rPr lang="ru-RU" sz="1400" kern="1200" dirty="0">
+                        <a:rPr lang="ru-RU" sz="1400" kern="1200">
                           <a:solidFill>
                             <a:schemeClr val="dk1"/>
                           </a:solidFill>
@@ -6443,8 +6248,29 @@
                           <a:ea typeface="Times New Roman" panose="02020603050405020304" pitchFamily="18" charset="0"/>
                           <a:cs typeface="Arial" panose="020B0604020202020204" pitchFamily="34" charset="0"/>
                         </a:rPr>
-                        <a:t>..</a:t>
+                        <a:t>базы данных </a:t>
                       </a:r>
+                      <a:r>
+                        <a:rPr lang="en-US" sz="1400" kern="1200" dirty="0">
+                          <a:solidFill>
+                            <a:schemeClr val="dk1"/>
+                          </a:solidFill>
+                          <a:effectLst/>
+                          <a:latin typeface="Arial" panose="020B0604020202020204" pitchFamily="34" charset="0"/>
+                          <a:ea typeface="Times New Roman" panose="02020603050405020304" pitchFamily="18" charset="0"/>
+                          <a:cs typeface="Arial" panose="020B0604020202020204" pitchFamily="34" charset="0"/>
+                        </a:rPr>
+                        <a:t>MySQL.</a:t>
+                      </a:r>
+                      <a:endParaRPr lang="ru-RU" sz="1400" kern="1200" dirty="0">
+                        <a:solidFill>
+                          <a:schemeClr val="dk1"/>
+                        </a:solidFill>
+                        <a:effectLst/>
+                        <a:latin typeface="Arial" panose="020B0604020202020204" pitchFamily="34" charset="0"/>
+                        <a:ea typeface="Times New Roman" panose="02020603050405020304" pitchFamily="18" charset="0"/>
+                        <a:cs typeface="Arial" panose="020B0604020202020204" pitchFamily="34" charset="0"/>
+                      </a:endParaRPr>
                     </a:p>
                   </a:txBody>
                   <a:tcPr/>
@@ -9627,8 +9453,8 @@
         </p:blipFill>
         <p:spPr>
           <a:xfrm>
-            <a:off x="182094" y="1766099"/>
-            <a:ext cx="5868473" cy="4158518"/>
+            <a:off x="167424" y="1766099"/>
+            <a:ext cx="5711769" cy="4047474"/>
           </a:xfrm>
           <a:prstGeom prst="rect">
             <a:avLst/>
@@ -9637,10 +9463,10 @@
       </p:pic>
       <p:pic>
         <p:nvPicPr>
-          <p:cNvPr id="13" name="Рисунок 12">
-            <a:extLst>
-              <a:ext uri="{FF2B5EF4-FFF2-40B4-BE49-F238E27FC236}">
-                <a16:creationId xmlns:a16="http://schemas.microsoft.com/office/drawing/2014/main" id="{7B3F6C68-B750-71E3-FCF1-A4DB48E916AC}"/>
+          <p:cNvPr id="2" name="Рисунок 1">
+            <a:extLst>
+              <a:ext uri="{FF2B5EF4-FFF2-40B4-BE49-F238E27FC236}">
+                <a16:creationId xmlns:a16="http://schemas.microsoft.com/office/drawing/2014/main" id="{4DFA6425-4985-E7BC-9429-BCF5F61DE3F5}"/>
               </a:ext>
             </a:extLst>
           </p:cNvPr>
@@ -9657,12 +9483,17 @@
         </p:blipFill>
         <p:spPr>
           <a:xfrm>
-            <a:off x="6218190" y="1766099"/>
-            <a:ext cx="5868473" cy="4158518"/>
+            <a:off x="6065239" y="1766099"/>
+            <a:ext cx="5940966" cy="4047474"/>
           </a:xfrm>
           <a:prstGeom prst="rect">
             <a:avLst/>
           </a:prstGeom>
+          <a:ln>
+            <a:solidFill>
+              <a:schemeClr val="tx1"/>
+            </a:solidFill>
+          </a:ln>
         </p:spPr>
       </p:pic>
     </p:spTree>
@@ -9869,10 +9700,10 @@
       </p:sp>
       <p:pic>
         <p:nvPicPr>
-          <p:cNvPr id="5" name="Рисунок 4">
-            <a:extLst>
-              <a:ext uri="{FF2B5EF4-FFF2-40B4-BE49-F238E27FC236}">
-                <a16:creationId xmlns:a16="http://schemas.microsoft.com/office/drawing/2014/main" id="{7FE1420A-B4F5-929D-5486-3D5EA4AEFD47}"/>
+          <p:cNvPr id="2" name="Рисунок 1">
+            <a:extLst>
+              <a:ext uri="{FF2B5EF4-FFF2-40B4-BE49-F238E27FC236}">
+                <a16:creationId xmlns:a16="http://schemas.microsoft.com/office/drawing/2014/main" id="{17F2C6E3-71D0-9DCE-96B6-2EE556876745}"/>
               </a:ext>
             </a:extLst>
           </p:cNvPr>
@@ -9882,19 +9713,27 @@
           <p:nvPr/>
         </p:nvPicPr>
         <p:blipFill>
-          <a:blip r:embed="rId3"/>
+          <a:blip r:embed="rId3" cstate="print">
+            <a:extLst>
+              <a:ext uri="{28A0092B-C50C-407E-A947-70E740481C1C}">
+                <a14:useLocalDpi xmlns:a14="http://schemas.microsoft.com/office/drawing/2010/main" val="0"/>
+              </a:ext>
+            </a:extLst>
+          </a:blip>
+          <a:srcRect/>
           <a:stretch>
             <a:fillRect/>
           </a:stretch>
         </p:blipFill>
-        <p:spPr>
+        <p:spPr bwMode="auto">
           <a:xfrm>
-            <a:off x="2340738" y="995723"/>
-            <a:ext cx="7627509" cy="5629337"/>
+            <a:off x="1624824" y="1191226"/>
+            <a:ext cx="8942352" cy="5414421"/>
           </a:xfrm>
           <a:prstGeom prst="rect">
             <a:avLst/>
           </a:prstGeom>
+          <a:noFill/>
           <a:ln>
             <a:solidFill>
               <a:schemeClr val="tx1"/>
@@ -10267,7 +10106,6 @@
           </a:p>
           <a:p>
             <a:pPr marL="0" indent="0">
-              <a:buFont typeface="Arial" panose="020B0604020202020204" pitchFamily="34" charset="0"/>
               <a:buNone/>
             </a:pPr>
             <a:r>
@@ -10275,7 +10113,7 @@
                 <a:latin typeface="Arial" panose="020B0604020202020204" pitchFamily="34" charset="0"/>
                 <a:cs typeface="Arial" panose="020B0604020202020204" pitchFamily="34" charset="0"/>
               </a:rPr>
-              <a:t>Метод проверки отдельных модулей информационной системы учёта медицинского оборудования (контроллеров, сервисов, правил валидации) с помощью тестов </a:t>
+              <a:t>Метод проверки отдельных модулей информационной системы учёта материалов (контроллеров, сервисов, правил валидации) с помощью тестов </a:t>
             </a:r>
             <a:r>
               <a:rPr lang="ru-RU" sz="2000" dirty="0" err="1">
@@ -10293,9 +10131,6 @@
             </a:r>
             <a:r>
               <a:rPr lang="ru-RU" sz="2000" dirty="0" err="1">
-                <a:highlight>
-                  <a:srgbClr val="FFFF00"/>
-                </a:highlight>
                 <a:latin typeface="Arial" panose="020B0604020202020204" pitchFamily="34" charset="0"/>
                 <a:cs typeface="Arial" panose="020B0604020202020204" pitchFamily="34" charset="0"/>
               </a:rPr>
@@ -10303,9 +10138,6 @@
             </a:r>
             <a:r>
               <a:rPr lang="ru-RU" sz="2000" dirty="0">
-                <a:highlight>
-                  <a:srgbClr val="FFFF00"/>
-                </a:highlight>
                 <a:latin typeface="Arial" panose="020B0604020202020204" pitchFamily="34" charset="0"/>
                 <a:cs typeface="Arial" panose="020B0604020202020204" pitchFamily="34" charset="0"/>
               </a:rPr>
@@ -10313,9 +10145,6 @@
             </a:r>
             <a:r>
               <a:rPr lang="ru-RU" sz="2000" dirty="0" err="1">
-                <a:highlight>
-                  <a:srgbClr val="FFFF00"/>
-                </a:highlight>
                 <a:latin typeface="Arial" panose="020B0604020202020204" pitchFamily="34" charset="0"/>
                 <a:cs typeface="Arial" panose="020B0604020202020204" pitchFamily="34" charset="0"/>
               </a:rPr>
@@ -10323,29 +10152,33 @@
             </a:r>
             <a:r>
               <a:rPr lang="ru-RU" sz="2000" dirty="0">
-                <a:highlight>
-                  <a:srgbClr val="FFFF00"/>
-                </a:highlight>
                 <a:latin typeface="Arial" panose="020B0604020202020204" pitchFamily="34" charset="0"/>
                 <a:cs typeface="Arial" panose="020B0604020202020204" pitchFamily="34" charset="0"/>
               </a:rPr>
               <a:t>/</a:t>
             </a:r>
             <a:r>
-              <a:rPr lang="ru-RU" sz="2000" dirty="0" err="1">
-                <a:highlight>
-                  <a:srgbClr val="FFFF00"/>
-                </a:highlight>
+              <a:rPr lang="en-US" sz="2000" dirty="0">
                 <a:latin typeface="Arial" panose="020B0604020202020204" pitchFamily="34" charset="0"/>
                 <a:cs typeface="Arial" panose="020B0604020202020204" pitchFamily="34" charset="0"/>
               </a:rPr>
-              <a:t>InventoryNumberUniqueTest.php</a:t>
-            </a:r>
-            <a:endParaRPr lang="ru-RU" sz="2000" dirty="0">
-              <a:highlight>
-                <a:srgbClr val="FFFF00"/>
-              </a:highlight>
-            </a:endParaRPr>
+              <a:t>FuncPos02LayoutApplicationTest</a:t>
+            </a:r>
+            <a:r>
+              <a:rPr lang="ru-RU" sz="2000" dirty="0">
+                <a:latin typeface="Arial" panose="020B0604020202020204" pitchFamily="34" charset="0"/>
+                <a:cs typeface="Arial" panose="020B0604020202020204" pitchFamily="34" charset="0"/>
+              </a:rPr>
+              <a:t>.</a:t>
+            </a:r>
+            <a:r>
+              <a:rPr lang="ru-RU" sz="2000" dirty="0" err="1">
+                <a:latin typeface="Arial" panose="020B0604020202020204" pitchFamily="34" charset="0"/>
+                <a:cs typeface="Arial" panose="020B0604020202020204" pitchFamily="34" charset="0"/>
+              </a:rPr>
+              <a:t>php</a:t>
+            </a:r>
+            <a:endParaRPr lang="ru-RU" sz="2000" dirty="0"/>
           </a:p>
         </p:txBody>
       </p:sp>
@@ -10432,8 +10265,8 @@
         </p:nvSpPr>
         <p:spPr>
           <a:xfrm>
-            <a:off x="1025779" y="2886256"/>
-            <a:ext cx="10515600" cy="1325563"/>
+            <a:off x="495300" y="2766218"/>
+            <a:ext cx="11388979" cy="1325563"/>
           </a:xfrm>
         </p:spPr>
         <p:txBody>
@@ -10448,7 +10281,7 @@
                 <a:latin typeface="Arial" panose="020B0604020202020204" pitchFamily="34" charset="0"/>
                 <a:cs typeface="Arial" panose="020B0604020202020204" pitchFamily="34" charset="0"/>
               </a:rPr>
-              <a:t>Демонстрация дипломного продукта</a:t>
+              <a:t>Демонстрация программного продукта</a:t>
             </a:r>
             <a:endParaRPr lang="ru-RU" dirty="0"/>
           </a:p>

--- a/Data/Презентация.pptx
+++ b/Data/Презентация.pptx
@@ -5,19 +5,20 @@
     <p:sldMasterId id="2147483648" r:id="rId1"/>
   </p:sldMasterIdLst>
   <p:notesMasterIdLst>
-    <p:notesMasterId r:id="rId12"/>
+    <p:notesMasterId r:id="rId13"/>
   </p:notesMasterIdLst>
   <p:sldIdLst>
     <p:sldId id="256" r:id="rId2"/>
     <p:sldId id="299" r:id="rId3"/>
     <p:sldId id="295" r:id="rId4"/>
-    <p:sldId id="288" r:id="rId5"/>
-    <p:sldId id="293" r:id="rId6"/>
-    <p:sldId id="294" r:id="rId7"/>
-    <p:sldId id="290" r:id="rId8"/>
-    <p:sldId id="298" r:id="rId9"/>
-    <p:sldId id="296" r:id="rId10"/>
-    <p:sldId id="297" r:id="rId11"/>
+    <p:sldId id="300" r:id="rId5"/>
+    <p:sldId id="288" r:id="rId6"/>
+    <p:sldId id="293" r:id="rId7"/>
+    <p:sldId id="294" r:id="rId8"/>
+    <p:sldId id="290" r:id="rId9"/>
+    <p:sldId id="298" r:id="rId10"/>
+    <p:sldId id="296" r:id="rId11"/>
+    <p:sldId id="297" r:id="rId12"/>
   </p:sldIdLst>
   <p:sldSz cx="12192000" cy="6858000"/>
   <p:notesSz cx="6858000" cy="9144000"/>
@@ -206,7 +207,7 @@
           <a:p>
             <a:fld id="{94389266-1B27-4525-B165-AD1A73342BE1}" type="datetimeFigureOut">
               <a:rPr lang="en-US" smtClean="0"/>
-              <a:t>5/24/2026</a:t>
+              <a:t>5/31/2026</a:t>
             </a:fld>
             <a:endParaRPr lang="en-US"/>
           </a:p>
@@ -636,13 +637,25 @@
           <a:p>
             <a:r>
               <a:rPr lang="ru-RU" dirty="0"/>
-              <a:t>Таким образом в процессе дипломного проектирования продемонстрирован …..(вставить вид деятельности) в части реализации функционала …..(вставить) , </a:t>
-            </a:r>
+              <a:t>Демонстрация программного продукта</a:t>
+            </a:r>
+          </a:p>
+          <a:p>
+            <a:endParaRPr lang="ru-RU" dirty="0"/>
+          </a:p>
+          <a:p>
+            <a:endParaRPr lang="ru-RU" dirty="0"/>
           </a:p>
           <a:p>
             <a:r>
               <a:rPr lang="ru-RU" dirty="0"/>
-              <a:t>также было выполнено …… (вставить вид деятельности) через (…..вставить) , </a:t>
+              <a:t>При работе выделены … (количество)  ролей, (назвать кто ) ….</a:t>
+            </a:r>
+          </a:p>
+          <a:p>
+            <a:r>
+              <a:rPr lang="ru-RU" dirty="0"/>
+              <a:t> </a:t>
             </a:r>
           </a:p>
           <a:p>
@@ -651,17 +664,11 @@
           <a:p>
             <a:r>
               <a:rPr lang="ru-RU" dirty="0"/>
-              <a:t>В результате все цели (функциональные задачи) достигнуты (выполнены). </a:t>
+              <a:t>демонстрируем под заявленный функционал каждой роли (открыть в разных браузерах заранее)</a:t>
             </a:r>
           </a:p>
           <a:p>
             <a:endParaRPr lang="ru-RU" dirty="0"/>
-          </a:p>
-          <a:p>
-            <a:r>
-              <a:rPr lang="ru-RU" dirty="0"/>
-              <a:t>Спасибо.</a:t>
-            </a:r>
           </a:p>
         </p:txBody>
       </p:sp>
@@ -683,6 +690,117 @@
             <a:fld id="{E0AF4460-6503-445B-8A56-0254AB65E7A1}" type="slidenum">
               <a:rPr lang="en-US" smtClean="0"/>
               <a:t>10</a:t>
+            </a:fld>
+            <a:endParaRPr lang="en-US"/>
+          </a:p>
+        </p:txBody>
+      </p:sp>
+    </p:spTree>
+    <p:extLst>
+      <p:ext uri="{BB962C8B-B14F-4D97-AF65-F5344CB8AC3E}">
+        <p14:creationId xmlns:p14="http://schemas.microsoft.com/office/powerpoint/2010/main" val="1686704993"/>
+      </p:ext>
+    </p:extLst>
+  </p:cSld>
+  <p:clrMapOvr>
+    <a:masterClrMapping/>
+  </p:clrMapOvr>
+</p:notes>
+</file>
+
+<file path=ppt/notesSlides/notesSlide11.xml><?xml version="1.0" encoding="utf-8"?>
+<p:notes xmlns:a="http://schemas.openxmlformats.org/drawingml/2006/main" xmlns:r="http://schemas.openxmlformats.org/officeDocument/2006/relationships" xmlns:p="http://schemas.openxmlformats.org/presentationml/2006/main">
+  <p:cSld>
+    <p:spTree>
+      <p:nvGrpSpPr>
+        <p:cNvPr id="1" name=""/>
+        <p:cNvGrpSpPr/>
+        <p:nvPr/>
+      </p:nvGrpSpPr>
+      <p:grpSpPr>
+        <a:xfrm>
+          <a:off x="0" y="0"/>
+          <a:ext cx="0" cy="0"/>
+          <a:chOff x="0" y="0"/>
+          <a:chExt cx="0" cy="0"/>
+        </a:xfrm>
+      </p:grpSpPr>
+      <p:sp>
+        <p:nvSpPr>
+          <p:cNvPr id="2" name="Образ слайда 1"/>
+          <p:cNvSpPr>
+            <a:spLocks noGrp="1" noRot="1" noChangeAspect="1"/>
+          </p:cNvSpPr>
+          <p:nvPr>
+            <p:ph type="sldImg"/>
+          </p:nvPr>
+        </p:nvSpPr>
+        <p:spPr/>
+      </p:sp>
+      <p:sp>
+        <p:nvSpPr>
+          <p:cNvPr id="3" name="Заметки 2"/>
+          <p:cNvSpPr>
+            <a:spLocks noGrp="1"/>
+          </p:cNvSpPr>
+          <p:nvPr>
+            <p:ph type="body" idx="1"/>
+          </p:nvPr>
+        </p:nvSpPr>
+        <p:spPr/>
+        <p:txBody>
+          <a:bodyPr/>
+          <a:lstStyle/>
+          <a:p>
+            <a:r>
+              <a:rPr lang="ru-RU" dirty="0"/>
+              <a:t>Таким образом в процессе дипломного проектирования продемонстрирован …..(вставить вид деятельности) в части реализации функционала …..(вставить) , </a:t>
+            </a:r>
+          </a:p>
+          <a:p>
+            <a:r>
+              <a:rPr lang="ru-RU" dirty="0"/>
+              <a:t>также было выполнено …… (вставить вид деятельности) через (…..вставить) , </a:t>
+            </a:r>
+          </a:p>
+          <a:p>
+            <a:endParaRPr lang="ru-RU" dirty="0"/>
+          </a:p>
+          <a:p>
+            <a:r>
+              <a:rPr lang="ru-RU" dirty="0"/>
+              <a:t>В результате все цели (функциональные задачи) достигнуты (выполнены). </a:t>
+            </a:r>
+          </a:p>
+          <a:p>
+            <a:endParaRPr lang="ru-RU" dirty="0"/>
+          </a:p>
+          <a:p>
+            <a:r>
+              <a:rPr lang="ru-RU" dirty="0"/>
+              <a:t>Спасибо.</a:t>
+            </a:r>
+          </a:p>
+        </p:txBody>
+      </p:sp>
+      <p:sp>
+        <p:nvSpPr>
+          <p:cNvPr id="4" name="Номер слайда 3"/>
+          <p:cNvSpPr>
+            <a:spLocks noGrp="1"/>
+          </p:cNvSpPr>
+          <p:nvPr>
+            <p:ph type="sldNum" sz="quarter" idx="5"/>
+          </p:nvPr>
+        </p:nvSpPr>
+        <p:spPr/>
+        <p:txBody>
+          <a:bodyPr/>
+          <a:lstStyle/>
+          <a:p>
+            <a:fld id="{E0AF4460-6503-445B-8A56-0254AB65E7A1}" type="slidenum">
+              <a:rPr lang="en-US" smtClean="0"/>
+              <a:t>11</a:t>
             </a:fld>
             <a:endParaRPr lang="en-US"/>
           </a:p>
@@ -1097,147 +1215,6 @@
           <a:bodyPr/>
           <a:lstStyle/>
           <a:p>
-            <a:r>
-              <a:rPr lang="ru-RU" sz="1200" kern="1200" dirty="0">
-                <a:solidFill>
-                  <a:schemeClr val="tx1"/>
-                </a:solidFill>
-                <a:effectLst/>
-                <a:latin typeface="+mn-lt"/>
-                <a:ea typeface="+mn-ea"/>
-                <a:cs typeface="+mn-cs"/>
-              </a:rPr>
-              <a:t>На слайде представлены инструментальные средства для разработки программного продукта, </a:t>
-            </a:r>
-          </a:p>
-          <a:p>
-            <a:pPr lvl="0"/>
-            <a:endParaRPr lang="ru-RU" sz="1200" kern="1200" dirty="0">
-              <a:solidFill>
-                <a:schemeClr val="tx1"/>
-              </a:solidFill>
-              <a:effectLst/>
-              <a:latin typeface="+mn-lt"/>
-              <a:ea typeface="+mn-ea"/>
-              <a:cs typeface="+mn-cs"/>
-            </a:endParaRPr>
-          </a:p>
-          <a:p>
-            <a:pPr lvl="0"/>
-            <a:r>
-              <a:rPr lang="ru-RU" sz="1200" kern="1200" dirty="0">
-                <a:solidFill>
-                  <a:schemeClr val="tx1"/>
-                </a:solidFill>
-                <a:effectLst/>
-                <a:latin typeface="+mn-lt"/>
-                <a:ea typeface="+mn-ea"/>
-                <a:cs typeface="+mn-cs"/>
-              </a:rPr>
-              <a:t>архитектура ...... (клиент-серверная; )</a:t>
-            </a:r>
-          </a:p>
-          <a:p>
-            <a:pPr lvl="0"/>
-            <a:endParaRPr lang="ru-RU" sz="1200" kern="1200" dirty="0">
-              <a:solidFill>
-                <a:schemeClr val="tx1"/>
-              </a:solidFill>
-              <a:effectLst/>
-              <a:latin typeface="+mn-lt"/>
-              <a:ea typeface="+mn-ea"/>
-              <a:cs typeface="+mn-cs"/>
-            </a:endParaRPr>
-          </a:p>
-          <a:p>
-            <a:pPr lvl="0"/>
-            <a:r>
-              <a:rPr lang="ru-RU" sz="1200" kern="1200" dirty="0">
-                <a:solidFill>
-                  <a:schemeClr val="tx1"/>
-                </a:solidFill>
-                <a:effectLst/>
-                <a:latin typeface="+mn-lt"/>
-                <a:ea typeface="+mn-ea"/>
-                <a:cs typeface="+mn-cs"/>
-              </a:rPr>
-              <a:t>на стороне клиента использовалось веб инструменты: …..</a:t>
-            </a:r>
-          </a:p>
-          <a:p>
-            <a:endParaRPr lang="ru-RU" sz="1200" kern="1200" dirty="0">
-              <a:solidFill>
-                <a:schemeClr val="tx1"/>
-              </a:solidFill>
-              <a:effectLst/>
-              <a:latin typeface="+mn-lt"/>
-              <a:ea typeface="+mn-ea"/>
-              <a:cs typeface="+mn-cs"/>
-            </a:endParaRPr>
-          </a:p>
-          <a:p>
-            <a:r>
-              <a:rPr lang="ru-RU" sz="1200" kern="1200" dirty="0">
-                <a:solidFill>
-                  <a:schemeClr val="tx1"/>
-                </a:solidFill>
-                <a:effectLst/>
-                <a:latin typeface="+mn-lt"/>
-                <a:ea typeface="+mn-ea"/>
-                <a:cs typeface="+mn-cs"/>
-              </a:rPr>
-              <a:t>на стороне сервера использовалось: …… </a:t>
-            </a:r>
-          </a:p>
-          <a:p>
-            <a:endParaRPr lang="ru-RU" sz="1200" kern="1200" dirty="0">
-              <a:solidFill>
-                <a:schemeClr val="tx1"/>
-              </a:solidFill>
-              <a:effectLst/>
-              <a:latin typeface="+mn-lt"/>
-              <a:ea typeface="+mn-ea"/>
-              <a:cs typeface="+mn-cs"/>
-            </a:endParaRPr>
-          </a:p>
-          <a:p>
-            <a:r>
-              <a:rPr lang="ru-RU" sz="1200" kern="1200" dirty="0">
-                <a:solidFill>
-                  <a:schemeClr val="tx1"/>
-                </a:solidFill>
-                <a:effectLst/>
-                <a:latin typeface="+mn-lt"/>
-                <a:ea typeface="+mn-ea"/>
-                <a:cs typeface="+mn-cs"/>
-              </a:rPr>
-              <a:t>На этапе проектирования….. Использовались …. Для……..</a:t>
-            </a:r>
-          </a:p>
-          <a:p>
-            <a:endParaRPr lang="ru-RU" sz="1200" kern="1200" dirty="0">
-              <a:solidFill>
-                <a:schemeClr val="tx1"/>
-              </a:solidFill>
-              <a:effectLst/>
-              <a:latin typeface="+mn-lt"/>
-              <a:ea typeface="+mn-ea"/>
-              <a:cs typeface="+mn-cs"/>
-            </a:endParaRPr>
-          </a:p>
-          <a:p>
-            <a:r>
-              <a:rPr lang="ru-RU" sz="1200" kern="1200" dirty="0">
-                <a:solidFill>
-                  <a:schemeClr val="tx1"/>
-                </a:solidFill>
-                <a:effectLst/>
-                <a:latin typeface="+mn-lt"/>
-                <a:ea typeface="+mn-ea"/>
-                <a:cs typeface="+mn-cs"/>
-              </a:rPr>
-              <a:t>ИЛИ ПРОСТО ПЕРЕЧИСЛИТЬ</a:t>
-            </a:r>
             <a:endParaRPr lang="ru-RU" dirty="0"/>
           </a:p>
         </p:txBody>
@@ -1268,7 +1245,7 @@
     </p:spTree>
     <p:extLst>
       <p:ext uri="{BB962C8B-B14F-4D97-AF65-F5344CB8AC3E}">
-        <p14:creationId xmlns:p14="http://schemas.microsoft.com/office/powerpoint/2010/main" val="268609864"/>
+        <p14:creationId xmlns:p14="http://schemas.microsoft.com/office/powerpoint/2010/main" val="427423084"/>
       </p:ext>
     </p:extLst>
   </p:cSld>
@@ -1322,39 +1299,147 @@
           <a:bodyPr/>
           <a:lstStyle/>
           <a:p>
-            <a:pPr algn="l"/>
-            <a:r>
-              <a:rPr lang="ru-RU" dirty="0"/>
-              <a:t>На этапе функционального проектирования программного продукта построены диаграммы </a:t>
-            </a:r>
-          </a:p>
-          <a:p>
-            <a:pPr algn="l"/>
-            <a:r>
-              <a:rPr lang="ru-RU" dirty="0"/>
-              <a:t>вариантов использования (</a:t>
-            </a:r>
-            <a:r>
-              <a:rPr lang="en-US" dirty="0"/>
-              <a:t>USES CASE)</a:t>
-            </a:r>
-            <a:r>
-              <a:rPr lang="ru-RU" dirty="0"/>
-              <a:t> на которой вделано … (вставить) … ролей .</a:t>
-            </a:r>
-          </a:p>
-          <a:p>
-            <a:pPr algn="l"/>
-            <a:endParaRPr lang="ru-RU" dirty="0"/>
-          </a:p>
-          <a:p>
-            <a:pPr algn="l"/>
-            <a:r>
-              <a:rPr lang="ru-RU" dirty="0"/>
-              <a:t>Диаграмма деятельности  -для  моделировании бизнес-процессов, технологических процессов, и демонстрации последовательных действий.</a:t>
-            </a:r>
-          </a:p>
-          <a:p>
+            <a:r>
+              <a:rPr lang="ru-RU" sz="1200" kern="1200" dirty="0">
+                <a:solidFill>
+                  <a:schemeClr val="tx1"/>
+                </a:solidFill>
+                <a:effectLst/>
+                <a:latin typeface="+mn-lt"/>
+                <a:ea typeface="+mn-ea"/>
+                <a:cs typeface="+mn-cs"/>
+              </a:rPr>
+              <a:t>На слайде представлены инструментальные средства для разработки программного продукта, </a:t>
+            </a:r>
+          </a:p>
+          <a:p>
+            <a:pPr lvl="0"/>
+            <a:endParaRPr lang="ru-RU" sz="1200" kern="1200" dirty="0">
+              <a:solidFill>
+                <a:schemeClr val="tx1"/>
+              </a:solidFill>
+              <a:effectLst/>
+              <a:latin typeface="+mn-lt"/>
+              <a:ea typeface="+mn-ea"/>
+              <a:cs typeface="+mn-cs"/>
+            </a:endParaRPr>
+          </a:p>
+          <a:p>
+            <a:pPr lvl="0"/>
+            <a:r>
+              <a:rPr lang="ru-RU" sz="1200" kern="1200" dirty="0">
+                <a:solidFill>
+                  <a:schemeClr val="tx1"/>
+                </a:solidFill>
+                <a:effectLst/>
+                <a:latin typeface="+mn-lt"/>
+                <a:ea typeface="+mn-ea"/>
+                <a:cs typeface="+mn-cs"/>
+              </a:rPr>
+              <a:t>архитектура ...... (клиент-серверная; )</a:t>
+            </a:r>
+          </a:p>
+          <a:p>
+            <a:pPr lvl="0"/>
+            <a:endParaRPr lang="ru-RU" sz="1200" kern="1200" dirty="0">
+              <a:solidFill>
+                <a:schemeClr val="tx1"/>
+              </a:solidFill>
+              <a:effectLst/>
+              <a:latin typeface="+mn-lt"/>
+              <a:ea typeface="+mn-ea"/>
+              <a:cs typeface="+mn-cs"/>
+            </a:endParaRPr>
+          </a:p>
+          <a:p>
+            <a:pPr lvl="0"/>
+            <a:r>
+              <a:rPr lang="ru-RU" sz="1200" kern="1200" dirty="0">
+                <a:solidFill>
+                  <a:schemeClr val="tx1"/>
+                </a:solidFill>
+                <a:effectLst/>
+                <a:latin typeface="+mn-lt"/>
+                <a:ea typeface="+mn-ea"/>
+                <a:cs typeface="+mn-cs"/>
+              </a:rPr>
+              <a:t>на стороне клиента использовалось веб инструменты: …..</a:t>
+            </a:r>
+          </a:p>
+          <a:p>
+            <a:endParaRPr lang="ru-RU" sz="1200" kern="1200" dirty="0">
+              <a:solidFill>
+                <a:schemeClr val="tx1"/>
+              </a:solidFill>
+              <a:effectLst/>
+              <a:latin typeface="+mn-lt"/>
+              <a:ea typeface="+mn-ea"/>
+              <a:cs typeface="+mn-cs"/>
+            </a:endParaRPr>
+          </a:p>
+          <a:p>
+            <a:r>
+              <a:rPr lang="ru-RU" sz="1200" kern="1200" dirty="0">
+                <a:solidFill>
+                  <a:schemeClr val="tx1"/>
+                </a:solidFill>
+                <a:effectLst/>
+                <a:latin typeface="+mn-lt"/>
+                <a:ea typeface="+mn-ea"/>
+                <a:cs typeface="+mn-cs"/>
+              </a:rPr>
+              <a:t>на стороне сервера использовалось: …… </a:t>
+            </a:r>
+          </a:p>
+          <a:p>
+            <a:endParaRPr lang="ru-RU" sz="1200" kern="1200" dirty="0">
+              <a:solidFill>
+                <a:schemeClr val="tx1"/>
+              </a:solidFill>
+              <a:effectLst/>
+              <a:latin typeface="+mn-lt"/>
+              <a:ea typeface="+mn-ea"/>
+              <a:cs typeface="+mn-cs"/>
+            </a:endParaRPr>
+          </a:p>
+          <a:p>
+            <a:r>
+              <a:rPr lang="ru-RU" sz="1200" kern="1200" dirty="0">
+                <a:solidFill>
+                  <a:schemeClr val="tx1"/>
+                </a:solidFill>
+                <a:effectLst/>
+                <a:latin typeface="+mn-lt"/>
+                <a:ea typeface="+mn-ea"/>
+                <a:cs typeface="+mn-cs"/>
+              </a:rPr>
+              <a:t>На этапе проектирования….. Использовались …. Для……..</a:t>
+            </a:r>
+          </a:p>
+          <a:p>
+            <a:endParaRPr lang="ru-RU" sz="1200" kern="1200" dirty="0">
+              <a:solidFill>
+                <a:schemeClr val="tx1"/>
+              </a:solidFill>
+              <a:effectLst/>
+              <a:latin typeface="+mn-lt"/>
+              <a:ea typeface="+mn-ea"/>
+              <a:cs typeface="+mn-cs"/>
+            </a:endParaRPr>
+          </a:p>
+          <a:p>
+            <a:r>
+              <a:rPr lang="ru-RU" sz="1200" kern="1200" dirty="0">
+                <a:solidFill>
+                  <a:schemeClr val="tx1"/>
+                </a:solidFill>
+                <a:effectLst/>
+                <a:latin typeface="+mn-lt"/>
+                <a:ea typeface="+mn-ea"/>
+                <a:cs typeface="+mn-cs"/>
+              </a:rPr>
+              <a:t>ИЛИ ПРОСТО ПЕРЕЧИСЛИТЬ</a:t>
+            </a:r>
             <a:endParaRPr lang="ru-RU" dirty="0"/>
           </a:p>
         </p:txBody>
@@ -1385,7 +1470,7 @@
     </p:spTree>
     <p:extLst>
       <p:ext uri="{BB962C8B-B14F-4D97-AF65-F5344CB8AC3E}">
-        <p14:creationId xmlns:p14="http://schemas.microsoft.com/office/powerpoint/2010/main" val="4233107140"/>
+        <p14:creationId xmlns:p14="http://schemas.microsoft.com/office/powerpoint/2010/main" val="268609864"/>
       </p:ext>
     </p:extLst>
   </p:cSld>
@@ -1439,48 +1524,40 @@
           <a:bodyPr/>
           <a:lstStyle/>
           <a:p>
+            <a:pPr algn="l"/>
             <a:r>
               <a:rPr lang="ru-RU" dirty="0"/>
-              <a:t>Кром того, были построены в стандарте </a:t>
+              <a:t>На этапе функционального проектирования программного продукта построены диаграммы </a:t>
+            </a:r>
+          </a:p>
+          <a:p>
+            <a:pPr algn="l"/>
+            <a:r>
+              <a:rPr lang="ru-RU" dirty="0"/>
+              <a:t>вариантов использования (</a:t>
             </a:r>
             <a:r>
               <a:rPr lang="en-US" dirty="0"/>
-              <a:t>IDEF0 </a:t>
+              <a:t>USES CASE)</a:t>
             </a:r>
             <a:r>
               <a:rPr lang="ru-RU" dirty="0"/>
-              <a:t>контекстная диаграмма для </a:t>
-            </a:r>
-            <a:r>
-              <a:rPr lang="ru-RU" sz="1200" b="0" i="0" kern="1200" dirty="0">
-                <a:solidFill>
-                  <a:schemeClr val="tx1"/>
-                </a:solidFill>
-                <a:effectLst/>
-                <a:latin typeface="+mn-lt"/>
-                <a:ea typeface="+mn-ea"/>
-                <a:cs typeface="+mn-cs"/>
-              </a:rPr>
-              <a:t>представления общего описания системы</a:t>
-            </a:r>
-          </a:p>
-          <a:p>
-            <a:r>
-              <a:rPr lang="ru-RU" sz="1200" b="0" i="0" kern="1200" dirty="0">
-                <a:solidFill>
-                  <a:schemeClr val="tx1"/>
-                </a:solidFill>
-                <a:effectLst/>
-                <a:latin typeface="+mn-lt"/>
-                <a:ea typeface="+mn-ea"/>
-                <a:cs typeface="+mn-cs"/>
-              </a:rPr>
-              <a:t> </a:t>
-            </a:r>
+              <a:t> на которой вделано … (вставить) … ролей .</a:t>
+            </a:r>
+          </a:p>
+          <a:p>
+            <a:pPr algn="l"/>
+            <a:endParaRPr lang="ru-RU" dirty="0"/>
+          </a:p>
+          <a:p>
+            <a:pPr algn="l"/>
             <a:r>
               <a:rPr lang="ru-RU" dirty="0"/>
-              <a:t>и диаграмма декомпозиции показывающие детализацию процесса……</a:t>
-            </a:r>
+              <a:t>Диаграмма деятельности  -для  моделировании бизнес-процессов, технологических процессов, и демонстрации последовательных действий.</a:t>
+            </a:r>
+          </a:p>
+          <a:p>
+            <a:endParaRPr lang="ru-RU" dirty="0"/>
           </a:p>
         </p:txBody>
       </p:sp>
@@ -1510,7 +1587,7 @@
     </p:spTree>
     <p:extLst>
       <p:ext uri="{BB962C8B-B14F-4D97-AF65-F5344CB8AC3E}">
-        <p14:creationId xmlns:p14="http://schemas.microsoft.com/office/powerpoint/2010/main" val="4137020733"/>
+        <p14:creationId xmlns:p14="http://schemas.microsoft.com/office/powerpoint/2010/main" val="4233107140"/>
       </p:ext>
     </p:extLst>
   </p:cSld>
@@ -1565,7 +1642,19 @@
           <a:lstStyle/>
           <a:p>
             <a:r>
-              <a:rPr lang="ru-RU" sz="1200" kern="1200" dirty="0">
+              <a:rPr lang="ru-RU" dirty="0"/>
+              <a:t>Кром того, были построены в стандарте </a:t>
+            </a:r>
+            <a:r>
+              <a:rPr lang="en-US" dirty="0"/>
+              <a:t>IDEF0 </a:t>
+            </a:r>
+            <a:r>
+              <a:rPr lang="ru-RU" dirty="0"/>
+              <a:t>контекстная диаграмма для </a:t>
+            </a:r>
+            <a:r>
+              <a:rPr lang="ru-RU" sz="1200" b="0" i="0" kern="1200" dirty="0">
                 <a:solidFill>
                   <a:schemeClr val="tx1"/>
                 </a:solidFill>
@@ -1574,9 +1663,26 @@
                 <a:ea typeface="+mn-ea"/>
                 <a:cs typeface="+mn-cs"/>
               </a:rPr>
-              <a:t>На этапе проектирования базы данных, была построена ER-модель базы данных ……., которая содержит 23  таблиц….</a:t>
-            </a:r>
-            <a:endParaRPr lang="ru-RU" dirty="0"/>
+              <a:t>представления общего описания системы</a:t>
+            </a:r>
+          </a:p>
+          <a:p>
+            <a:r>
+              <a:rPr lang="ru-RU" sz="1200" b="0" i="0" kern="1200" dirty="0">
+                <a:solidFill>
+                  <a:schemeClr val="tx1"/>
+                </a:solidFill>
+                <a:effectLst/>
+                <a:latin typeface="+mn-lt"/>
+                <a:ea typeface="+mn-ea"/>
+                <a:cs typeface="+mn-cs"/>
+              </a:rPr>
+              <a:t> </a:t>
+            </a:r>
+            <a:r>
+              <a:rPr lang="ru-RU" dirty="0"/>
+              <a:t>и диаграмма декомпозиции показывающие детализацию процесса……</a:t>
+            </a:r>
           </a:p>
         </p:txBody>
       </p:sp>
@@ -1606,7 +1712,7 @@
     </p:spTree>
     <p:extLst>
       <p:ext uri="{BB962C8B-B14F-4D97-AF65-F5344CB8AC3E}">
-        <p14:creationId xmlns:p14="http://schemas.microsoft.com/office/powerpoint/2010/main" val="2578438382"/>
+        <p14:creationId xmlns:p14="http://schemas.microsoft.com/office/powerpoint/2010/main" val="4137020733"/>
       </p:ext>
     </p:extLst>
   </p:cSld>
@@ -1661,18 +1767,18 @@
           <a:lstStyle/>
           <a:p>
             <a:r>
-              <a:rPr lang="ru-RU" dirty="0"/>
-              <a:t>После разработки было проведено тестирование. Выбрано вид тестирования….. Это …..</a:t>
-            </a:r>
-          </a:p>
-          <a:p>
+              <a:rPr lang="ru-RU" sz="1200" kern="1200" dirty="0">
+                <a:solidFill>
+                  <a:schemeClr val="tx1"/>
+                </a:solidFill>
+                <a:effectLst/>
+                <a:latin typeface="+mn-lt"/>
+                <a:ea typeface="+mn-ea"/>
+                <a:cs typeface="+mn-cs"/>
+              </a:rPr>
+              <a:t>На этапе проектирования базы данных, была построена ER-модель базы данных ……., которая содержит 23  таблиц….</a:t>
+            </a:r>
             <a:endParaRPr lang="ru-RU" dirty="0"/>
-          </a:p>
-          <a:p>
-            <a:r>
-              <a:rPr lang="ru-RU" dirty="0"/>
-              <a:t>Результат тестирования…..</a:t>
-            </a:r>
           </a:p>
         </p:txBody>
       </p:sp>
@@ -1702,7 +1808,7 @@
     </p:spTree>
     <p:extLst>
       <p:ext uri="{BB962C8B-B14F-4D97-AF65-F5344CB8AC3E}">
-        <p14:creationId xmlns:p14="http://schemas.microsoft.com/office/powerpoint/2010/main" val="1516987450"/>
+        <p14:creationId xmlns:p14="http://schemas.microsoft.com/office/powerpoint/2010/main" val="2578438382"/>
       </p:ext>
     </p:extLst>
   </p:cSld>
@@ -1758,38 +1864,17 @@
           <a:p>
             <a:r>
               <a:rPr lang="ru-RU" dirty="0"/>
-              <a:t>Демонстрация программного продукта</a:t>
+              <a:t>После разработки было проведено тестирование. Выбрано вид тестирования….. Это …..</a:t>
             </a:r>
           </a:p>
           <a:p>
             <a:endParaRPr lang="ru-RU" dirty="0"/>
           </a:p>
           <a:p>
-            <a:endParaRPr lang="ru-RU" dirty="0"/>
-          </a:p>
-          <a:p>
             <a:r>
               <a:rPr lang="ru-RU" dirty="0"/>
-              <a:t>При работе выделены … (количество)  ролей, (назвать кто ) ….</a:t>
-            </a:r>
-          </a:p>
-          <a:p>
-            <a:r>
-              <a:rPr lang="ru-RU" dirty="0"/>
-              <a:t> </a:t>
-            </a:r>
-          </a:p>
-          <a:p>
-            <a:endParaRPr lang="ru-RU" dirty="0"/>
-          </a:p>
-          <a:p>
-            <a:r>
-              <a:rPr lang="ru-RU" dirty="0"/>
-              <a:t>демонстрируем под заявленный функционал каждой роли (открыть в разных браузерах заранее)</a:t>
-            </a:r>
-          </a:p>
-          <a:p>
-            <a:endParaRPr lang="ru-RU" dirty="0"/>
+              <a:t>Результат тестирования…..</a:t>
+            </a:r>
           </a:p>
         </p:txBody>
       </p:sp>
@@ -1819,7 +1904,7 @@
     </p:spTree>
     <p:extLst>
       <p:ext uri="{BB962C8B-B14F-4D97-AF65-F5344CB8AC3E}">
-        <p14:creationId xmlns:p14="http://schemas.microsoft.com/office/powerpoint/2010/main" val="1686704993"/>
+        <p14:creationId xmlns:p14="http://schemas.microsoft.com/office/powerpoint/2010/main" val="1516987450"/>
       </p:ext>
     </p:extLst>
   </p:cSld>
@@ -1976,7 +2061,7 @@
           <a:p>
             <a:fld id="{DEA76DA3-B598-4B8A-8255-3391DDF783A7}" type="datetimeFigureOut">
               <a:rPr lang="ru-RU" smtClean="0"/>
-              <a:t>24.05.2026</a:t>
+              <a:t>31.05.2026</a:t>
             </a:fld>
             <a:endParaRPr lang="ru-RU"/>
           </a:p>
@@ -2174,7 +2259,7 @@
           <a:p>
             <a:fld id="{DEA76DA3-B598-4B8A-8255-3391DDF783A7}" type="datetimeFigureOut">
               <a:rPr lang="ru-RU" smtClean="0"/>
-              <a:t>24.05.2026</a:t>
+              <a:t>31.05.2026</a:t>
             </a:fld>
             <a:endParaRPr lang="ru-RU"/>
           </a:p>
@@ -2382,7 +2467,7 @@
           <a:p>
             <a:fld id="{DEA76DA3-B598-4B8A-8255-3391DDF783A7}" type="datetimeFigureOut">
               <a:rPr lang="ru-RU" smtClean="0"/>
-              <a:t>24.05.2026</a:t>
+              <a:t>31.05.2026</a:t>
             </a:fld>
             <a:endParaRPr lang="ru-RU"/>
           </a:p>
@@ -2489,7 +2574,7 @@
           <a:p>
             <a:fld id="{F93A723B-5719-4EEA-B777-EAF3DA7FDF21}" type="datetimeFigureOut">
               <a:rPr lang="ru-RU" smtClean="0"/>
-              <a:t>24.05.2026</a:t>
+              <a:t>31.05.2026</a:t>
             </a:fld>
             <a:endParaRPr lang="ru-RU"/>
           </a:p>
@@ -2755,7 +2840,7 @@
           <a:p>
             <a:fld id="{DEA76DA3-B598-4B8A-8255-3391DDF783A7}" type="datetimeFigureOut">
               <a:rPr lang="ru-RU" smtClean="0"/>
-              <a:t>24.05.2026</a:t>
+              <a:t>31.05.2026</a:t>
             </a:fld>
             <a:endParaRPr lang="ru-RU"/>
           </a:p>
@@ -3030,7 +3115,7 @@
           <a:p>
             <a:fld id="{DEA76DA3-B598-4B8A-8255-3391DDF783A7}" type="datetimeFigureOut">
               <a:rPr lang="ru-RU" smtClean="0"/>
-              <a:t>24.05.2026</a:t>
+              <a:t>31.05.2026</a:t>
             </a:fld>
             <a:endParaRPr lang="ru-RU"/>
           </a:p>
@@ -3295,7 +3380,7 @@
           <a:p>
             <a:fld id="{DEA76DA3-B598-4B8A-8255-3391DDF783A7}" type="datetimeFigureOut">
               <a:rPr lang="ru-RU" smtClean="0"/>
-              <a:t>24.05.2026</a:t>
+              <a:t>31.05.2026</a:t>
             </a:fld>
             <a:endParaRPr lang="ru-RU"/>
           </a:p>
@@ -3707,7 +3792,7 @@
           <a:p>
             <a:fld id="{DEA76DA3-B598-4B8A-8255-3391DDF783A7}" type="datetimeFigureOut">
               <a:rPr lang="ru-RU" smtClean="0"/>
-              <a:t>24.05.2026</a:t>
+              <a:t>31.05.2026</a:t>
             </a:fld>
             <a:endParaRPr lang="ru-RU"/>
           </a:p>
@@ -3848,7 +3933,7 @@
           <a:p>
             <a:fld id="{DEA76DA3-B598-4B8A-8255-3391DDF783A7}" type="datetimeFigureOut">
               <a:rPr lang="ru-RU" smtClean="0"/>
-              <a:t>24.05.2026</a:t>
+              <a:t>31.05.2026</a:t>
             </a:fld>
             <a:endParaRPr lang="ru-RU"/>
           </a:p>
@@ -3961,7 +4046,7 @@
           <a:p>
             <a:fld id="{DEA76DA3-B598-4B8A-8255-3391DDF783A7}" type="datetimeFigureOut">
               <a:rPr lang="ru-RU" smtClean="0"/>
-              <a:t>24.05.2026</a:t>
+              <a:t>31.05.2026</a:t>
             </a:fld>
             <a:endParaRPr lang="ru-RU"/>
           </a:p>
@@ -4272,7 +4357,7 @@
           <a:p>
             <a:fld id="{DEA76DA3-B598-4B8A-8255-3391DDF783A7}" type="datetimeFigureOut">
               <a:rPr lang="ru-RU" smtClean="0"/>
-              <a:t>24.05.2026</a:t>
+              <a:t>31.05.2026</a:t>
             </a:fld>
             <a:endParaRPr lang="ru-RU"/>
           </a:p>
@@ -4560,7 +4645,7 @@
           <a:p>
             <a:fld id="{DEA76DA3-B598-4B8A-8255-3391DDF783A7}" type="datetimeFigureOut">
               <a:rPr lang="ru-RU" smtClean="0"/>
-              <a:t>24.05.2026</a:t>
+              <a:t>31.05.2026</a:t>
             </a:fld>
             <a:endParaRPr lang="ru-RU"/>
           </a:p>
@@ -4801,7 +4886,7 @@
           <a:p>
             <a:fld id="{DEA76DA3-B598-4B8A-8255-3391DDF783A7}" type="datetimeFigureOut">
               <a:rPr lang="ru-RU" smtClean="0"/>
-              <a:t>24.05.2026</a:t>
+              <a:t>31.05.2026</a:t>
             </a:fld>
             <a:endParaRPr lang="ru-RU"/>
           </a:p>
@@ -5268,9 +5353,9 @@
           <a:p>
             <a:pPr marL="182880"/>
             <a:r>
-              <a:rPr lang="ru-RU" sz="4400" dirty="0">
-                <a:solidFill>
-                  <a:schemeClr val="accent1"/>
+              <a:rPr lang="ru-RU" sz="5200" dirty="0">
+                <a:solidFill>
+                  <a:srgbClr val="C00000"/>
                 </a:solidFill>
                 <a:effectLst>
                   <a:outerShdw blurRad="38100" dist="38100" dir="2700000" algn="tl">
@@ -5583,10 +5668,10 @@
       </p:grpSpPr>
       <p:sp>
         <p:nvSpPr>
-          <p:cNvPr id="4" name="Заголовок 4">
-            <a:extLst>
-              <a:ext uri="{FF2B5EF4-FFF2-40B4-BE49-F238E27FC236}">
-                <a16:creationId xmlns:a16="http://schemas.microsoft.com/office/drawing/2014/main" id="{03DB970B-9C80-46DC-8E32-7C5FC8006705}"/>
+          <p:cNvPr id="2" name="Заголовок 1">
+            <a:extLst>
+              <a:ext uri="{FF2B5EF4-FFF2-40B4-BE49-F238E27FC236}">
+                <a16:creationId xmlns:a16="http://schemas.microsoft.com/office/drawing/2014/main" id="{7600BC0C-F276-4244-A7CD-BD0F4DCD932D}"/>
               </a:ext>
             </a:extLst>
           </p:cNvPr>
@@ -5599,7 +5684,123 @@
         </p:nvSpPr>
         <p:spPr>
           <a:xfrm>
-            <a:off x="4110267" y="81542"/>
+            <a:off x="0" y="2766218"/>
+            <a:ext cx="12192000" cy="1325563"/>
+          </a:xfrm>
+        </p:spPr>
+        <p:txBody>
+          <a:bodyPr>
+            <a:noAutofit/>
+          </a:bodyPr>
+          <a:lstStyle/>
+          <a:p>
+            <a:r>
+              <a:rPr lang="ru-RU" sz="4800" b="1" dirty="0">
+                <a:solidFill>
+                  <a:srgbClr val="C00000"/>
+                </a:solidFill>
+                <a:latin typeface="Arial" panose="020B0604020202020204" pitchFamily="34" charset="0"/>
+                <a:cs typeface="Arial" panose="020B0604020202020204" pitchFamily="34" charset="0"/>
+              </a:rPr>
+              <a:t>Демонстрация программного продукта</a:t>
+            </a:r>
+            <a:endParaRPr lang="ru-RU" sz="4800" dirty="0">
+              <a:solidFill>
+                <a:srgbClr val="C00000"/>
+              </a:solidFill>
+            </a:endParaRPr>
+          </a:p>
+        </p:txBody>
+      </p:sp>
+      <p:sp>
+        <p:nvSpPr>
+          <p:cNvPr id="5" name="TextBox 4">
+            <a:extLst>
+              <a:ext uri="{FF2B5EF4-FFF2-40B4-BE49-F238E27FC236}">
+                <a16:creationId xmlns:a16="http://schemas.microsoft.com/office/drawing/2014/main" id="{7BFBD571-39F3-4865-BB27-AA37ACFF1329}"/>
+              </a:ext>
+            </a:extLst>
+          </p:cNvPr>
+          <p:cNvSpPr txBox="1"/>
+          <p:nvPr/>
+        </p:nvSpPr>
+        <p:spPr>
+          <a:xfrm>
+            <a:off x="11541379" y="6288656"/>
+            <a:ext cx="545284" cy="400110"/>
+          </a:xfrm>
+          <a:prstGeom prst="rect">
+            <a:avLst/>
+          </a:prstGeom>
+          <a:noFill/>
+        </p:spPr>
+        <p:txBody>
+          <a:bodyPr wrap="square" rtlCol="0">
+            <a:spAutoFit/>
+          </a:bodyPr>
+          <a:lstStyle/>
+          <a:p>
+            <a:pPr algn="ctr"/>
+            <a:r>
+              <a:rPr lang="ru-RU" sz="2000" b="1" dirty="0">
+                <a:solidFill>
+                  <a:srgbClr val="C00000"/>
+                </a:solidFill>
+              </a:rPr>
+              <a:t>10</a:t>
+            </a:r>
+          </a:p>
+        </p:txBody>
+      </p:sp>
+    </p:spTree>
+    <p:extLst>
+      <p:ext uri="{BB962C8B-B14F-4D97-AF65-F5344CB8AC3E}">
+        <p14:creationId xmlns:p14="http://schemas.microsoft.com/office/powerpoint/2010/main" val="286539850"/>
+      </p:ext>
+    </p:extLst>
+  </p:cSld>
+  <p:clrMapOvr>
+    <a:masterClrMapping/>
+  </p:clrMapOvr>
+</p:sld>
+</file>
+
+<file path=ppt/slides/slide11.xml><?xml version="1.0" encoding="utf-8"?>
+<p:sld xmlns:a="http://schemas.openxmlformats.org/drawingml/2006/main" xmlns:r="http://schemas.openxmlformats.org/officeDocument/2006/relationships" xmlns:p="http://schemas.openxmlformats.org/presentationml/2006/main">
+  <p:cSld>
+    <p:spTree>
+      <p:nvGrpSpPr>
+        <p:cNvPr id="1" name=""/>
+        <p:cNvGrpSpPr/>
+        <p:nvPr/>
+      </p:nvGrpSpPr>
+      <p:grpSpPr>
+        <a:xfrm>
+          <a:off x="0" y="0"/>
+          <a:ext cx="0" cy="0"/>
+          <a:chOff x="0" y="0"/>
+          <a:chExt cx="0" cy="0"/>
+        </a:xfrm>
+      </p:grpSpPr>
+      <p:sp>
+        <p:nvSpPr>
+          <p:cNvPr id="4" name="Заголовок 4">
+            <a:extLst>
+              <a:ext uri="{FF2B5EF4-FFF2-40B4-BE49-F238E27FC236}">
+                <a16:creationId xmlns:a16="http://schemas.microsoft.com/office/drawing/2014/main" id="{03DB970B-9C80-46DC-8E32-7C5FC8006705}"/>
+              </a:ext>
+            </a:extLst>
+          </p:cNvPr>
+          <p:cNvSpPr>
+            <a:spLocks noGrp="1"/>
+          </p:cNvSpPr>
+          <p:nvPr>
+            <p:ph type="title"/>
+          </p:nvPr>
+        </p:nvSpPr>
+        <p:spPr>
+          <a:xfrm>
+            <a:off x="4137808" y="-289933"/>
             <a:ext cx="3643659" cy="1143000"/>
           </a:xfrm>
         </p:spPr>
@@ -5615,7 +5816,7 @@
             <a:r>
               <a:rPr lang="ru-RU" sz="3200" b="1" dirty="0">
                 <a:solidFill>
-                  <a:schemeClr val="accent1"/>
+                  <a:srgbClr val="C00000"/>
                 </a:solidFill>
                 <a:latin typeface="Arial" panose="020B0604020202020204" pitchFamily="34" charset="0"/>
                 <a:cs typeface="Arial" panose="020B0604020202020204" pitchFamily="34" charset="0"/>
@@ -5655,18 +5856,13 @@
           <a:p>
             <a:pPr algn="ctr"/>
             <a:r>
-              <a:rPr lang="ru-RU" sz="2000" b="1">
-                <a:solidFill>
-                  <a:schemeClr val="accent1"/>
+              <a:rPr lang="ru-RU" sz="2000" b="1" dirty="0">
+                <a:solidFill>
+                  <a:srgbClr val="C00000"/>
                 </a:solidFill>
               </a:rPr>
-              <a:t>8</a:t>
-            </a:r>
-            <a:endParaRPr lang="ru-RU" sz="2000" b="1" dirty="0">
-              <a:solidFill>
-                <a:schemeClr val="accent1"/>
-              </a:solidFill>
-            </a:endParaRPr>
+              <a:t>11</a:t>
+            </a:r>
           </a:p>
         </p:txBody>
       </p:sp>
@@ -5685,14 +5881,14 @@
           <p:nvPr>
             <p:extLst>
               <p:ext uri="{D42A27DB-BD31-4B8C-83A1-F6EECF244321}">
-                <p14:modId xmlns:p14="http://schemas.microsoft.com/office/powerpoint/2010/main" val="77269769"/>
+                <p14:modId xmlns:p14="http://schemas.microsoft.com/office/powerpoint/2010/main" val="1649201600"/>
               </p:ext>
             </p:extLst>
           </p:nvPr>
         </p:nvGraphicFramePr>
         <p:xfrm>
-          <a:off x="351692" y="1005840"/>
-          <a:ext cx="11215893" cy="4328160"/>
+          <a:off x="351692" y="1005839"/>
+          <a:ext cx="11215893" cy="5558854"/>
         </p:xfrm>
         <a:graphic>
           <a:graphicData uri="http://schemas.openxmlformats.org/drawingml/2006/table">
@@ -5716,7 +5912,7 @@
                   </a:extLst>
                 </a:gridCol>
               </a:tblGrid>
-              <a:tr h="370840">
+              <a:tr h="634757">
                 <a:tc>
                   <a:txBody>
                     <a:bodyPr/>
@@ -5732,7 +5928,11 @@
                       </a:r>
                     </a:p>
                   </a:txBody>
-                  <a:tcPr/>
+                  <a:tcPr>
+                    <a:solidFill>
+                      <a:srgbClr val="C00000"/>
+                    </a:solidFill>
+                  </a:tcPr>
                 </a:tc>
                 <a:tc>
                   <a:txBody>
@@ -5789,7 +5989,11 @@
                       </a:endParaRPr>
                     </a:p>
                   </a:txBody>
-                  <a:tcPr/>
+                  <a:tcPr>
+                    <a:solidFill>
+                      <a:srgbClr val="C00000"/>
+                    </a:solidFill>
+                  </a:tcPr>
                 </a:tc>
                 <a:extLst>
                   <a:ext uri="{0D108BD9-81ED-4DB2-BD59-A6C34878D82A}">
@@ -5797,7 +6001,7 @@
                   </a:ext>
                 </a:extLst>
               </a:tr>
-              <a:tr h="370840">
+              <a:tr h="1045483">
                 <a:tc>
                   <a:txBody>
                     <a:bodyPr/>
@@ -5821,7 +6025,7 @@
                         <a:defRPr/>
                       </a:pPr>
                       <a:r>
-                        <a:rPr lang="ru-RU" sz="1800" b="1" kern="1200" dirty="0">
+                        <a:rPr lang="ru-RU" sz="2000" b="1" kern="1200" dirty="0">
                           <a:solidFill>
                             <a:schemeClr val="dk1"/>
                           </a:solidFill>
@@ -5832,13 +6036,13 @@
                         </a:rPr>
                         <a:t>Осуществление интеграции программных модулей.</a:t>
                       </a:r>
-                      <a:endParaRPr lang="ru-RU" sz="1400" dirty="0">
+                      <a:endParaRPr lang="ru-RU" sz="1600" dirty="0">
                         <a:effectLst/>
                       </a:endParaRPr>
                     </a:p>
                     <a:p>
                       <a:pPr marL="0" algn="l" defTabSz="914400" rtl="0" eaLnBrk="1" latinLnBrk="0" hangingPunct="1"/>
-                      <a:endParaRPr lang="ru-RU" sz="1400" dirty="0"/>
+                      <a:endParaRPr lang="ru-RU" sz="1600" dirty="0"/>
                     </a:p>
                   </a:txBody>
                   <a:tcPr/>
@@ -5856,7 +6060,7 @@
                         <a:buNone/>
                       </a:pPr>
                       <a:r>
-                        <a:rPr lang="ru-RU" sz="1400" dirty="0">
+                        <a:rPr lang="ru-RU" sz="1600" dirty="0">
                           <a:effectLst/>
                           <a:latin typeface="Arial" panose="020B0604020202020204" pitchFamily="34" charset="0"/>
                           <a:ea typeface="Times New Roman" panose="02020603050405020304" pitchFamily="18" charset="0"/>
@@ -5865,7 +6069,7 @@
                         <a:t>Интеграция с сервисом </a:t>
                       </a:r>
                       <a:r>
-                        <a:rPr lang="ru-RU" sz="1400" dirty="0" err="1">
+                        <a:rPr lang="ru-RU" sz="1600" dirty="0" err="1">
                           <a:effectLst/>
                           <a:latin typeface="Arial" panose="020B0604020202020204" pitchFamily="34" charset="0"/>
                           <a:ea typeface="Times New Roman" panose="02020603050405020304" pitchFamily="18" charset="0"/>
@@ -5874,7 +6078,7 @@
                         <a:t>DaData</a:t>
                       </a:r>
                       <a:r>
-                        <a:rPr lang="ru-RU" sz="1400" dirty="0">
+                        <a:rPr lang="ru-RU" sz="1600" dirty="0">
                           <a:effectLst/>
                           <a:latin typeface="Arial" panose="020B0604020202020204" pitchFamily="34" charset="0"/>
                           <a:ea typeface="Times New Roman" panose="02020603050405020304" pitchFamily="18" charset="0"/>
@@ -5892,7 +6096,7 @@
                   </a:ext>
                 </a:extLst>
               </a:tr>
-              <a:tr h="370840">
+              <a:tr h="1157499">
                 <a:tc>
                   <a:txBody>
                     <a:bodyPr/>
@@ -5916,7 +6120,7 @@
                         <a:defRPr/>
                       </a:pPr>
                       <a:r>
-                        <a:rPr lang="ru-RU" sz="1800" b="1" kern="1200" dirty="0" err="1">
+                        <a:rPr lang="ru-RU" sz="2000" b="1" kern="1200" dirty="0" err="1">
                           <a:solidFill>
                             <a:schemeClr val="dk1"/>
                           </a:solidFill>
@@ -5928,7 +6132,7 @@
                         <a:t>Ревьюирование</a:t>
                       </a:r>
                       <a:r>
-                        <a:rPr lang="ru-RU" sz="1800" b="1" kern="1200" dirty="0">
+                        <a:rPr lang="ru-RU" sz="2000" b="1" kern="1200" dirty="0">
                           <a:solidFill>
                             <a:schemeClr val="dk1"/>
                           </a:solidFill>
@@ -5939,13 +6143,13 @@
                         </a:rPr>
                         <a:t> программных продуктов.</a:t>
                       </a:r>
-                      <a:endParaRPr lang="ru-RU" sz="1400" dirty="0">
+                      <a:endParaRPr lang="ru-RU" sz="1600" dirty="0">
                         <a:effectLst/>
                       </a:endParaRPr>
                     </a:p>
                     <a:p>
                       <a:pPr marL="0" algn="l" defTabSz="914400" rtl="0" eaLnBrk="1" latinLnBrk="0" hangingPunct="1"/>
-                      <a:endParaRPr lang="ru-RU" sz="1400" dirty="0"/>
+                      <a:endParaRPr lang="ru-RU" sz="1600" dirty="0"/>
                     </a:p>
                   </a:txBody>
                   <a:tcPr/>
@@ -5963,7 +6167,7 @@
                         <a:buNone/>
                       </a:pPr>
                       <a:r>
-                        <a:rPr lang="ru-RU" sz="1400" dirty="0">
+                        <a:rPr lang="ru-RU" sz="1600" dirty="0">
                           <a:effectLst/>
                           <a:latin typeface="Arial" panose="020B0604020202020204" pitchFamily="34" charset="0"/>
                           <a:ea typeface="Times New Roman" panose="02020603050405020304" pitchFamily="18" charset="0"/>
@@ -5971,7 +6175,7 @@
                         </a:rPr>
                         <a:t>Проверка соответствия реализованных функций требованиям жизненный цикл заявок, разграничение прав по ролям, валидация данных, обработка ошибок; функциональное и нагрузочное тестирование.</a:t>
                       </a:r>
-                      <a:endParaRPr lang="ru-RU" sz="1400" dirty="0">
+                      <a:endParaRPr lang="ru-RU" sz="1600" dirty="0">
                         <a:latin typeface="Arial" panose="020B0604020202020204" pitchFamily="34" charset="0"/>
                         <a:cs typeface="Arial" panose="020B0604020202020204" pitchFamily="34" charset="0"/>
                       </a:endParaRPr>
@@ -5985,7 +6189,7 @@
                   </a:ext>
                 </a:extLst>
               </a:tr>
-              <a:tr h="370840">
+              <a:tr h="1045483">
                 <a:tc>
                   <a:txBody>
                     <a:bodyPr/>
@@ -6009,7 +6213,7 @@
                         <a:defRPr/>
                       </a:pPr>
                       <a:r>
-                        <a:rPr lang="ru-RU" sz="1800" b="1" kern="1200" dirty="0">
+                        <a:rPr lang="ru-RU" sz="2000" b="1" kern="1200" dirty="0">
                           <a:solidFill>
                             <a:schemeClr val="dk1"/>
                           </a:solidFill>
@@ -6020,13 +6224,13 @@
                         </a:rPr>
                         <a:t>Проектирование и разработка информационных систем.</a:t>
                       </a:r>
-                      <a:endParaRPr lang="ru-RU" sz="1400" dirty="0">
+                      <a:endParaRPr lang="ru-RU" sz="1600" dirty="0">
                         <a:effectLst/>
                       </a:endParaRPr>
                     </a:p>
                     <a:p>
                       <a:pPr marL="0" algn="l" defTabSz="914400" rtl="0" eaLnBrk="1" latinLnBrk="0" hangingPunct="1"/>
-                      <a:endParaRPr lang="ru-RU" sz="1400" dirty="0"/>
+                      <a:endParaRPr lang="ru-RU" sz="1600" dirty="0"/>
                     </a:p>
                   </a:txBody>
                   <a:tcPr/>
@@ -6044,7 +6248,7 @@
                         <a:buNone/>
                       </a:pPr>
                       <a:r>
-                        <a:rPr lang="ru-RU" sz="1400" dirty="0">
+                        <a:rPr lang="ru-RU" sz="1600" dirty="0">
                           <a:effectLst/>
                           <a:latin typeface="Arial" panose="020B0604020202020204" pitchFamily="34" charset="0"/>
                           <a:ea typeface="Times New Roman" panose="02020603050405020304" pitchFamily="18" charset="0"/>
@@ -6062,7 +6266,7 @@
                   </a:ext>
                 </a:extLst>
               </a:tr>
-              <a:tr h="370840">
+              <a:tr h="709435">
                 <a:tc>
                   <a:txBody>
                     <a:bodyPr/>
@@ -6086,7 +6290,7 @@
                         <a:defRPr/>
                       </a:pPr>
                       <a:r>
-                        <a:rPr lang="ru-RU" sz="1800" b="1" kern="1200" dirty="0">
+                        <a:rPr lang="ru-RU" sz="2000" b="1" kern="1200" dirty="0">
                           <a:solidFill>
                             <a:schemeClr val="dk1"/>
                           </a:solidFill>
@@ -6097,13 +6301,13 @@
                         </a:rPr>
                         <a:t>Сопровождение информационных систем.</a:t>
                       </a:r>
-                      <a:endParaRPr lang="ru-RU" sz="1400" dirty="0">
+                      <a:endParaRPr lang="ru-RU" sz="1600" dirty="0">
                         <a:effectLst/>
                       </a:endParaRPr>
                     </a:p>
                     <a:p>
                       <a:pPr marL="0" algn="l" defTabSz="914400" rtl="0" eaLnBrk="1" latinLnBrk="0" hangingPunct="1"/>
-                      <a:endParaRPr lang="ru-RU" sz="1400" b="1" kern="1200" dirty="0">
+                      <a:endParaRPr lang="ru-RU" sz="1600" b="1" kern="1200" dirty="0">
                         <a:solidFill>
                           <a:schemeClr val="dk1"/>
                         </a:solidFill>
@@ -6128,7 +6332,7 @@
                         <a:buNone/>
                       </a:pPr>
                       <a:r>
-                        <a:rPr lang="ru-RU" sz="1400" kern="1200" dirty="0">
+                        <a:rPr lang="ru-RU" sz="1600" kern="1200" dirty="0">
                           <a:solidFill>
                             <a:schemeClr val="dk1"/>
                           </a:solidFill>
@@ -6149,7 +6353,7 @@
                   </a:ext>
                 </a:extLst>
               </a:tr>
-              <a:tr h="370840">
+              <a:tr h="709435">
                 <a:tc>
                   <a:txBody>
                     <a:bodyPr/>
@@ -6173,7 +6377,7 @@
                         <a:defRPr/>
                       </a:pPr>
                       <a:r>
-                        <a:rPr lang="ru-RU" sz="1800" b="1" kern="1200" dirty="0" err="1">
+                        <a:rPr lang="ru-RU" sz="2000" b="1" kern="1200" dirty="0" err="1">
                           <a:solidFill>
                             <a:schemeClr val="dk1"/>
                           </a:solidFill>
@@ -6185,7 +6389,7 @@
                         <a:t>Соадминистрирование</a:t>
                       </a:r>
                       <a:r>
-                        <a:rPr lang="ru-RU" sz="1800" b="1" kern="1200" dirty="0">
+                        <a:rPr lang="ru-RU" sz="2000" b="1" kern="1200" dirty="0">
                           <a:solidFill>
                             <a:schemeClr val="dk1"/>
                           </a:solidFill>
@@ -6196,13 +6400,13 @@
                         </a:rPr>
                         <a:t> баз данных и серверов.</a:t>
                       </a:r>
-                      <a:endParaRPr lang="ru-RU" sz="1400" dirty="0">
+                      <a:endParaRPr lang="ru-RU" sz="1600" dirty="0">
                         <a:effectLst/>
                       </a:endParaRPr>
                     </a:p>
                     <a:p>
                       <a:pPr marL="0" algn="l" defTabSz="914400" rtl="0" eaLnBrk="1" latinLnBrk="0" hangingPunct="1"/>
-                      <a:endParaRPr lang="ru-RU" sz="1400" b="1" kern="1200" dirty="0">
+                      <a:endParaRPr lang="ru-RU" sz="1600" b="1" kern="1200" dirty="0">
                         <a:solidFill>
                           <a:schemeClr val="dk1"/>
                         </a:solidFill>
@@ -6227,7 +6431,7 @@
                         <a:buNone/>
                       </a:pPr>
                       <a:r>
-                        <a:rPr lang="ru-RU" sz="1400" kern="1200" dirty="0">
+                        <a:rPr lang="ru-RU" sz="1600" kern="1200" dirty="0">
                           <a:solidFill>
                             <a:schemeClr val="dk1"/>
                           </a:solidFill>
@@ -6236,22 +6440,10 @@
                           <a:ea typeface="Times New Roman" panose="02020603050405020304" pitchFamily="18" charset="0"/>
                           <a:cs typeface="Arial" panose="020B0604020202020204" pitchFamily="34" charset="0"/>
                         </a:rPr>
-                        <a:t>Администрирование </a:t>
+                        <a:t>Администрирование базы данных </a:t>
                       </a:r>
                       <a:r>
-                        <a:rPr lang="ru-RU" sz="1400" kern="1200">
-                          <a:solidFill>
-                            <a:schemeClr val="dk1"/>
-                          </a:solidFill>
-                          <a:effectLst/>
-                          <a:latin typeface="Arial" panose="020B0604020202020204" pitchFamily="34" charset="0"/>
-                          <a:ea typeface="Times New Roman" panose="02020603050405020304" pitchFamily="18" charset="0"/>
-                          <a:cs typeface="Arial" panose="020B0604020202020204" pitchFamily="34" charset="0"/>
-                        </a:rPr>
-                        <a:t>базы данных </a:t>
-                      </a:r>
-                      <a:r>
-                        <a:rPr lang="en-US" sz="1400" kern="1200" dirty="0">
+                        <a:rPr lang="en-US" sz="1600" kern="1200" dirty="0">
                           <a:solidFill>
                             <a:schemeClr val="dk1"/>
                           </a:solidFill>
@@ -6262,7 +6454,7 @@
                         </a:rPr>
                         <a:t>MySQL.</a:t>
                       </a:r>
-                      <a:endParaRPr lang="ru-RU" sz="1400" kern="1200" dirty="0">
+                      <a:endParaRPr lang="ru-RU" sz="1600" kern="1200" dirty="0">
                         <a:solidFill>
                           <a:schemeClr val="dk1"/>
                         </a:solidFill>
@@ -6331,7 +6523,7 @@
         </p:nvSpPr>
         <p:spPr>
           <a:xfrm>
-            <a:off x="1778575" y="232584"/>
+            <a:off x="1778575" y="0"/>
             <a:ext cx="8634849" cy="594114"/>
           </a:xfrm>
           <a:prstGeom prst="rect">
@@ -6364,25 +6556,25 @@
           <a:p>
             <a:pPr algn="ctr"/>
             <a:r>
-              <a:rPr lang="ru-RU" sz="3200" b="1" dirty="0">
-                <a:solidFill>
-                  <a:schemeClr val="accent1"/>
+              <a:rPr lang="ru-RU" sz="3600" b="1" dirty="0">
+                <a:solidFill>
+                  <a:srgbClr val="C00000"/>
                 </a:solidFill>
               </a:rPr>
               <a:t>Цель</a:t>
             </a:r>
             <a:r>
-              <a:rPr lang="en-US" sz="3200" b="1" dirty="0">
-                <a:solidFill>
-                  <a:schemeClr val="accent1"/>
+              <a:rPr lang="en-US" sz="3600" b="1" dirty="0">
+                <a:solidFill>
+                  <a:srgbClr val="C00000"/>
                 </a:solidFill>
               </a:rPr>
               <a:t>, </a:t>
             </a:r>
             <a:r>
-              <a:rPr lang="ru-RU" sz="3200" b="1" dirty="0">
-                <a:solidFill>
-                  <a:schemeClr val="accent1"/>
+              <a:rPr lang="ru-RU" sz="3600" b="1" dirty="0">
+                <a:solidFill>
+                  <a:srgbClr val="C00000"/>
                 </a:solidFill>
               </a:rPr>
               <a:t>задачи дипломного проектирования </a:t>
@@ -6406,8 +6598,8 @@
         </p:nvSpPr>
         <p:spPr>
           <a:xfrm>
-            <a:off x="455125" y="1032938"/>
-            <a:ext cx="11478650" cy="5244355"/>
+            <a:off x="455125" y="675752"/>
+            <a:ext cx="11478650" cy="5067824"/>
           </a:xfrm>
           <a:prstGeom prst="rect">
             <a:avLst/>
@@ -6586,9 +6778,9 @@
               <a:buNone/>
             </a:pPr>
             <a:r>
-              <a:rPr lang="ru-RU" sz="2000" b="1" dirty="0">
-                <a:solidFill>
-                  <a:schemeClr val="accent1"/>
+              <a:rPr lang="ru-RU" sz="2400" b="1" dirty="0">
+                <a:solidFill>
+                  <a:srgbClr val="C00000"/>
                 </a:solidFill>
                 <a:latin typeface="Arial" panose="020B0604020202020204" pitchFamily="34" charset="0"/>
                 <a:cs typeface="Arial" panose="020B0604020202020204" pitchFamily="34" charset="0"/>
@@ -6596,24 +6788,32 @@
               <a:t>Цель дипломного проектирования</a:t>
             </a:r>
             <a:r>
-              <a:rPr lang="en-US" sz="2000" b="1" dirty="0">
+              <a:rPr lang="en-US" sz="2400" b="1" dirty="0">
                 <a:latin typeface="Arial" panose="020B0604020202020204" pitchFamily="34" charset="0"/>
                 <a:cs typeface="Arial" panose="020B0604020202020204" pitchFamily="34" charset="0"/>
               </a:rPr>
               <a:t>:</a:t>
             </a:r>
             <a:r>
-              <a:rPr lang="en-US" sz="2000" dirty="0">
+              <a:rPr lang="en-US" sz="2400" dirty="0">
                 <a:latin typeface="Arial" panose="020B0604020202020204" pitchFamily="34" charset="0"/>
                 <a:cs typeface="Arial" panose="020B0604020202020204" pitchFamily="34" charset="0"/>
               </a:rPr>
               <a:t> </a:t>
             </a:r>
             <a:r>
-              <a:rPr lang="ru-RU" dirty="0"/>
-              <a:t>разработка информационной системы учета материалов для теплоснабжающей организации, обеспечивающей учет, контроль и анализ материальных ресурсов по подразделениям в течение всего цикла к подготовке к отопительному сезону.</a:t>
-            </a:r>
-            <a:endParaRPr lang="ru-RU" sz="2000" dirty="0">
+              <a:rPr lang="ru-RU" sz="3200" dirty="0"/>
+              <a:t>разработка информационной системы учета материалов для теплоснабжающей организации, обеспечивающей учет</a:t>
+            </a:r>
+            <a:r>
+              <a:rPr lang="en-US" sz="3200" dirty="0"/>
+              <a:t> </a:t>
+            </a:r>
+            <a:r>
+              <a:rPr lang="ru-RU" sz="3200" dirty="0"/>
+              <a:t>материальных ресурсов по подразделениям в течение всего цикла к подготовке к отопительному сезону.</a:t>
+            </a:r>
+            <a:endParaRPr lang="ru-RU" sz="2400" dirty="0">
               <a:latin typeface="Arial" panose="020B0604020202020204" pitchFamily="34" charset="0"/>
               <a:cs typeface="Arial" panose="020B0604020202020204" pitchFamily="34" charset="0"/>
             </a:endParaRPr>
@@ -6627,9 +6827,9 @@
               <a:buNone/>
             </a:pPr>
             <a:r>
-              <a:rPr lang="ru-RU" sz="2000" b="1" dirty="0">
-                <a:solidFill>
-                  <a:schemeClr val="accent1"/>
+              <a:rPr lang="ru-RU" sz="2400" b="1" dirty="0">
+                <a:solidFill>
+                  <a:srgbClr val="C00000"/>
                 </a:solidFill>
                 <a:latin typeface="Arial" panose="020B0604020202020204" pitchFamily="34" charset="0"/>
                 <a:cs typeface="Arial" panose="020B0604020202020204" pitchFamily="34" charset="0"/>
@@ -6637,9 +6837,9 @@
               <a:t>Задачи дипломного проектирования</a:t>
             </a:r>
             <a:r>
-              <a:rPr lang="en-US" sz="2000" b="1" dirty="0">
-                <a:solidFill>
-                  <a:schemeClr val="accent1"/>
+              <a:rPr lang="en-US" sz="2400" b="1" dirty="0">
+                <a:solidFill>
+                  <a:srgbClr val="C00000"/>
                 </a:solidFill>
                 <a:latin typeface="Arial" panose="020B0604020202020204" pitchFamily="34" charset="0"/>
                 <a:cs typeface="Arial" panose="020B0604020202020204" pitchFamily="34" charset="0"/>
@@ -6887,7 +7087,7 @@
         </p:nvSpPr>
         <p:spPr>
           <a:xfrm>
-            <a:off x="11388491" y="6277293"/>
+            <a:off x="11452785" y="6270149"/>
             <a:ext cx="545284" cy="400110"/>
           </a:xfrm>
           <a:prstGeom prst="rect">
@@ -6905,7 +7105,7 @@
             <a:r>
               <a:rPr lang="ru-RU" sz="2000" b="1" dirty="0">
                 <a:solidFill>
-                  <a:schemeClr val="accent1"/>
+                  <a:srgbClr val="C00000"/>
                 </a:solidFill>
               </a:rPr>
               <a:t>2</a:t>
@@ -6959,8 +7159,8 @@
         </p:nvSpPr>
         <p:spPr>
           <a:xfrm>
-            <a:off x="3298926" y="290048"/>
-            <a:ext cx="8634849" cy="1143000"/>
+            <a:off x="1644867" y="271205"/>
+            <a:ext cx="9919238" cy="1143000"/>
           </a:xfrm>
           <a:prstGeom prst="rect">
             <a:avLst/>
@@ -6991,14 +7191,13 @@
           </a:lstStyle>
           <a:p>
             <a:r>
-              <a:rPr lang="ru-RU" sz="3200" b="1" dirty="0">
-                <a:solidFill>
-                  <a:schemeClr val="accent1"/>
+              <a:rPr lang="ru-RU" sz="4000" b="1" dirty="0">
+                <a:solidFill>
+                  <a:srgbClr val="C00000"/>
                 </a:solidFill>
               </a:rPr>
-              <a:t>Предметная дипломного проекта </a:t>
-            </a:r>
-            <a:endParaRPr lang="ru-RU" sz="3200" b="1" dirty="0"/>
+              <a:t>Предметная область дипломного проекта </a:t>
+            </a:r>
           </a:p>
         </p:txBody>
       </p:sp>
@@ -7018,8 +7217,8 @@
         </p:nvSpPr>
         <p:spPr>
           <a:xfrm>
-            <a:off x="258225" y="1094705"/>
-            <a:ext cx="11675550" cy="5763296"/>
+            <a:off x="337018" y="1944812"/>
+            <a:ext cx="6089756" cy="5763296"/>
           </a:xfrm>
           <a:prstGeom prst="rect">
             <a:avLst/>
@@ -7199,7 +7398,7 @@
             </a:pPr>
             <a:r>
               <a:rPr lang="ru-RU" dirty="0"/>
-              <a:t>В ходе прохождения преддипломной практики возникла необходимость в создании системы для учетов материалов в теплоснабжающем предприятии. Для организации характерна выраженная сезонность: активная подготовка к отопительному сезону проводится в периоды — весной после завершения текущего сезона и осенью перед началом отопительного сезона. В эти периоды выполняются ремонтные и профилактические работы, формируются заявки, проводится закупка и распределение материалов по подразделениям. При отсутствии учета возникают риски нехватки материалов и оборудования для ремонта, дублирования закупок и ошибки в отчетности.</a:t>
+              <a:t>Предметной областью дипломного проекта является автоматизация процесса учета материалов по подразделениям в теплоснабжающей организации, посредством отслеживания заявок. </a:t>
             </a:r>
           </a:p>
         </p:txBody>
@@ -7236,7 +7435,7 @@
             <a:r>
               <a:rPr lang="ru-RU" sz="2000" b="1" dirty="0">
                 <a:solidFill>
-                  <a:schemeClr val="accent1"/>
+                  <a:srgbClr val="C00000"/>
                 </a:solidFill>
               </a:rPr>
               <a:t>3</a:t>
@@ -7451,6 +7650,30 @@
           </a:p>
         </p:txBody>
       </p:sp>
+      <p:pic>
+        <p:nvPicPr>
+          <p:cNvPr id="2" name="Рисунок 1"/>
+          <p:cNvPicPr>
+            <a:picLocks noChangeAspect="1"/>
+          </p:cNvPicPr>
+          <p:nvPr/>
+        </p:nvPicPr>
+        <p:blipFill>
+          <a:blip r:embed="rId3"/>
+          <a:stretch>
+            <a:fillRect/>
+          </a:stretch>
+        </p:blipFill>
+        <p:spPr>
+          <a:xfrm>
+            <a:off x="6426774" y="1847911"/>
+            <a:ext cx="5474090" cy="2978549"/>
+          </a:xfrm>
+          <a:prstGeom prst="rect">
+            <a:avLst/>
+          </a:prstGeom>
+        </p:spPr>
+      </p:pic>
     </p:spTree>
     <p:extLst>
       <p:ext uri="{BB962C8B-B14F-4D97-AF65-F5344CB8AC3E}">
@@ -7483,6 +7706,156 @@
       </p:grpSpPr>
       <p:sp>
         <p:nvSpPr>
+          <p:cNvPr id="2" name="Заголовок 1">
+            <a:extLst>
+              <a:ext uri="{FF2B5EF4-FFF2-40B4-BE49-F238E27FC236}">
+                <a16:creationId xmlns:a16="http://schemas.microsoft.com/office/drawing/2014/main" id="{F1BE200B-7FD6-F90B-4942-9E981FC25238}"/>
+              </a:ext>
+            </a:extLst>
+          </p:cNvPr>
+          <p:cNvSpPr>
+            <a:spLocks noGrp="1"/>
+          </p:cNvSpPr>
+          <p:nvPr>
+            <p:ph type="ctrTitle"/>
+          </p:nvPr>
+        </p:nvSpPr>
+        <p:spPr>
+          <a:xfrm>
+            <a:off x="1524000" y="72231"/>
+            <a:ext cx="9144000" cy="770731"/>
+          </a:xfrm>
+        </p:spPr>
+        <p:txBody>
+          <a:bodyPr>
+            <a:noAutofit/>
+          </a:bodyPr>
+          <a:lstStyle/>
+          <a:p>
+            <a:r>
+              <a:rPr lang="ru-RU" sz="4000" b="1" dirty="0">
+                <a:solidFill>
+                  <a:srgbClr val="C00000"/>
+                </a:solidFill>
+              </a:rPr>
+              <a:t>Организационная структура предприятия</a:t>
+            </a:r>
+          </a:p>
+        </p:txBody>
+      </p:sp>
+      <p:pic>
+        <p:nvPicPr>
+          <p:cNvPr id="7" name="Рисунок 6">
+            <a:extLst>
+              <a:ext uri="{FF2B5EF4-FFF2-40B4-BE49-F238E27FC236}">
+                <a16:creationId xmlns:a16="http://schemas.microsoft.com/office/drawing/2014/main" id="{005E60F9-3FE8-13CD-5593-9C26E5316D07}"/>
+              </a:ext>
+            </a:extLst>
+          </p:cNvPr>
+          <p:cNvPicPr>
+            <a:picLocks noChangeAspect="1"/>
+          </p:cNvPicPr>
+          <p:nvPr/>
+        </p:nvPicPr>
+        <p:blipFill>
+          <a:blip r:embed="rId3">
+            <a:extLst>
+              <a:ext uri="{28A0092B-C50C-407E-A947-70E740481C1C}">
+                <a14:useLocalDpi xmlns:a14="http://schemas.microsoft.com/office/drawing/2010/main" val="0"/>
+              </a:ext>
+            </a:extLst>
+          </a:blip>
+          <a:stretch>
+            <a:fillRect/>
+          </a:stretch>
+        </p:blipFill>
+        <p:spPr>
+          <a:xfrm>
+            <a:off x="1532357" y="938211"/>
+            <a:ext cx="9092781" cy="5491163"/>
+          </a:xfrm>
+          <a:prstGeom prst="rect">
+            <a:avLst/>
+          </a:prstGeom>
+          <a:ln>
+            <a:solidFill>
+              <a:schemeClr val="tx1"/>
+            </a:solidFill>
+          </a:ln>
+        </p:spPr>
+      </p:pic>
+      <p:sp>
+        <p:nvSpPr>
+          <p:cNvPr id="8" name="TextBox 7">
+            <a:extLst>
+              <a:ext uri="{FF2B5EF4-FFF2-40B4-BE49-F238E27FC236}">
+                <a16:creationId xmlns:a16="http://schemas.microsoft.com/office/drawing/2014/main" id="{EE47420E-F3F9-7E20-23DB-E6F273A86022}"/>
+              </a:ext>
+            </a:extLst>
+          </p:cNvPr>
+          <p:cNvSpPr txBox="1"/>
+          <p:nvPr/>
+        </p:nvSpPr>
+        <p:spPr>
+          <a:xfrm>
+            <a:off x="11475266" y="6264392"/>
+            <a:ext cx="545284" cy="400110"/>
+          </a:xfrm>
+          <a:prstGeom prst="rect">
+            <a:avLst/>
+          </a:prstGeom>
+          <a:noFill/>
+        </p:spPr>
+        <p:txBody>
+          <a:bodyPr wrap="square" rtlCol="0">
+            <a:spAutoFit/>
+          </a:bodyPr>
+          <a:lstStyle/>
+          <a:p>
+            <a:pPr algn="ctr"/>
+            <a:r>
+              <a:rPr lang="ru-RU" sz="2000" b="1" dirty="0">
+                <a:solidFill>
+                  <a:srgbClr val="C00000"/>
+                </a:solidFill>
+              </a:rPr>
+              <a:t>4</a:t>
+            </a:r>
+          </a:p>
+        </p:txBody>
+      </p:sp>
+    </p:spTree>
+    <p:extLst>
+      <p:ext uri="{BB962C8B-B14F-4D97-AF65-F5344CB8AC3E}">
+        <p14:creationId xmlns:p14="http://schemas.microsoft.com/office/powerpoint/2010/main" val="3554341546"/>
+      </p:ext>
+    </p:extLst>
+  </p:cSld>
+  <p:clrMapOvr>
+    <a:masterClrMapping/>
+  </p:clrMapOvr>
+</p:sld>
+</file>
+
+<file path=ppt/slides/slide5.xml><?xml version="1.0" encoding="utf-8"?>
+<p:sld xmlns:a="http://schemas.openxmlformats.org/drawingml/2006/main" xmlns:r="http://schemas.openxmlformats.org/officeDocument/2006/relationships" xmlns:p="http://schemas.openxmlformats.org/presentationml/2006/main">
+  <p:cSld>
+    <p:spTree>
+      <p:nvGrpSpPr>
+        <p:cNvPr id="1" name=""/>
+        <p:cNvGrpSpPr/>
+        <p:nvPr/>
+      </p:nvGrpSpPr>
+      <p:grpSpPr>
+        <a:xfrm>
+          <a:off x="0" y="0"/>
+          <a:ext cx="0" cy="0"/>
+          <a:chOff x="0" y="0"/>
+          <a:chExt cx="0" cy="0"/>
+        </a:xfrm>
+      </p:grpSpPr>
+      <p:sp>
+        <p:nvSpPr>
           <p:cNvPr id="4" name="Заголовок 4">
             <a:extLst>
               <a:ext uri="{FF2B5EF4-FFF2-40B4-BE49-F238E27FC236}">
@@ -7497,8 +7870,8 @@
         </p:nvSpPr>
         <p:spPr>
           <a:xfrm>
-            <a:off x="1699404" y="-100195"/>
-            <a:ext cx="9282022" cy="1143000"/>
+            <a:off x="1699403" y="-100195"/>
+            <a:ext cx="9652015" cy="1143000"/>
           </a:xfrm>
           <a:prstGeom prst="rect">
             <a:avLst/>
@@ -7529,9 +7902,9 @@
           </a:lstStyle>
           <a:p>
             <a:r>
-              <a:rPr lang="ru-RU" sz="3200" b="1" dirty="0">
-                <a:solidFill>
-                  <a:schemeClr val="accent1"/>
+              <a:rPr lang="ru-RU" sz="3600" b="1" dirty="0">
+                <a:solidFill>
+                  <a:srgbClr val="C00000"/>
                 </a:solidFill>
                 <a:latin typeface="Arial" panose="020B0604020202020204" pitchFamily="34" charset="0"/>
                 <a:cs typeface="Arial" panose="020B0604020202020204" pitchFamily="34" charset="0"/>
@@ -7556,7 +7929,7 @@
           <p:nvPr>
             <p:extLst>
               <p:ext uri="{D42A27DB-BD31-4B8C-83A1-F6EECF244321}">
-                <p14:modId xmlns:p14="http://schemas.microsoft.com/office/powerpoint/2010/main" val="3973571033"/>
+                <p14:modId xmlns:p14="http://schemas.microsoft.com/office/powerpoint/2010/main" val="4002436787"/>
               </p:ext>
             </p:extLst>
           </p:nvPr>
@@ -7612,7 +7985,7 @@
                   </a:txBody>
                   <a:tcPr>
                     <a:solidFill>
-                      <a:schemeClr val="accent1"/>
+                      <a:srgbClr val="C00000"/>
                     </a:solidFill>
                   </a:tcPr>
                 </a:tc>
@@ -7633,7 +8006,7 @@
                   </a:txBody>
                   <a:tcPr>
                     <a:solidFill>
-                      <a:schemeClr val="accent1"/>
+                      <a:srgbClr val="C00000"/>
                     </a:solidFill>
                   </a:tcPr>
                 </a:tc>
@@ -7654,7 +8027,7 @@
                   </a:txBody>
                   <a:tcPr>
                     <a:solidFill>
-                      <a:schemeClr val="accent1"/>
+                      <a:srgbClr val="C00000"/>
                     </a:solidFill>
                   </a:tcPr>
                 </a:tc>
@@ -7825,7 +8198,7 @@
                           <a:latin typeface="Arial" panose="020B0604020202020204" pitchFamily="34" charset="0"/>
                           <a:cs typeface="Arial" panose="020B0604020202020204" pitchFamily="34" charset="0"/>
                         </a:rPr>
-                        <a:t>MySQL Workbench</a:t>
+                        <a:t>MySQL</a:t>
                       </a:r>
                       <a:endParaRPr lang="ru-RU" dirty="0">
                         <a:latin typeface="Arial" panose="020B0604020202020204" pitchFamily="34" charset="0"/>
@@ -8226,7 +8599,21 @@
                           <a:latin typeface="Arial" panose="020B0604020202020204" pitchFamily="34" charset="0"/>
                           <a:cs typeface="Arial" panose="020B0604020202020204" pitchFamily="34" charset="0"/>
                         </a:rPr>
-                        <a:t>, K6</a:t>
+                        <a:t>, </a:t>
+                      </a:r>
+                      <a:r>
+                        <a:rPr lang="en-US" dirty="0" err="1">
+                          <a:latin typeface="Arial" panose="020B0604020202020204" pitchFamily="34" charset="0"/>
+                          <a:cs typeface="Arial" panose="020B0604020202020204" pitchFamily="34" charset="0"/>
+                        </a:rPr>
+                        <a:t>Grafa</a:t>
+                      </a:r>
+                      <a:r>
+                        <a:rPr lang="en-US" dirty="0">
+                          <a:latin typeface="Arial" panose="020B0604020202020204" pitchFamily="34" charset="0"/>
+                          <a:cs typeface="Arial" panose="020B0604020202020204" pitchFamily="34" charset="0"/>
+                        </a:rPr>
+                        <a:t> K6</a:t>
                       </a:r>
                       <a:endParaRPr lang="ru-RU" dirty="0">
                         <a:latin typeface="Arial" panose="020B0604020202020204" pitchFamily="34" charset="0"/>
@@ -8323,10 +8710,10 @@
             <a:r>
               <a:rPr lang="ru-RU" sz="2000" b="1" dirty="0">
                 <a:solidFill>
-                  <a:schemeClr val="accent1"/>
+                  <a:srgbClr val="C00000"/>
                 </a:solidFill>
               </a:rPr>
-              <a:t>4</a:t>
+              <a:t>5</a:t>
             </a:r>
           </a:p>
         </p:txBody>
@@ -8393,7 +8780,7 @@
           <p:nvPr/>
         </p:nvPicPr>
         <p:blipFill>
-          <a:blip r:embed="rId4">
+          <a:blip r:embed="rId4" cstate="print">
             <a:extLst>
               <a:ext uri="{28A0092B-C50C-407E-A947-70E740481C1C}">
                 <a14:useLocalDpi xmlns:a14="http://schemas.microsoft.com/office/drawing/2010/main" val="0"/>
@@ -8440,7 +8827,7 @@
           <p:nvPr/>
         </p:nvPicPr>
         <p:blipFill>
-          <a:blip r:embed="rId4">
+          <a:blip r:embed="rId4" cstate="print">
             <a:extLst>
               <a:ext uri="{28A0092B-C50C-407E-A947-70E740481C1C}">
                 <a14:useLocalDpi xmlns:a14="http://schemas.microsoft.com/office/drawing/2010/main" val="0"/>
@@ -8534,7 +8921,7 @@
           <p:nvPr/>
         </p:nvPicPr>
         <p:blipFill>
-          <a:blip r:embed="rId5">
+          <a:blip r:embed="rId5" cstate="print">
             <a:extLst>
               <a:ext uri="{28A0092B-C50C-407E-A947-70E740481C1C}">
                 <a14:useLocalDpi xmlns:a14="http://schemas.microsoft.com/office/drawing/2010/main" val="0"/>
@@ -8581,7 +8968,7 @@
           <p:nvPr/>
         </p:nvPicPr>
         <p:blipFill>
-          <a:blip r:embed="rId6">
+          <a:blip r:embed="rId6" cstate="print">
             <a:extLst>
               <a:ext uri="{28A0092B-C50C-407E-A947-70E740481C1C}">
                 <a14:useLocalDpi xmlns:a14="http://schemas.microsoft.com/office/drawing/2010/main" val="0"/>
@@ -8628,7 +9015,7 @@
           <p:nvPr/>
         </p:nvPicPr>
         <p:blipFill>
-          <a:blip r:embed="rId7">
+          <a:blip r:embed="rId7" cstate="print">
             <a:extLst>
               <a:ext uri="{28A0092B-C50C-407E-A947-70E740481C1C}">
                 <a14:useLocalDpi xmlns:a14="http://schemas.microsoft.com/office/drawing/2010/main" val="0"/>
@@ -8675,7 +9062,7 @@
           <p:nvPr/>
         </p:nvPicPr>
         <p:blipFill>
-          <a:blip r:embed="rId8">
+          <a:blip r:embed="rId8" cstate="print">
             <a:extLst>
               <a:ext uri="{28A0092B-C50C-407E-A947-70E740481C1C}">
                 <a14:useLocalDpi xmlns:a14="http://schemas.microsoft.com/office/drawing/2010/main" val="0"/>
@@ -8722,7 +9109,7 @@
           <p:nvPr/>
         </p:nvPicPr>
         <p:blipFill rotWithShape="1">
-          <a:blip r:embed="rId9">
+          <a:blip r:embed="rId9" cstate="print">
             <a:extLst>
               <a:ext uri="{28A0092B-C50C-407E-A947-70E740481C1C}">
                 <a14:useLocalDpi xmlns:a14="http://schemas.microsoft.com/office/drawing/2010/main" val="0"/>
@@ -8767,7 +9154,7 @@
           <p:nvPr/>
         </p:nvPicPr>
         <p:blipFill>
-          <a:blip r:embed="rId10">
+          <a:blip r:embed="rId10" cstate="print">
             <a:extLst>
               <a:ext uri="{28A0092B-C50C-407E-A947-70E740481C1C}">
                 <a14:useLocalDpi xmlns:a14="http://schemas.microsoft.com/office/drawing/2010/main" val="0"/>
@@ -8803,365 +9190,6 @@
     <p:extLst>
       <p:ext uri="{BB962C8B-B14F-4D97-AF65-F5344CB8AC3E}">
         <p14:creationId xmlns:p14="http://schemas.microsoft.com/office/powerpoint/2010/main" val="918121162"/>
-      </p:ext>
-    </p:extLst>
-  </p:cSld>
-  <p:clrMapOvr>
-    <a:masterClrMapping/>
-  </p:clrMapOvr>
-</p:sld>
-</file>
-
-<file path=ppt/slides/slide5.xml><?xml version="1.0" encoding="utf-8"?>
-<p:sld xmlns:a="http://schemas.openxmlformats.org/drawingml/2006/main" xmlns:r="http://schemas.openxmlformats.org/officeDocument/2006/relationships" xmlns:p="http://schemas.openxmlformats.org/presentationml/2006/main">
-  <p:cSld>
-    <p:spTree>
-      <p:nvGrpSpPr>
-        <p:cNvPr id="1" name=""/>
-        <p:cNvGrpSpPr/>
-        <p:nvPr/>
-      </p:nvGrpSpPr>
-      <p:grpSpPr>
-        <a:xfrm>
-          <a:off x="0" y="0"/>
-          <a:ext cx="0" cy="0"/>
-          <a:chOff x="0" y="0"/>
-          <a:chExt cx="0" cy="0"/>
-        </a:xfrm>
-      </p:grpSpPr>
-      <p:sp>
-        <p:nvSpPr>
-          <p:cNvPr id="4" name="Заголовок 4">
-            <a:extLst>
-              <a:ext uri="{FF2B5EF4-FFF2-40B4-BE49-F238E27FC236}">
-                <a16:creationId xmlns:a16="http://schemas.microsoft.com/office/drawing/2014/main" id="{21EA8F00-3DD0-4256-8C2D-D62221C45B1F}"/>
-              </a:ext>
-            </a:extLst>
-          </p:cNvPr>
-          <p:cNvSpPr>
-            <a:spLocks noGrp="1"/>
-          </p:cNvSpPr>
-          <p:nvPr>
-            <p:ph type="title"/>
-          </p:nvPr>
-        </p:nvSpPr>
-        <p:spPr>
-          <a:xfrm>
-            <a:off x="1851675" y="35179"/>
-            <a:ext cx="8928586" cy="426550"/>
-          </a:xfrm>
-        </p:spPr>
-        <p:txBody>
-          <a:bodyPr>
-            <a:normAutofit fontScale="90000"/>
-          </a:bodyPr>
-          <a:lstStyle/>
-          <a:p>
-            <a:pPr marL="0" indent="0" algn="l">
-              <a:buNone/>
-            </a:pPr>
-            <a:r>
-              <a:rPr lang="ru-RU" sz="3200" b="1" dirty="0">
-                <a:solidFill>
-                  <a:schemeClr val="accent1"/>
-                </a:solidFill>
-                <a:latin typeface="Arial" panose="020B0604020202020204" pitchFamily="34" charset="0"/>
-                <a:cs typeface="Arial" panose="020B0604020202020204" pitchFamily="34" charset="0"/>
-              </a:rPr>
-              <a:t>Проектирование программного продукта</a:t>
-            </a:r>
-          </a:p>
-        </p:txBody>
-      </p:sp>
-      <p:sp>
-        <p:nvSpPr>
-          <p:cNvPr id="9" name="TextBox 8">
-            <a:extLst>
-              <a:ext uri="{FF2B5EF4-FFF2-40B4-BE49-F238E27FC236}">
-                <a16:creationId xmlns:a16="http://schemas.microsoft.com/office/drawing/2014/main" id="{76B9F4FE-3FA8-43BD-A563-A96EBAA4E414}"/>
-              </a:ext>
-            </a:extLst>
-          </p:cNvPr>
-          <p:cNvSpPr txBox="1"/>
-          <p:nvPr/>
-        </p:nvSpPr>
-        <p:spPr>
-          <a:xfrm>
-            <a:off x="590788" y="383971"/>
-            <a:ext cx="4667436" cy="400110"/>
-          </a:xfrm>
-          <a:prstGeom prst="rect">
-            <a:avLst/>
-          </a:prstGeom>
-          <a:noFill/>
-        </p:spPr>
-        <p:txBody>
-          <a:bodyPr wrap="square" rtlCol="0">
-            <a:spAutoFit/>
-          </a:bodyPr>
-          <a:lstStyle/>
-          <a:p>
-            <a:r>
-              <a:rPr lang="ru-RU" sz="2000" dirty="0">
-                <a:latin typeface="Arial" panose="020B0604020202020204" pitchFamily="34" charset="0"/>
-                <a:cs typeface="Arial" panose="020B0604020202020204" pitchFamily="34" charset="0"/>
-              </a:rPr>
-              <a:t>Диаграмма вариантов использования</a:t>
-            </a:r>
-          </a:p>
-        </p:txBody>
-      </p:sp>
-      <p:sp>
-        <p:nvSpPr>
-          <p:cNvPr id="7" name="TextBox 6">
-            <a:extLst>
-              <a:ext uri="{FF2B5EF4-FFF2-40B4-BE49-F238E27FC236}">
-                <a16:creationId xmlns:a16="http://schemas.microsoft.com/office/drawing/2014/main" id="{EC35AB10-481D-490B-8F68-3E2ED02099F5}"/>
-              </a:ext>
-            </a:extLst>
-          </p:cNvPr>
-          <p:cNvSpPr txBox="1"/>
-          <p:nvPr/>
-        </p:nvSpPr>
-        <p:spPr>
-          <a:xfrm>
-            <a:off x="11541379" y="6288656"/>
-            <a:ext cx="545284" cy="400110"/>
-          </a:xfrm>
-          <a:prstGeom prst="rect">
-            <a:avLst/>
-          </a:prstGeom>
-          <a:noFill/>
-        </p:spPr>
-        <p:txBody>
-          <a:bodyPr wrap="square" rtlCol="0">
-            <a:spAutoFit/>
-          </a:bodyPr>
-          <a:lstStyle/>
-          <a:p>
-            <a:pPr algn="ctr"/>
-            <a:r>
-              <a:rPr lang="ru-RU" sz="2000" b="1" dirty="0">
-                <a:solidFill>
-                  <a:schemeClr val="accent1"/>
-                </a:solidFill>
-              </a:rPr>
-              <a:t>5</a:t>
-            </a:r>
-          </a:p>
-        </p:txBody>
-      </p:sp>
-      <p:sp>
-        <p:nvSpPr>
-          <p:cNvPr id="3" name="TextBox 2">
-            <a:extLst>
-              <a:ext uri="{FF2B5EF4-FFF2-40B4-BE49-F238E27FC236}">
-                <a16:creationId xmlns:a16="http://schemas.microsoft.com/office/drawing/2014/main" id="{C591C682-6ABD-4DA4-A18A-A4A9DD4F28D1}"/>
-              </a:ext>
-            </a:extLst>
-          </p:cNvPr>
-          <p:cNvSpPr txBox="1"/>
-          <p:nvPr/>
-        </p:nvSpPr>
-        <p:spPr>
-          <a:xfrm>
-            <a:off x="1188873" y="4102412"/>
-            <a:ext cx="2744213" cy="923330"/>
-          </a:xfrm>
-          <a:prstGeom prst="rect">
-            <a:avLst/>
-          </a:prstGeom>
-          <a:noFill/>
-        </p:spPr>
-        <p:txBody>
-          <a:bodyPr wrap="none" rtlCol="0">
-            <a:spAutoFit/>
-          </a:bodyPr>
-          <a:lstStyle/>
-          <a:p>
-            <a:pPr algn="ctr"/>
-            <a:r>
-              <a:rPr lang="ru-RU" dirty="0"/>
-              <a:t>Картинка диаграммы </a:t>
-            </a:r>
-          </a:p>
-          <a:p>
-            <a:pPr algn="ctr"/>
-            <a:r>
-              <a:rPr lang="ru-RU" dirty="0"/>
-              <a:t>вариантов использования</a:t>
-            </a:r>
-          </a:p>
-          <a:p>
-            <a:pPr algn="ctr"/>
-            <a:r>
-              <a:rPr lang="ru-RU" dirty="0"/>
-              <a:t> (</a:t>
-            </a:r>
-            <a:r>
-              <a:rPr lang="en-US" dirty="0"/>
-              <a:t>USES CASE)</a:t>
-            </a:r>
-            <a:endParaRPr lang="ru-RU" dirty="0"/>
-          </a:p>
-        </p:txBody>
-      </p:sp>
-      <p:sp>
-        <p:nvSpPr>
-          <p:cNvPr id="10" name="TextBox 9">
-            <a:extLst>
-              <a:ext uri="{FF2B5EF4-FFF2-40B4-BE49-F238E27FC236}">
-                <a16:creationId xmlns:a16="http://schemas.microsoft.com/office/drawing/2014/main" id="{2D5595D4-F499-48D9-89D6-2569A1ADA379}"/>
-              </a:ext>
-            </a:extLst>
-          </p:cNvPr>
-          <p:cNvSpPr txBox="1"/>
-          <p:nvPr/>
-        </p:nvSpPr>
-        <p:spPr>
-          <a:xfrm>
-            <a:off x="6519111" y="383971"/>
-            <a:ext cx="4667436" cy="400110"/>
-          </a:xfrm>
-          <a:prstGeom prst="rect">
-            <a:avLst/>
-          </a:prstGeom>
-          <a:noFill/>
-        </p:spPr>
-        <p:txBody>
-          <a:bodyPr wrap="square" rtlCol="0">
-            <a:spAutoFit/>
-          </a:bodyPr>
-          <a:lstStyle/>
-          <a:p>
-            <a:pPr algn="ctr"/>
-            <a:r>
-              <a:rPr lang="ru-RU" sz="2000" dirty="0">
-                <a:latin typeface="Arial" panose="020B0604020202020204" pitchFamily="34" charset="0"/>
-                <a:cs typeface="Arial" panose="020B0604020202020204" pitchFamily="34" charset="0"/>
-              </a:rPr>
-              <a:t>Диаграмма деятельности</a:t>
-            </a:r>
-          </a:p>
-        </p:txBody>
-      </p:sp>
-      <p:sp>
-        <p:nvSpPr>
-          <p:cNvPr id="11" name="TextBox 10">
-            <a:extLst>
-              <a:ext uri="{FF2B5EF4-FFF2-40B4-BE49-F238E27FC236}">
-                <a16:creationId xmlns:a16="http://schemas.microsoft.com/office/drawing/2014/main" id="{9B5DB463-03B1-406B-8C90-94477513324D}"/>
-              </a:ext>
-            </a:extLst>
-          </p:cNvPr>
-          <p:cNvSpPr txBox="1"/>
-          <p:nvPr/>
-        </p:nvSpPr>
-        <p:spPr>
-          <a:xfrm>
-            <a:off x="7328210" y="4056692"/>
-            <a:ext cx="3674917" cy="369332"/>
-          </a:xfrm>
-          <a:prstGeom prst="rect">
-            <a:avLst/>
-          </a:prstGeom>
-          <a:noFill/>
-        </p:spPr>
-        <p:txBody>
-          <a:bodyPr wrap="none" rtlCol="0">
-            <a:spAutoFit/>
-          </a:bodyPr>
-          <a:lstStyle/>
-          <a:p>
-            <a:r>
-              <a:rPr lang="ru-RU" dirty="0"/>
-              <a:t>Картинка диаграммы деятельности</a:t>
-            </a:r>
-          </a:p>
-        </p:txBody>
-      </p:sp>
-      <p:pic>
-        <p:nvPicPr>
-          <p:cNvPr id="5" name="Рисунок 4">
-            <a:extLst>
-              <a:ext uri="{FF2B5EF4-FFF2-40B4-BE49-F238E27FC236}">
-                <a16:creationId xmlns:a16="http://schemas.microsoft.com/office/drawing/2014/main" id="{8FBF0176-0C5A-94E0-19CB-4B00A22434F3}"/>
-              </a:ext>
-            </a:extLst>
-          </p:cNvPr>
-          <p:cNvPicPr>
-            <a:picLocks noChangeAspect="1"/>
-          </p:cNvPicPr>
-          <p:nvPr/>
-        </p:nvPicPr>
-        <p:blipFill>
-          <a:blip r:embed="rId3">
-            <a:extLst>
-              <a:ext uri="{28A0092B-C50C-407E-A947-70E740481C1C}">
-                <a14:useLocalDpi xmlns:a14="http://schemas.microsoft.com/office/drawing/2010/main" val="0"/>
-              </a:ext>
-            </a:extLst>
-          </a:blip>
-          <a:srcRect/>
-          <a:stretch>
-            <a:fillRect/>
-          </a:stretch>
-        </p:blipFill>
-        <p:spPr bwMode="auto">
-          <a:xfrm>
-            <a:off x="533557" y="801441"/>
-            <a:ext cx="4781897" cy="5687270"/>
-          </a:xfrm>
-          <a:prstGeom prst="rect">
-            <a:avLst/>
-          </a:prstGeom>
-          <a:noFill/>
-          <a:ln>
-            <a:solidFill>
-              <a:schemeClr val="tx1"/>
-            </a:solidFill>
-          </a:ln>
-        </p:spPr>
-      </p:pic>
-      <p:pic>
-        <p:nvPicPr>
-          <p:cNvPr id="6" name="Рисунок 5">
-            <a:extLst>
-              <a:ext uri="{FF2B5EF4-FFF2-40B4-BE49-F238E27FC236}">
-                <a16:creationId xmlns:a16="http://schemas.microsoft.com/office/drawing/2014/main" id="{677453B6-FD47-1777-F59A-03089AF98398}"/>
-              </a:ext>
-            </a:extLst>
-          </p:cNvPr>
-          <p:cNvPicPr>
-            <a:picLocks noChangeAspect="1"/>
-          </p:cNvPicPr>
-          <p:nvPr/>
-        </p:nvPicPr>
-        <p:blipFill>
-          <a:blip r:embed="rId4"/>
-          <a:stretch>
-            <a:fillRect/>
-          </a:stretch>
-        </p:blipFill>
-        <p:spPr>
-          <a:xfrm>
-            <a:off x="6322438" y="781996"/>
-            <a:ext cx="5025732" cy="5687270"/>
-          </a:xfrm>
-          <a:prstGeom prst="rect">
-            <a:avLst/>
-          </a:prstGeom>
-          <a:ln>
-            <a:solidFill>
-              <a:schemeClr val="tx1"/>
-            </a:solidFill>
-          </a:ln>
-        </p:spPr>
-      </p:pic>
-    </p:spTree>
-    <p:extLst>
-      <p:ext uri="{BB962C8B-B14F-4D97-AF65-F5344CB8AC3E}">
-        <p14:creationId xmlns:p14="http://schemas.microsoft.com/office/powerpoint/2010/main" val="1646779378"/>
       </p:ext>
     </p:extLst>
   </p:cSld>
@@ -9206,13 +9234,13 @@
         </p:nvSpPr>
         <p:spPr>
           <a:xfrm>
-            <a:off x="1802675" y="223148"/>
-            <a:ext cx="8928586" cy="1143000"/>
+            <a:off x="1851675" y="35179"/>
+            <a:ext cx="8928586" cy="426550"/>
           </a:xfrm>
         </p:spPr>
         <p:txBody>
           <a:bodyPr>
-            <a:normAutofit/>
+            <a:normAutofit fontScale="90000"/>
           </a:bodyPr>
           <a:lstStyle/>
           <a:p>
@@ -9222,7 +9250,7 @@
             <a:r>
               <a:rPr lang="ru-RU" sz="3200" b="1" dirty="0">
                 <a:solidFill>
-                  <a:schemeClr val="accent1"/>
+                  <a:srgbClr val="C00000"/>
                 </a:solidFill>
                 <a:latin typeface="Arial" panose="020B0604020202020204" pitchFamily="34" charset="0"/>
                 <a:cs typeface="Arial" panose="020B0604020202020204" pitchFamily="34" charset="0"/>
@@ -9246,7 +9274,7 @@
         </p:nvSpPr>
         <p:spPr>
           <a:xfrm>
-            <a:off x="1095160" y="1248389"/>
+            <a:off x="590788" y="383971"/>
             <a:ext cx="4667436" cy="400110"/>
           </a:xfrm>
           <a:prstGeom prst="rect">
@@ -9265,7 +9293,7 @@
                 <a:latin typeface="Arial" panose="020B0604020202020204" pitchFamily="34" charset="0"/>
                 <a:cs typeface="Arial" panose="020B0604020202020204" pitchFamily="34" charset="0"/>
               </a:rPr>
-              <a:t>Контекстная диаграмма</a:t>
+              <a:t>Диаграмма вариантов использования</a:t>
             </a:r>
           </a:p>
         </p:txBody>
@@ -9302,7 +9330,7 @@
             <a:r>
               <a:rPr lang="ru-RU" sz="2000" b="1" dirty="0">
                 <a:solidFill>
-                  <a:schemeClr val="accent1"/>
+                  <a:srgbClr val="C00000"/>
                 </a:solidFill>
               </a:rPr>
               <a:t>6</a:t>
@@ -9324,8 +9352,8 @@
         </p:nvSpPr>
         <p:spPr>
           <a:xfrm>
-            <a:off x="1797028" y="3964359"/>
-            <a:ext cx="2638607" cy="923330"/>
+            <a:off x="1188873" y="4102412"/>
+            <a:ext cx="2744213" cy="923330"/>
           </a:xfrm>
           <a:prstGeom prst="rect">
             <a:avLst/>
@@ -9341,18 +9369,26 @@
             <a:pPr algn="ctr"/>
             <a:r>
               <a:rPr lang="ru-RU" dirty="0"/>
-              <a:t>Картинка КОНТЕКСТНОЙ </a:t>
+              <a:t>Картинка диаграммы </a:t>
             </a:r>
           </a:p>
           <a:p>
             <a:pPr algn="ctr"/>
             <a:r>
               <a:rPr lang="ru-RU" dirty="0"/>
-              <a:t>диаграммы </a:t>
+              <a:t>вариантов использования</a:t>
             </a:r>
           </a:p>
           <a:p>
             <a:pPr algn="ctr"/>
+            <a:r>
+              <a:rPr lang="ru-RU" dirty="0"/>
+              <a:t> (</a:t>
+            </a:r>
+            <a:r>
+              <a:rPr lang="en-US" dirty="0"/>
+              <a:t>USES CASE)</a:t>
+            </a:r>
             <a:endParaRPr lang="ru-RU" dirty="0"/>
           </a:p>
         </p:txBody>
@@ -9371,7 +9407,7 @@
         </p:nvSpPr>
         <p:spPr>
           <a:xfrm>
-            <a:off x="6659937" y="1248389"/>
+            <a:off x="6519111" y="383971"/>
             <a:ext cx="4667436" cy="400110"/>
           </a:xfrm>
           <a:prstGeom prst="rect">
@@ -9391,7 +9427,7 @@
                 <a:latin typeface="Arial" panose="020B0604020202020204" pitchFamily="34" charset="0"/>
                 <a:cs typeface="Arial" panose="020B0604020202020204" pitchFamily="34" charset="0"/>
               </a:rPr>
-              <a:t>Диаграмма декомпозиции</a:t>
+              <a:t>Диаграмма деятельности</a:t>
             </a:r>
           </a:p>
         </p:txBody>
@@ -9411,7 +9447,7 @@
         <p:spPr>
           <a:xfrm>
             <a:off x="7328210" y="4056692"/>
-            <a:ext cx="3804183" cy="369332"/>
+            <a:ext cx="3674917" cy="369332"/>
           </a:xfrm>
           <a:prstGeom prst="rect">
             <a:avLst/>
@@ -9426,7 +9462,7 @@
           <a:p>
             <a:r>
               <a:rPr lang="ru-RU" dirty="0"/>
-              <a:t>Картинка диаграммы декомпозиции</a:t>
+              <a:t>Картинка диаграммы деятельности</a:t>
             </a:r>
           </a:p>
         </p:txBody>
@@ -9436,7 +9472,7 @@
           <p:cNvPr id="6" name="Рисунок 5">
             <a:extLst>
               <a:ext uri="{FF2B5EF4-FFF2-40B4-BE49-F238E27FC236}">
-                <a16:creationId xmlns:a16="http://schemas.microsoft.com/office/drawing/2014/main" id="{16170815-CD45-E33D-5E37-D9697F9A0FE0}"/>
+                <a16:creationId xmlns:a16="http://schemas.microsoft.com/office/drawing/2014/main" id="{677453B6-FD47-1777-F59A-03089AF98398}"/>
               </a:ext>
             </a:extLst>
           </p:cNvPr>
@@ -9453,20 +9489,25 @@
         </p:blipFill>
         <p:spPr>
           <a:xfrm>
-            <a:off x="167424" y="1766099"/>
-            <a:ext cx="5711769" cy="4047474"/>
+            <a:off x="6322437" y="781996"/>
+            <a:ext cx="5136137" cy="5906770"/>
           </a:xfrm>
           <a:prstGeom prst="rect">
             <a:avLst/>
           </a:prstGeom>
+          <a:ln>
+            <a:solidFill>
+              <a:schemeClr val="tx1"/>
+            </a:solidFill>
+          </a:ln>
         </p:spPr>
       </p:pic>
       <p:pic>
         <p:nvPicPr>
-          <p:cNvPr id="2" name="Рисунок 1">
-            <a:extLst>
-              <a:ext uri="{FF2B5EF4-FFF2-40B4-BE49-F238E27FC236}">
-                <a16:creationId xmlns:a16="http://schemas.microsoft.com/office/drawing/2014/main" id="{4DFA6425-4985-E7BC-9429-BCF5F61DE3F5}"/>
+          <p:cNvPr id="8" name="Рисунок 7">
+            <a:extLst>
+              <a:ext uri="{FF2B5EF4-FFF2-40B4-BE49-F238E27FC236}">
+                <a16:creationId xmlns:a16="http://schemas.microsoft.com/office/drawing/2014/main" id="{AAD3F3EB-29A0-5FFB-757D-7FC73115AC9E}"/>
               </a:ext>
             </a:extLst>
           </p:cNvPr>
@@ -9476,15 +9517,21 @@
           <p:nvPr/>
         </p:nvPicPr>
         <p:blipFill>
-          <a:blip r:embed="rId4"/>
+          <a:blip r:embed="rId4">
+            <a:extLst>
+              <a:ext uri="{28A0092B-C50C-407E-A947-70E740481C1C}">
+                <a14:useLocalDpi xmlns:a14="http://schemas.microsoft.com/office/drawing/2010/main" val="0"/>
+              </a:ext>
+            </a:extLst>
+          </a:blip>
           <a:stretch>
             <a:fillRect/>
           </a:stretch>
         </p:blipFill>
         <p:spPr>
           <a:xfrm>
-            <a:off x="6065239" y="1766099"/>
-            <a:ext cx="5940966" cy="4047474"/>
+            <a:off x="285479" y="714375"/>
+            <a:ext cx="5387411" cy="6050756"/>
           </a:xfrm>
           <a:prstGeom prst="rect">
             <a:avLst/>
@@ -9499,7 +9546,7 @@
     </p:spTree>
     <p:extLst>
       <p:ext uri="{BB962C8B-B14F-4D97-AF65-F5344CB8AC3E}">
-        <p14:creationId xmlns:p14="http://schemas.microsoft.com/office/powerpoint/2010/main" val="1979991090"/>
+        <p14:creationId xmlns:p14="http://schemas.microsoft.com/office/powerpoint/2010/main" val="1646779378"/>
       </p:ext>
     </p:extLst>
   </p:cSld>
@@ -9544,8 +9591,8 @@
         </p:nvSpPr>
         <p:spPr>
           <a:xfrm>
-            <a:off x="2653043" y="0"/>
-            <a:ext cx="7189575" cy="595613"/>
+            <a:off x="1924118" y="-192950"/>
+            <a:ext cx="8928586" cy="1143000"/>
           </a:xfrm>
         </p:spPr>
         <p:txBody>
@@ -9560,12 +9607,12 @@
             <a:r>
               <a:rPr lang="ru-RU" sz="3200" b="1" dirty="0">
                 <a:solidFill>
-                  <a:schemeClr val="accent1"/>
+                  <a:srgbClr val="C00000"/>
                 </a:solidFill>
                 <a:latin typeface="Arial" panose="020B0604020202020204" pitchFamily="34" charset="0"/>
                 <a:cs typeface="Arial" panose="020B0604020202020204" pitchFamily="34" charset="0"/>
               </a:rPr>
-              <a:t>Проектирование базы данных</a:t>
+              <a:t>Проектирование программного продукта</a:t>
             </a:r>
           </a:p>
         </p:txBody>
@@ -9584,8 +9631,8 @@
         </p:nvSpPr>
         <p:spPr>
           <a:xfrm>
-            <a:off x="5391279" y="595613"/>
-            <a:ext cx="2424376" cy="400110"/>
+            <a:off x="782613" y="628262"/>
+            <a:ext cx="4667436" cy="400110"/>
           </a:xfrm>
           <a:prstGeom prst="rect">
             <a:avLst/>
@@ -9599,18 +9646,11 @@
           <a:lstStyle/>
           <a:p>
             <a:r>
-              <a:rPr lang="en-US" sz="2000" dirty="0">
-                <a:latin typeface="Arial" panose="020B0604020202020204" pitchFamily="34" charset="0"/>
-                <a:cs typeface="Arial" panose="020B0604020202020204" pitchFamily="34" charset="0"/>
-              </a:rPr>
-              <a:t>ER-</a:t>
-            </a:r>
-            <a:r>
               <a:rPr lang="ru-RU" sz="2000" dirty="0">
                 <a:latin typeface="Arial" panose="020B0604020202020204" pitchFamily="34" charset="0"/>
                 <a:cs typeface="Arial" panose="020B0604020202020204" pitchFamily="34" charset="0"/>
               </a:rPr>
-              <a:t>модель</a:t>
+              <a:t>Контекстная диаграмма</a:t>
             </a:r>
           </a:p>
         </p:txBody>
@@ -9647,7 +9687,7 @@
             <a:r>
               <a:rPr lang="ru-RU" sz="2000" b="1" dirty="0">
                 <a:solidFill>
-                  <a:schemeClr val="accent1"/>
+                  <a:srgbClr val="C00000"/>
                 </a:solidFill>
               </a:rPr>
               <a:t>7</a:t>
@@ -9669,8 +9709,8 @@
         </p:nvSpPr>
         <p:spPr>
           <a:xfrm>
-            <a:off x="4993294" y="3631721"/>
-            <a:ext cx="2205412" cy="369332"/>
+            <a:off x="1797028" y="3964359"/>
+            <a:ext cx="2638607" cy="923330"/>
           </a:xfrm>
           <a:prstGeom prst="rect">
             <a:avLst/>
@@ -9683,27 +9723,105 @@
           </a:bodyPr>
           <a:lstStyle/>
           <a:p>
+            <a:pPr algn="ctr"/>
             <a:r>
               <a:rPr lang="ru-RU" dirty="0"/>
-              <a:t>Картинка </a:t>
-            </a:r>
-            <a:r>
-              <a:rPr lang="en-US" dirty="0"/>
-              <a:t>ER-</a:t>
-            </a:r>
+              <a:t>Картинка КОНТЕКСТНОЙ </a:t>
+            </a:r>
+          </a:p>
+          <a:p>
+            <a:pPr algn="ctr"/>
             <a:r>
               <a:rPr lang="ru-RU" dirty="0"/>
-              <a:t>модели</a:t>
+              <a:t>диаграммы </a:t>
+            </a:r>
+          </a:p>
+          <a:p>
+            <a:pPr algn="ctr"/>
+            <a:endParaRPr lang="ru-RU" dirty="0"/>
+          </a:p>
+        </p:txBody>
+      </p:sp>
+      <p:sp>
+        <p:nvSpPr>
+          <p:cNvPr id="10" name="TextBox 9">
+            <a:extLst>
+              <a:ext uri="{FF2B5EF4-FFF2-40B4-BE49-F238E27FC236}">
+                <a16:creationId xmlns:a16="http://schemas.microsoft.com/office/drawing/2014/main" id="{2D5595D4-F499-48D9-89D6-2569A1ADA379}"/>
+              </a:ext>
+            </a:extLst>
+          </p:cNvPr>
+          <p:cNvSpPr txBox="1"/>
+          <p:nvPr/>
+        </p:nvSpPr>
+        <p:spPr>
+          <a:xfrm>
+            <a:off x="6591554" y="628262"/>
+            <a:ext cx="4667436" cy="400110"/>
+          </a:xfrm>
+          <a:prstGeom prst="rect">
+            <a:avLst/>
+          </a:prstGeom>
+          <a:noFill/>
+        </p:spPr>
+        <p:txBody>
+          <a:bodyPr wrap="square" rtlCol="0">
+            <a:spAutoFit/>
+          </a:bodyPr>
+          <a:lstStyle/>
+          <a:p>
+            <a:pPr algn="ctr"/>
+            <a:r>
+              <a:rPr lang="ru-RU" sz="2000" dirty="0">
+                <a:latin typeface="Arial" panose="020B0604020202020204" pitchFamily="34" charset="0"/>
+                <a:cs typeface="Arial" panose="020B0604020202020204" pitchFamily="34" charset="0"/>
+              </a:rPr>
+              <a:t>Диаграмма декомпозиции</a:t>
+            </a:r>
+          </a:p>
+        </p:txBody>
+      </p:sp>
+      <p:sp>
+        <p:nvSpPr>
+          <p:cNvPr id="11" name="TextBox 10">
+            <a:extLst>
+              <a:ext uri="{FF2B5EF4-FFF2-40B4-BE49-F238E27FC236}">
+                <a16:creationId xmlns:a16="http://schemas.microsoft.com/office/drawing/2014/main" id="{9B5DB463-03B1-406B-8C90-94477513324D}"/>
+              </a:ext>
+            </a:extLst>
+          </p:cNvPr>
+          <p:cNvSpPr txBox="1"/>
+          <p:nvPr/>
+        </p:nvSpPr>
+        <p:spPr>
+          <a:xfrm>
+            <a:off x="7328210" y="4056692"/>
+            <a:ext cx="3804183" cy="369332"/>
+          </a:xfrm>
+          <a:prstGeom prst="rect">
+            <a:avLst/>
+          </a:prstGeom>
+          <a:noFill/>
+        </p:spPr>
+        <p:txBody>
+          <a:bodyPr wrap="none" rtlCol="0">
+            <a:spAutoFit/>
+          </a:bodyPr>
+          <a:lstStyle/>
+          <a:p>
+            <a:r>
+              <a:rPr lang="ru-RU" dirty="0"/>
+              <a:t>Картинка диаграммы декомпозиции</a:t>
             </a:r>
           </a:p>
         </p:txBody>
       </p:sp>
       <p:pic>
         <p:nvPicPr>
-          <p:cNvPr id="2" name="Рисунок 1">
-            <a:extLst>
-              <a:ext uri="{FF2B5EF4-FFF2-40B4-BE49-F238E27FC236}">
-                <a16:creationId xmlns:a16="http://schemas.microsoft.com/office/drawing/2014/main" id="{17F2C6E3-71D0-9DCE-96B6-2EE556876745}"/>
+          <p:cNvPr id="6" name="Рисунок 5">
+            <a:extLst>
+              <a:ext uri="{FF2B5EF4-FFF2-40B4-BE49-F238E27FC236}">
+                <a16:creationId xmlns:a16="http://schemas.microsoft.com/office/drawing/2014/main" id="{16170815-CD45-E33D-5E37-D9697F9A0FE0}"/>
               </a:ext>
             </a:extLst>
           </p:cNvPr>
@@ -9713,27 +9831,49 @@
           <p:nvPr/>
         </p:nvPicPr>
         <p:blipFill>
-          <a:blip r:embed="rId3" cstate="print">
-            <a:extLst>
-              <a:ext uri="{28A0092B-C50C-407E-A947-70E740481C1C}">
-                <a14:useLocalDpi xmlns:a14="http://schemas.microsoft.com/office/drawing/2010/main" val="0"/>
-              </a:ext>
-            </a:extLst>
-          </a:blip>
-          <a:srcRect/>
+          <a:blip r:embed="rId3"/>
           <a:stretch>
             <a:fillRect/>
           </a:stretch>
         </p:blipFill>
-        <p:spPr bwMode="auto">
+        <p:spPr>
           <a:xfrm>
-            <a:off x="1624824" y="1191226"/>
-            <a:ext cx="8942352" cy="5414421"/>
+            <a:off x="105337" y="1405263"/>
+            <a:ext cx="5819762" cy="4124000"/>
           </a:xfrm>
           <a:prstGeom prst="rect">
             <a:avLst/>
           </a:prstGeom>
-          <a:noFill/>
+        </p:spPr>
+      </p:pic>
+      <p:pic>
+        <p:nvPicPr>
+          <p:cNvPr id="2" name="Рисунок 1">
+            <a:extLst>
+              <a:ext uri="{FF2B5EF4-FFF2-40B4-BE49-F238E27FC236}">
+                <a16:creationId xmlns:a16="http://schemas.microsoft.com/office/drawing/2014/main" id="{4DFA6425-4985-E7BC-9429-BCF5F61DE3F5}"/>
+              </a:ext>
+            </a:extLst>
+          </p:cNvPr>
+          <p:cNvPicPr>
+            <a:picLocks noChangeAspect="1"/>
+          </p:cNvPicPr>
+          <p:nvPr/>
+        </p:nvPicPr>
+        <p:blipFill>
+          <a:blip r:embed="rId4"/>
+          <a:stretch>
+            <a:fillRect/>
+          </a:stretch>
+        </p:blipFill>
+        <p:spPr>
+          <a:xfrm>
+            <a:off x="6032093" y="1405263"/>
+            <a:ext cx="6053292" cy="4124000"/>
+          </a:xfrm>
+          <a:prstGeom prst="rect">
+            <a:avLst/>
+          </a:prstGeom>
           <a:ln>
             <a:solidFill>
               <a:schemeClr val="tx1"/>
@@ -9744,7 +9884,7 @@
     </p:spTree>
     <p:extLst>
       <p:ext uri="{BB962C8B-B14F-4D97-AF65-F5344CB8AC3E}">
-        <p14:creationId xmlns:p14="http://schemas.microsoft.com/office/powerpoint/2010/main" val="2904169163"/>
+        <p14:creationId xmlns:p14="http://schemas.microsoft.com/office/powerpoint/2010/main" val="1979991090"/>
       </p:ext>
     </p:extLst>
   </p:cSld>
@@ -9789,8 +9929,8 @@
         </p:nvSpPr>
         <p:spPr>
           <a:xfrm>
-            <a:off x="1384663" y="223148"/>
-            <a:ext cx="8458323" cy="1143000"/>
+            <a:off x="3008679" y="0"/>
+            <a:ext cx="7189575" cy="595613"/>
           </a:xfrm>
         </p:spPr>
         <p:txBody>
@@ -9805,12 +9945,57 @@
             <a:r>
               <a:rPr lang="ru-RU" sz="3200" b="1" dirty="0">
                 <a:solidFill>
-                  <a:schemeClr val="accent1"/>
+                  <a:srgbClr val="C00000"/>
                 </a:solidFill>
                 <a:latin typeface="Arial" panose="020B0604020202020204" pitchFamily="34" charset="0"/>
                 <a:cs typeface="Arial" panose="020B0604020202020204" pitchFamily="34" charset="0"/>
               </a:rPr>
-              <a:t>Тестирование программного продукта</a:t>
+              <a:t>Проектирование базы данных</a:t>
+            </a:r>
+          </a:p>
+        </p:txBody>
+      </p:sp>
+      <p:sp>
+        <p:nvSpPr>
+          <p:cNvPr id="9" name="TextBox 8">
+            <a:extLst>
+              <a:ext uri="{FF2B5EF4-FFF2-40B4-BE49-F238E27FC236}">
+                <a16:creationId xmlns:a16="http://schemas.microsoft.com/office/drawing/2014/main" id="{76B9F4FE-3FA8-43BD-A563-A96EBAA4E414}"/>
+              </a:ext>
+            </a:extLst>
+          </p:cNvPr>
+          <p:cNvSpPr txBox="1"/>
+          <p:nvPr/>
+        </p:nvSpPr>
+        <p:spPr>
+          <a:xfrm>
+            <a:off x="5391279" y="595613"/>
+            <a:ext cx="2424376" cy="400110"/>
+          </a:xfrm>
+          <a:prstGeom prst="rect">
+            <a:avLst/>
+          </a:prstGeom>
+          <a:noFill/>
+        </p:spPr>
+        <p:txBody>
+          <a:bodyPr wrap="square" rtlCol="0">
+            <a:spAutoFit/>
+          </a:bodyPr>
+          <a:lstStyle/>
+          <a:p>
+            <a:r>
+              <a:rPr lang="en-US" sz="2000" dirty="0">
+                <a:latin typeface="Arial" panose="020B0604020202020204" pitchFamily="34" charset="0"/>
+                <a:cs typeface="Arial" panose="020B0604020202020204" pitchFamily="34" charset="0"/>
+              </a:rPr>
+              <a:t>ER-</a:t>
+            </a:r>
+            <a:r>
+              <a:rPr lang="ru-RU" sz="2000" dirty="0">
+                <a:latin typeface="Arial" panose="020B0604020202020204" pitchFamily="34" charset="0"/>
+                <a:cs typeface="Arial" panose="020B0604020202020204" pitchFamily="34" charset="0"/>
+              </a:rPr>
+              <a:t>модель</a:t>
             </a:r>
           </a:p>
         </p:txBody>
@@ -9847,7 +10032,7 @@
             <a:r>
               <a:rPr lang="ru-RU" sz="2000" b="1" dirty="0">
                 <a:solidFill>
-                  <a:schemeClr val="accent1"/>
+                  <a:srgbClr val="C00000"/>
                 </a:solidFill>
               </a:rPr>
               <a:t>8</a:t>
@@ -9869,8 +10054,8 @@
         </p:nvSpPr>
         <p:spPr>
           <a:xfrm>
-            <a:off x="7439121" y="3630001"/>
-            <a:ext cx="3657411" cy="369332"/>
+            <a:off x="4993294" y="3631721"/>
+            <a:ext cx="2205412" cy="369332"/>
           </a:xfrm>
           <a:prstGeom prst="rect">
             <a:avLst/>
@@ -9885,309 +10070,25 @@
           <a:p>
             <a:r>
               <a:rPr lang="ru-RU" dirty="0"/>
-              <a:t>Скриншот фрагмента тестирования</a:t>
-            </a:r>
-          </a:p>
-        </p:txBody>
-      </p:sp>
-      <p:sp>
-        <p:nvSpPr>
-          <p:cNvPr id="8" name="Объект 2">
-            <a:extLst>
-              <a:ext uri="{FF2B5EF4-FFF2-40B4-BE49-F238E27FC236}">
-                <a16:creationId xmlns:a16="http://schemas.microsoft.com/office/drawing/2014/main" id="{F05201C0-CA37-4CB9-9FFC-0B245798AA0A}"/>
-              </a:ext>
-            </a:extLst>
-          </p:cNvPr>
-          <p:cNvSpPr txBox="1">
-            <a:spLocks/>
-          </p:cNvSpPr>
-          <p:nvPr/>
-        </p:nvSpPr>
-        <p:spPr>
-          <a:xfrm>
-            <a:off x="354287" y="1661828"/>
-            <a:ext cx="5595751" cy="4675011"/>
-          </a:xfrm>
-          <a:prstGeom prst="rect">
-            <a:avLst/>
-          </a:prstGeom>
-        </p:spPr>
-        <p:txBody>
-          <a:bodyPr>
-            <a:noAutofit/>
-          </a:bodyPr>
-          <a:lstStyle>
-            <a:lvl1pPr marL="228600" indent="-228600" algn="l" defTabSz="914400" rtl="0" eaLnBrk="1" latinLnBrk="0" hangingPunct="1">
-              <a:lnSpc>
-                <a:spcPct val="90000"/>
-              </a:lnSpc>
-              <a:spcBef>
-                <a:spcPts val="1000"/>
-              </a:spcBef>
-              <a:buFont typeface="Arial" panose="020B0604020202020204" pitchFamily="34" charset="0"/>
-              <a:buChar char="•"/>
-              <a:defRPr sz="2800" kern="1200">
-                <a:solidFill>
-                  <a:schemeClr val="tx1"/>
-                </a:solidFill>
-                <a:latin typeface="+mn-lt"/>
-                <a:ea typeface="+mn-ea"/>
-                <a:cs typeface="+mn-cs"/>
-              </a:defRPr>
-            </a:lvl1pPr>
-            <a:lvl2pPr marL="685800" indent="-228600" algn="l" defTabSz="914400" rtl="0" eaLnBrk="1" latinLnBrk="0" hangingPunct="1">
-              <a:lnSpc>
-                <a:spcPct val="90000"/>
-              </a:lnSpc>
-              <a:spcBef>
-                <a:spcPts val="500"/>
-              </a:spcBef>
-              <a:buFont typeface="Arial" panose="020B0604020202020204" pitchFamily="34" charset="0"/>
-              <a:buChar char="•"/>
-              <a:defRPr sz="2400" kern="1200">
-                <a:solidFill>
-                  <a:schemeClr val="tx1"/>
-                </a:solidFill>
-                <a:latin typeface="+mn-lt"/>
-                <a:ea typeface="+mn-ea"/>
-                <a:cs typeface="+mn-cs"/>
-              </a:defRPr>
-            </a:lvl2pPr>
-            <a:lvl3pPr marL="1143000" indent="-228600" algn="l" defTabSz="914400" rtl="0" eaLnBrk="1" latinLnBrk="0" hangingPunct="1">
-              <a:lnSpc>
-                <a:spcPct val="90000"/>
-              </a:lnSpc>
-              <a:spcBef>
-                <a:spcPts val="500"/>
-              </a:spcBef>
-              <a:buFont typeface="Arial" panose="020B0604020202020204" pitchFamily="34" charset="0"/>
-              <a:buChar char="•"/>
-              <a:defRPr sz="2000" kern="1200">
-                <a:solidFill>
-                  <a:schemeClr val="tx1"/>
-                </a:solidFill>
-                <a:latin typeface="+mn-lt"/>
-                <a:ea typeface="+mn-ea"/>
-                <a:cs typeface="+mn-cs"/>
-              </a:defRPr>
-            </a:lvl3pPr>
-            <a:lvl4pPr marL="1600200" indent="-228600" algn="l" defTabSz="914400" rtl="0" eaLnBrk="1" latinLnBrk="0" hangingPunct="1">
-              <a:lnSpc>
-                <a:spcPct val="90000"/>
-              </a:lnSpc>
-              <a:spcBef>
-                <a:spcPts val="500"/>
-              </a:spcBef>
-              <a:buFont typeface="Arial" panose="020B0604020202020204" pitchFamily="34" charset="0"/>
-              <a:buChar char="•"/>
-              <a:defRPr sz="1800" kern="1200">
-                <a:solidFill>
-                  <a:schemeClr val="tx1"/>
-                </a:solidFill>
-                <a:latin typeface="+mn-lt"/>
-                <a:ea typeface="+mn-ea"/>
-                <a:cs typeface="+mn-cs"/>
-              </a:defRPr>
-            </a:lvl4pPr>
-            <a:lvl5pPr marL="2057400" indent="-228600" algn="l" defTabSz="914400" rtl="0" eaLnBrk="1" latinLnBrk="0" hangingPunct="1">
-              <a:lnSpc>
-                <a:spcPct val="90000"/>
-              </a:lnSpc>
-              <a:spcBef>
-                <a:spcPts val="500"/>
-              </a:spcBef>
-              <a:buFont typeface="Arial" panose="020B0604020202020204" pitchFamily="34" charset="0"/>
-              <a:buChar char="•"/>
-              <a:defRPr sz="1800" kern="1200">
-                <a:solidFill>
-                  <a:schemeClr val="tx1"/>
-                </a:solidFill>
-                <a:latin typeface="+mn-lt"/>
-                <a:ea typeface="+mn-ea"/>
-                <a:cs typeface="+mn-cs"/>
-              </a:defRPr>
-            </a:lvl5pPr>
-            <a:lvl6pPr marL="2514600" indent="-228600" algn="l" defTabSz="914400" rtl="0" eaLnBrk="1" latinLnBrk="0" hangingPunct="1">
-              <a:lnSpc>
-                <a:spcPct val="90000"/>
-              </a:lnSpc>
-              <a:spcBef>
-                <a:spcPts val="500"/>
-              </a:spcBef>
-              <a:buFont typeface="Arial" panose="020B0604020202020204" pitchFamily="34" charset="0"/>
-              <a:buChar char="•"/>
-              <a:defRPr sz="1800" kern="1200">
-                <a:solidFill>
-                  <a:schemeClr val="tx1"/>
-                </a:solidFill>
-                <a:latin typeface="+mn-lt"/>
-                <a:ea typeface="+mn-ea"/>
-                <a:cs typeface="+mn-cs"/>
-              </a:defRPr>
-            </a:lvl6pPr>
-            <a:lvl7pPr marL="2971800" indent="-228600" algn="l" defTabSz="914400" rtl="0" eaLnBrk="1" latinLnBrk="0" hangingPunct="1">
-              <a:lnSpc>
-                <a:spcPct val="90000"/>
-              </a:lnSpc>
-              <a:spcBef>
-                <a:spcPts val="500"/>
-              </a:spcBef>
-              <a:buFont typeface="Arial" panose="020B0604020202020204" pitchFamily="34" charset="0"/>
-              <a:buChar char="•"/>
-              <a:defRPr sz="1800" kern="1200">
-                <a:solidFill>
-                  <a:schemeClr val="tx1"/>
-                </a:solidFill>
-                <a:latin typeface="+mn-lt"/>
-                <a:ea typeface="+mn-ea"/>
-                <a:cs typeface="+mn-cs"/>
-              </a:defRPr>
-            </a:lvl7pPr>
-            <a:lvl8pPr marL="3429000" indent="-228600" algn="l" defTabSz="914400" rtl="0" eaLnBrk="1" latinLnBrk="0" hangingPunct="1">
-              <a:lnSpc>
-                <a:spcPct val="90000"/>
-              </a:lnSpc>
-              <a:spcBef>
-                <a:spcPts val="500"/>
-              </a:spcBef>
-              <a:buFont typeface="Arial" panose="020B0604020202020204" pitchFamily="34" charset="0"/>
-              <a:buChar char="•"/>
-              <a:defRPr sz="1800" kern="1200">
-                <a:solidFill>
-                  <a:schemeClr val="tx1"/>
-                </a:solidFill>
-                <a:latin typeface="+mn-lt"/>
-                <a:ea typeface="+mn-ea"/>
-                <a:cs typeface="+mn-cs"/>
-              </a:defRPr>
-            </a:lvl8pPr>
-            <a:lvl9pPr marL="3886200" indent="-228600" algn="l" defTabSz="914400" rtl="0" eaLnBrk="1" latinLnBrk="0" hangingPunct="1">
-              <a:lnSpc>
-                <a:spcPct val="90000"/>
-              </a:lnSpc>
-              <a:spcBef>
-                <a:spcPts val="500"/>
-              </a:spcBef>
-              <a:buFont typeface="Arial" panose="020B0604020202020204" pitchFamily="34" charset="0"/>
-              <a:buChar char="•"/>
-              <a:defRPr sz="1800" kern="1200">
-                <a:solidFill>
-                  <a:schemeClr val="tx1"/>
-                </a:solidFill>
-                <a:latin typeface="+mn-lt"/>
-                <a:ea typeface="+mn-ea"/>
-                <a:cs typeface="+mn-cs"/>
-              </a:defRPr>
-            </a:lvl9pPr>
-          </a:lstStyle>
-          <a:p>
-            <a:pPr marL="0" indent="0">
-              <a:buFont typeface="Arial" panose="020B0604020202020204" pitchFamily="34" charset="0"/>
-              <a:buNone/>
-            </a:pPr>
-            <a:r>
-              <a:rPr lang="ru-RU" sz="2000" b="1" dirty="0">
-                <a:solidFill>
-                  <a:schemeClr val="accent1"/>
-                </a:solidFill>
-                <a:latin typeface="Arial" panose="020B0604020202020204" pitchFamily="34" charset="0"/>
-                <a:cs typeface="Arial" panose="020B0604020202020204" pitchFamily="34" charset="0"/>
-              </a:rPr>
-              <a:t>Вид тестирования программного продукта:  </a:t>
-            </a:r>
-            <a:r>
-              <a:rPr lang="ru-RU" sz="2000" b="1" dirty="0">
-                <a:latin typeface="Arial" panose="020B0604020202020204" pitchFamily="34" charset="0"/>
-                <a:cs typeface="Arial" panose="020B0604020202020204" pitchFamily="34" charset="0"/>
-              </a:rPr>
-              <a:t>модульное тестирование</a:t>
-            </a:r>
-          </a:p>
-          <a:p>
-            <a:pPr marL="0" indent="0">
-              <a:buNone/>
-            </a:pPr>
-            <a:r>
-              <a:rPr lang="ru-RU" sz="2000" dirty="0">
-                <a:latin typeface="Arial" panose="020B0604020202020204" pitchFamily="34" charset="0"/>
-                <a:cs typeface="Arial" panose="020B0604020202020204" pitchFamily="34" charset="0"/>
-              </a:rPr>
-              <a:t>Метод проверки отдельных модулей информационной системы учёта материалов (контроллеров, сервисов, правил валидации) с помощью тестов </a:t>
-            </a:r>
-            <a:r>
-              <a:rPr lang="ru-RU" sz="2000" dirty="0" err="1">
-                <a:latin typeface="Arial" panose="020B0604020202020204" pitchFamily="34" charset="0"/>
-                <a:cs typeface="Arial" panose="020B0604020202020204" pitchFamily="34" charset="0"/>
-              </a:rPr>
-              <a:t>PHPUnit</a:t>
-            </a:r>
-            <a:r>
-              <a:rPr lang="ru-RU" sz="2000" dirty="0">
-                <a:latin typeface="Arial" panose="020B0604020202020204" pitchFamily="34" charset="0"/>
-                <a:cs typeface="Arial" panose="020B0604020202020204" pitchFamily="34" charset="0"/>
-              </a:rPr>
-              <a:t> в среде Laravel. Код теста представлен в </a:t>
-            </a:r>
-            <a:r>
-              <a:rPr lang="ru-RU" sz="2000" dirty="0" err="1">
-                <a:latin typeface="Arial" panose="020B0604020202020204" pitchFamily="34" charset="0"/>
-                <a:cs typeface="Arial" panose="020B0604020202020204" pitchFamily="34" charset="0"/>
-              </a:rPr>
-              <a:t>tests</a:t>
-            </a:r>
-            <a:r>
-              <a:rPr lang="ru-RU" sz="2000" dirty="0">
-                <a:latin typeface="Arial" panose="020B0604020202020204" pitchFamily="34" charset="0"/>
-                <a:cs typeface="Arial" panose="020B0604020202020204" pitchFamily="34" charset="0"/>
-              </a:rPr>
-              <a:t>/</a:t>
-            </a:r>
-            <a:r>
-              <a:rPr lang="ru-RU" sz="2000" dirty="0" err="1">
-                <a:latin typeface="Arial" panose="020B0604020202020204" pitchFamily="34" charset="0"/>
-                <a:cs typeface="Arial" panose="020B0604020202020204" pitchFamily="34" charset="0"/>
-              </a:rPr>
-              <a:t>Feature</a:t>
-            </a:r>
-            <a:r>
-              <a:rPr lang="ru-RU" sz="2000" dirty="0">
-                <a:latin typeface="Arial" panose="020B0604020202020204" pitchFamily="34" charset="0"/>
-                <a:cs typeface="Arial" panose="020B0604020202020204" pitchFamily="34" charset="0"/>
-              </a:rPr>
-              <a:t>/</a:t>
-            </a:r>
-            <a:r>
-              <a:rPr lang="en-US" sz="2000" dirty="0">
-                <a:latin typeface="Arial" panose="020B0604020202020204" pitchFamily="34" charset="0"/>
-                <a:cs typeface="Arial" panose="020B0604020202020204" pitchFamily="34" charset="0"/>
-              </a:rPr>
-              <a:t>FuncPos02LayoutApplicationTest</a:t>
-            </a:r>
-            <a:r>
-              <a:rPr lang="ru-RU" sz="2000" dirty="0">
-                <a:latin typeface="Arial" panose="020B0604020202020204" pitchFamily="34" charset="0"/>
-                <a:cs typeface="Arial" panose="020B0604020202020204" pitchFamily="34" charset="0"/>
-              </a:rPr>
-              <a:t>.</a:t>
-            </a:r>
-            <a:r>
-              <a:rPr lang="ru-RU" sz="2000" dirty="0" err="1">
-                <a:latin typeface="Arial" panose="020B0604020202020204" pitchFamily="34" charset="0"/>
-                <a:cs typeface="Arial" panose="020B0604020202020204" pitchFamily="34" charset="0"/>
-              </a:rPr>
-              <a:t>php</a:t>
-            </a:r>
-            <a:endParaRPr lang="ru-RU" sz="2000" dirty="0"/>
+              <a:t>Картинка </a:t>
+            </a:r>
+            <a:r>
+              <a:rPr lang="en-US" dirty="0"/>
+              <a:t>ER-</a:t>
+            </a:r>
+            <a:r>
+              <a:rPr lang="ru-RU" dirty="0"/>
+              <a:t>модели</a:t>
+            </a:r>
           </a:p>
         </p:txBody>
       </p:sp>
       <p:pic>
         <p:nvPicPr>
-          <p:cNvPr id="5" name="Рисунок 4">
-            <a:extLst>
-              <a:ext uri="{FF2B5EF4-FFF2-40B4-BE49-F238E27FC236}">
-                <a16:creationId xmlns:a16="http://schemas.microsoft.com/office/drawing/2014/main" id="{6EA75CCB-2692-38C7-B6CF-2A2BE9D0B783}"/>
+          <p:cNvPr id="6" name="Рисунок 5">
+            <a:extLst>
+              <a:ext uri="{FF2B5EF4-FFF2-40B4-BE49-F238E27FC236}">
+                <a16:creationId xmlns:a16="http://schemas.microsoft.com/office/drawing/2014/main" id="{74D30562-25D1-55E0-4F6B-3FC979CCC998}"/>
               </a:ext>
             </a:extLst>
           </p:cNvPr>
@@ -10197,30 +10098,40 @@
           <p:nvPr/>
         </p:nvPicPr>
         <p:blipFill>
-          <a:blip r:embed="rId3"/>
+          <a:blip r:embed="rId3">
+            <a:extLst>
+              <a:ext uri="{BEBA8EAE-BF5A-486C-A8C5-ECC9F3942E4B}">
+                <a14:imgProps xmlns:a14="http://schemas.microsoft.com/office/drawing/2010/main">
+                  <a14:imgLayer r:embed="rId4">
+                    <a14:imgEffect>
+                      <a14:sharpenSoften amount="45000"/>
+                    </a14:imgEffect>
+                  </a14:imgLayer>
+                </a14:imgProps>
+              </a:ext>
+              <a:ext uri="{28A0092B-C50C-407E-A947-70E740481C1C}">
+                <a14:useLocalDpi xmlns:a14="http://schemas.microsoft.com/office/drawing/2010/main" val="0"/>
+              </a:ext>
+            </a:extLst>
+          </a:blip>
           <a:stretch>
             <a:fillRect/>
           </a:stretch>
         </p:blipFill>
         <p:spPr>
           <a:xfrm>
-            <a:off x="6601309" y="1941636"/>
-            <a:ext cx="4713798" cy="3376729"/>
+            <a:off x="676453" y="595613"/>
+            <a:ext cx="10864926" cy="6262387"/>
           </a:xfrm>
           <a:prstGeom prst="rect">
             <a:avLst/>
           </a:prstGeom>
-          <a:ln>
-            <a:solidFill>
-              <a:schemeClr val="tx1"/>
-            </a:solidFill>
-          </a:ln>
         </p:spPr>
       </p:pic>
     </p:spTree>
     <p:extLst>
       <p:ext uri="{BB962C8B-B14F-4D97-AF65-F5344CB8AC3E}">
-        <p14:creationId xmlns:p14="http://schemas.microsoft.com/office/powerpoint/2010/main" val="2556008232"/>
+        <p14:creationId xmlns:p14="http://schemas.microsoft.com/office/powerpoint/2010/main" val="2904169163"/>
       </p:ext>
     </p:extLst>
   </p:cSld>
@@ -10249,10 +10160,10 @@
       </p:grpSpPr>
       <p:sp>
         <p:nvSpPr>
-          <p:cNvPr id="2" name="Заголовок 1">
-            <a:extLst>
-              <a:ext uri="{FF2B5EF4-FFF2-40B4-BE49-F238E27FC236}">
-                <a16:creationId xmlns:a16="http://schemas.microsoft.com/office/drawing/2014/main" id="{7600BC0C-F276-4244-A7CD-BD0F4DCD932D}"/>
+          <p:cNvPr id="4" name="Заголовок 4">
+            <a:extLst>
+              <a:ext uri="{FF2B5EF4-FFF2-40B4-BE49-F238E27FC236}">
+                <a16:creationId xmlns:a16="http://schemas.microsoft.com/office/drawing/2014/main" id="{21EA8F00-3DD0-4256-8C2D-D62221C45B1F}"/>
               </a:ext>
             </a:extLst>
           </p:cNvPr>
@@ -10265,34 +10176,38 @@
         </p:nvSpPr>
         <p:spPr>
           <a:xfrm>
-            <a:off x="495300" y="2766218"/>
-            <a:ext cx="11388979" cy="1325563"/>
+            <a:off x="1784713" y="-276915"/>
+            <a:ext cx="8458323" cy="1143000"/>
           </a:xfrm>
         </p:spPr>
         <p:txBody>
-          <a:bodyPr/>
+          <a:bodyPr>
+            <a:normAutofit/>
+          </a:bodyPr>
           <a:lstStyle/>
           <a:p>
-            <a:r>
-              <a:rPr lang="ru-RU" b="1" dirty="0">
-                <a:solidFill>
-                  <a:schemeClr val="accent1"/>
+            <a:pPr marL="0" indent="0" algn="l">
+              <a:buNone/>
+            </a:pPr>
+            <a:r>
+              <a:rPr lang="ru-RU" sz="3200" b="1" dirty="0">
+                <a:solidFill>
+                  <a:srgbClr val="C00000"/>
                 </a:solidFill>
                 <a:latin typeface="Arial" panose="020B0604020202020204" pitchFamily="34" charset="0"/>
                 <a:cs typeface="Arial" panose="020B0604020202020204" pitchFamily="34" charset="0"/>
               </a:rPr>
-              <a:t>Демонстрация программного продукта</a:t>
-            </a:r>
-            <a:endParaRPr lang="ru-RU" dirty="0"/>
-          </a:p>
-        </p:txBody>
-      </p:sp>
-      <p:sp>
-        <p:nvSpPr>
-          <p:cNvPr id="5" name="TextBox 4">
-            <a:extLst>
-              <a:ext uri="{FF2B5EF4-FFF2-40B4-BE49-F238E27FC236}">
-                <a16:creationId xmlns:a16="http://schemas.microsoft.com/office/drawing/2014/main" id="{7BFBD571-39F3-4865-BB27-AA37ACFF1329}"/>
+              <a:t>Тестирование программного продукта</a:t>
+            </a:r>
+          </a:p>
+        </p:txBody>
+      </p:sp>
+      <p:sp>
+        <p:nvSpPr>
+          <p:cNvPr id="7" name="TextBox 6">
+            <a:extLst>
+              <a:ext uri="{FF2B5EF4-FFF2-40B4-BE49-F238E27FC236}">
+                <a16:creationId xmlns:a16="http://schemas.microsoft.com/office/drawing/2014/main" id="{EC35AB10-481D-490B-8F68-3E2ED02099F5}"/>
               </a:ext>
             </a:extLst>
           </p:cNvPr>
@@ -10319,7 +10234,7 @@
             <a:r>
               <a:rPr lang="ru-RU" sz="2000" b="1" dirty="0">
                 <a:solidFill>
-                  <a:schemeClr val="accent1"/>
+                  <a:srgbClr val="C00000"/>
                 </a:solidFill>
               </a:rPr>
               <a:t>9</a:t>
@@ -10327,10 +10242,403 @@
           </a:p>
         </p:txBody>
       </p:sp>
+      <p:sp>
+        <p:nvSpPr>
+          <p:cNvPr id="8" name="Объект 2">
+            <a:extLst>
+              <a:ext uri="{FF2B5EF4-FFF2-40B4-BE49-F238E27FC236}">
+                <a16:creationId xmlns:a16="http://schemas.microsoft.com/office/drawing/2014/main" id="{F05201C0-CA37-4CB9-9FFC-0B245798AA0A}"/>
+              </a:ext>
+            </a:extLst>
+          </p:cNvPr>
+          <p:cNvSpPr txBox="1">
+            <a:spLocks/>
+          </p:cNvSpPr>
+          <p:nvPr/>
+        </p:nvSpPr>
+        <p:spPr>
+          <a:xfrm>
+            <a:off x="354287" y="1661828"/>
+            <a:ext cx="5595751" cy="4675011"/>
+          </a:xfrm>
+          <a:prstGeom prst="rect">
+            <a:avLst/>
+          </a:prstGeom>
+        </p:spPr>
+        <p:txBody>
+          <a:bodyPr>
+            <a:noAutofit/>
+          </a:bodyPr>
+          <a:lstStyle>
+            <a:lvl1pPr marL="228600" indent="-228600" algn="l" defTabSz="914400" rtl="0" eaLnBrk="1" latinLnBrk="0" hangingPunct="1">
+              <a:lnSpc>
+                <a:spcPct val="90000"/>
+              </a:lnSpc>
+              <a:spcBef>
+                <a:spcPts val="1000"/>
+              </a:spcBef>
+              <a:buFont typeface="Arial" panose="020B0604020202020204" pitchFamily="34" charset="0"/>
+              <a:buChar char="•"/>
+              <a:defRPr sz="2800" kern="1200">
+                <a:solidFill>
+                  <a:schemeClr val="tx1"/>
+                </a:solidFill>
+                <a:latin typeface="+mn-lt"/>
+                <a:ea typeface="+mn-ea"/>
+                <a:cs typeface="+mn-cs"/>
+              </a:defRPr>
+            </a:lvl1pPr>
+            <a:lvl2pPr marL="685800" indent="-228600" algn="l" defTabSz="914400" rtl="0" eaLnBrk="1" latinLnBrk="0" hangingPunct="1">
+              <a:lnSpc>
+                <a:spcPct val="90000"/>
+              </a:lnSpc>
+              <a:spcBef>
+                <a:spcPts val="500"/>
+              </a:spcBef>
+              <a:buFont typeface="Arial" panose="020B0604020202020204" pitchFamily="34" charset="0"/>
+              <a:buChar char="•"/>
+              <a:defRPr sz="2400" kern="1200">
+                <a:solidFill>
+                  <a:schemeClr val="tx1"/>
+                </a:solidFill>
+                <a:latin typeface="+mn-lt"/>
+                <a:ea typeface="+mn-ea"/>
+                <a:cs typeface="+mn-cs"/>
+              </a:defRPr>
+            </a:lvl2pPr>
+            <a:lvl3pPr marL="1143000" indent="-228600" algn="l" defTabSz="914400" rtl="0" eaLnBrk="1" latinLnBrk="0" hangingPunct="1">
+              <a:lnSpc>
+                <a:spcPct val="90000"/>
+              </a:lnSpc>
+              <a:spcBef>
+                <a:spcPts val="500"/>
+              </a:spcBef>
+              <a:buFont typeface="Arial" panose="020B0604020202020204" pitchFamily="34" charset="0"/>
+              <a:buChar char="•"/>
+              <a:defRPr sz="2000" kern="1200">
+                <a:solidFill>
+                  <a:schemeClr val="tx1"/>
+                </a:solidFill>
+                <a:latin typeface="+mn-lt"/>
+                <a:ea typeface="+mn-ea"/>
+                <a:cs typeface="+mn-cs"/>
+              </a:defRPr>
+            </a:lvl3pPr>
+            <a:lvl4pPr marL="1600200" indent="-228600" algn="l" defTabSz="914400" rtl="0" eaLnBrk="1" latinLnBrk="0" hangingPunct="1">
+              <a:lnSpc>
+                <a:spcPct val="90000"/>
+              </a:lnSpc>
+              <a:spcBef>
+                <a:spcPts val="500"/>
+              </a:spcBef>
+              <a:buFont typeface="Arial" panose="020B0604020202020204" pitchFamily="34" charset="0"/>
+              <a:buChar char="•"/>
+              <a:defRPr sz="1800" kern="1200">
+                <a:solidFill>
+                  <a:schemeClr val="tx1"/>
+                </a:solidFill>
+                <a:latin typeface="+mn-lt"/>
+                <a:ea typeface="+mn-ea"/>
+                <a:cs typeface="+mn-cs"/>
+              </a:defRPr>
+            </a:lvl4pPr>
+            <a:lvl5pPr marL="2057400" indent="-228600" algn="l" defTabSz="914400" rtl="0" eaLnBrk="1" latinLnBrk="0" hangingPunct="1">
+              <a:lnSpc>
+                <a:spcPct val="90000"/>
+              </a:lnSpc>
+              <a:spcBef>
+                <a:spcPts val="500"/>
+              </a:spcBef>
+              <a:buFont typeface="Arial" panose="020B0604020202020204" pitchFamily="34" charset="0"/>
+              <a:buChar char="•"/>
+              <a:defRPr sz="1800" kern="1200">
+                <a:solidFill>
+                  <a:schemeClr val="tx1"/>
+                </a:solidFill>
+                <a:latin typeface="+mn-lt"/>
+                <a:ea typeface="+mn-ea"/>
+                <a:cs typeface="+mn-cs"/>
+              </a:defRPr>
+            </a:lvl5pPr>
+            <a:lvl6pPr marL="2514600" indent="-228600" algn="l" defTabSz="914400" rtl="0" eaLnBrk="1" latinLnBrk="0" hangingPunct="1">
+              <a:lnSpc>
+                <a:spcPct val="90000"/>
+              </a:lnSpc>
+              <a:spcBef>
+                <a:spcPts val="500"/>
+              </a:spcBef>
+              <a:buFont typeface="Arial" panose="020B0604020202020204" pitchFamily="34" charset="0"/>
+              <a:buChar char="•"/>
+              <a:defRPr sz="1800" kern="1200">
+                <a:solidFill>
+                  <a:schemeClr val="tx1"/>
+                </a:solidFill>
+                <a:latin typeface="+mn-lt"/>
+                <a:ea typeface="+mn-ea"/>
+                <a:cs typeface="+mn-cs"/>
+              </a:defRPr>
+            </a:lvl6pPr>
+            <a:lvl7pPr marL="2971800" indent="-228600" algn="l" defTabSz="914400" rtl="0" eaLnBrk="1" latinLnBrk="0" hangingPunct="1">
+              <a:lnSpc>
+                <a:spcPct val="90000"/>
+              </a:lnSpc>
+              <a:spcBef>
+                <a:spcPts val="500"/>
+              </a:spcBef>
+              <a:buFont typeface="Arial" panose="020B0604020202020204" pitchFamily="34" charset="0"/>
+              <a:buChar char="•"/>
+              <a:defRPr sz="1800" kern="1200">
+                <a:solidFill>
+                  <a:schemeClr val="tx1"/>
+                </a:solidFill>
+                <a:latin typeface="+mn-lt"/>
+                <a:ea typeface="+mn-ea"/>
+                <a:cs typeface="+mn-cs"/>
+              </a:defRPr>
+            </a:lvl7pPr>
+            <a:lvl8pPr marL="3429000" indent="-228600" algn="l" defTabSz="914400" rtl="0" eaLnBrk="1" latinLnBrk="0" hangingPunct="1">
+              <a:lnSpc>
+                <a:spcPct val="90000"/>
+              </a:lnSpc>
+              <a:spcBef>
+                <a:spcPts val="500"/>
+              </a:spcBef>
+              <a:buFont typeface="Arial" panose="020B0604020202020204" pitchFamily="34" charset="0"/>
+              <a:buChar char="•"/>
+              <a:defRPr sz="1800" kern="1200">
+                <a:solidFill>
+                  <a:schemeClr val="tx1"/>
+                </a:solidFill>
+                <a:latin typeface="+mn-lt"/>
+                <a:ea typeface="+mn-ea"/>
+                <a:cs typeface="+mn-cs"/>
+              </a:defRPr>
+            </a:lvl8pPr>
+            <a:lvl9pPr marL="3886200" indent="-228600" algn="l" defTabSz="914400" rtl="0" eaLnBrk="1" latinLnBrk="0" hangingPunct="1">
+              <a:lnSpc>
+                <a:spcPct val="90000"/>
+              </a:lnSpc>
+              <a:spcBef>
+                <a:spcPts val="500"/>
+              </a:spcBef>
+              <a:buFont typeface="Arial" panose="020B0604020202020204" pitchFamily="34" charset="0"/>
+              <a:buChar char="•"/>
+              <a:defRPr sz="1800" kern="1200">
+                <a:solidFill>
+                  <a:schemeClr val="tx1"/>
+                </a:solidFill>
+                <a:latin typeface="+mn-lt"/>
+                <a:ea typeface="+mn-ea"/>
+                <a:cs typeface="+mn-cs"/>
+              </a:defRPr>
+            </a:lvl9pPr>
+          </a:lstStyle>
+          <a:p>
+            <a:pPr marL="0" indent="0">
+              <a:buFont typeface="Arial" panose="020B0604020202020204" pitchFamily="34" charset="0"/>
+              <a:buNone/>
+            </a:pPr>
+            <a:r>
+              <a:rPr lang="ru-RU" sz="2000" b="1" dirty="0">
+                <a:solidFill>
+                  <a:srgbClr val="C00000"/>
+                </a:solidFill>
+                <a:latin typeface="Arial" panose="020B0604020202020204" pitchFamily="34" charset="0"/>
+                <a:cs typeface="Arial" panose="020B0604020202020204" pitchFamily="34" charset="0"/>
+              </a:rPr>
+              <a:t>Вид тестирования программного продукта:  </a:t>
+            </a:r>
+            <a:r>
+              <a:rPr lang="ru-RU" sz="2000" b="1" dirty="0">
+                <a:latin typeface="Arial" panose="020B0604020202020204" pitchFamily="34" charset="0"/>
+                <a:cs typeface="Arial" panose="020B0604020202020204" pitchFamily="34" charset="0"/>
+              </a:rPr>
+              <a:t>модульное и нагрузочное тестирование.</a:t>
+            </a:r>
+          </a:p>
+          <a:p>
+            <a:pPr marL="0" indent="0">
+              <a:buNone/>
+            </a:pPr>
+            <a:r>
+              <a:rPr lang="ru-RU" sz="2000" dirty="0">
+                <a:latin typeface="Arial" panose="020B0604020202020204" pitchFamily="34" charset="0"/>
+                <a:cs typeface="Arial" panose="020B0604020202020204" pitchFamily="34" charset="0"/>
+              </a:rPr>
+              <a:t>Метод проверки отдельных модулей информационной системы учёта материалов (контроллеров, сервисов, правил валидации) с помощью тестов </a:t>
+            </a:r>
+            <a:r>
+              <a:rPr lang="ru-RU" sz="2000" dirty="0" err="1">
+                <a:latin typeface="Arial" panose="020B0604020202020204" pitchFamily="34" charset="0"/>
+                <a:cs typeface="Arial" panose="020B0604020202020204" pitchFamily="34" charset="0"/>
+              </a:rPr>
+              <a:t>PHPUnit</a:t>
+            </a:r>
+            <a:r>
+              <a:rPr lang="ru-RU" sz="2000" dirty="0">
+                <a:latin typeface="Arial" panose="020B0604020202020204" pitchFamily="34" charset="0"/>
+                <a:cs typeface="Arial" panose="020B0604020202020204" pitchFamily="34" charset="0"/>
+              </a:rPr>
+              <a:t> в среде Laravel. Код теста представлен в </a:t>
+            </a:r>
+            <a:r>
+              <a:rPr lang="ru-RU" sz="2000" dirty="0" err="1">
+                <a:latin typeface="Arial" panose="020B0604020202020204" pitchFamily="34" charset="0"/>
+                <a:cs typeface="Arial" panose="020B0604020202020204" pitchFamily="34" charset="0"/>
+              </a:rPr>
+              <a:t>tests</a:t>
+            </a:r>
+            <a:r>
+              <a:rPr lang="ru-RU" sz="2000" dirty="0">
+                <a:latin typeface="Arial" panose="020B0604020202020204" pitchFamily="34" charset="0"/>
+                <a:cs typeface="Arial" panose="020B0604020202020204" pitchFamily="34" charset="0"/>
+              </a:rPr>
+              <a:t>/</a:t>
+            </a:r>
+            <a:r>
+              <a:rPr lang="ru-RU" sz="2000" dirty="0" err="1">
+                <a:latin typeface="Arial" panose="020B0604020202020204" pitchFamily="34" charset="0"/>
+                <a:cs typeface="Arial" panose="020B0604020202020204" pitchFamily="34" charset="0"/>
+              </a:rPr>
+              <a:t>Feature</a:t>
+            </a:r>
+            <a:r>
+              <a:rPr lang="ru-RU" sz="2000" dirty="0">
+                <a:latin typeface="Arial" panose="020B0604020202020204" pitchFamily="34" charset="0"/>
+                <a:cs typeface="Arial" panose="020B0604020202020204" pitchFamily="34" charset="0"/>
+              </a:rPr>
+              <a:t>/</a:t>
+            </a:r>
+            <a:r>
+              <a:rPr lang="en-US" sz="2000" dirty="0">
+                <a:latin typeface="Arial" panose="020B0604020202020204" pitchFamily="34" charset="0"/>
+                <a:cs typeface="Arial" panose="020B0604020202020204" pitchFamily="34" charset="0"/>
+              </a:rPr>
+              <a:t>FuncPos02LayoutApplicationTest</a:t>
+            </a:r>
+            <a:r>
+              <a:rPr lang="ru-RU" sz="2000" dirty="0">
+                <a:latin typeface="Arial" panose="020B0604020202020204" pitchFamily="34" charset="0"/>
+                <a:cs typeface="Arial" panose="020B0604020202020204" pitchFamily="34" charset="0"/>
+              </a:rPr>
+              <a:t>.</a:t>
+            </a:r>
+            <a:r>
+              <a:rPr lang="ru-RU" sz="2000" dirty="0" err="1">
+                <a:latin typeface="Arial" panose="020B0604020202020204" pitchFamily="34" charset="0"/>
+                <a:cs typeface="Arial" panose="020B0604020202020204" pitchFamily="34" charset="0"/>
+              </a:rPr>
+              <a:t>php</a:t>
+            </a:r>
+            <a:endParaRPr lang="ru-RU" sz="2000" dirty="0"/>
+          </a:p>
+        </p:txBody>
+      </p:sp>
+      <p:pic>
+        <p:nvPicPr>
+          <p:cNvPr id="2" name="Рисунок 1">
+            <a:extLst>
+              <a:ext uri="{FF2B5EF4-FFF2-40B4-BE49-F238E27FC236}">
+                <a16:creationId xmlns:a16="http://schemas.microsoft.com/office/drawing/2014/main" id="{B1D27BA6-0FDA-4B87-EE13-3242AEF5A363}"/>
+              </a:ext>
+            </a:extLst>
+          </p:cNvPr>
+          <p:cNvPicPr>
+            <a:picLocks noChangeAspect="1"/>
+          </p:cNvPicPr>
+          <p:nvPr/>
+        </p:nvPicPr>
+        <p:blipFill rotWithShape="1">
+          <a:blip r:embed="rId3"/>
+          <a:srcRect b="3402"/>
+          <a:stretch/>
+        </p:blipFill>
+        <p:spPr bwMode="auto">
+          <a:xfrm>
+            <a:off x="6904381" y="740691"/>
+            <a:ext cx="4830936" cy="2378369"/>
+          </a:xfrm>
+          <a:prstGeom prst="rect">
+            <a:avLst/>
+          </a:prstGeom>
+          <a:ln w="9525" cap="flat" cmpd="sng" algn="ctr">
+            <a:solidFill>
+              <a:sysClr val="windowText" lastClr="000000"/>
+            </a:solidFill>
+            <a:prstDash val="solid"/>
+            <a:round/>
+            <a:headEnd type="none" w="med" len="med"/>
+            <a:tailEnd type="none" w="med" len="med"/>
+          </a:ln>
+          <a:extLst>
+            <a:ext uri="{53640926-AAD7-44D8-BBD7-CCE9431645EC}">
+              <a14:shadowObscured xmlns:a14="http://schemas.microsoft.com/office/drawing/2010/main"/>
+            </a:ext>
+          </a:extLst>
+        </p:spPr>
+      </p:pic>
+      <p:pic>
+        <p:nvPicPr>
+          <p:cNvPr id="6" name="Рисунок 5">
+            <a:extLst>
+              <a:ext uri="{FF2B5EF4-FFF2-40B4-BE49-F238E27FC236}">
+                <a16:creationId xmlns:a16="http://schemas.microsoft.com/office/drawing/2014/main" id="{B91ABBEB-5BCC-8590-F299-0481A453A20C}"/>
+              </a:ext>
+            </a:extLst>
+          </p:cNvPr>
+          <p:cNvPicPr>
+            <a:picLocks noChangeAspect="1"/>
+          </p:cNvPicPr>
+          <p:nvPr/>
+        </p:nvPicPr>
+        <p:blipFill rotWithShape="1">
+          <a:blip r:embed="rId4">
+            <a:extLst>
+              <a:ext uri="{BEBA8EAE-BF5A-486C-A8C5-ECC9F3942E4B}">
+                <a14:imgProps xmlns:a14="http://schemas.microsoft.com/office/drawing/2010/main">
+                  <a14:imgLayer r:embed="rId5">
+                    <a14:imgEffect>
+                      <a14:sharpenSoften amount="48000"/>
+                    </a14:imgEffect>
+                  </a14:imgLayer>
+                </a14:imgProps>
+              </a:ext>
+            </a:extLst>
+          </a:blip>
+          <a:srcRect t="33795" b="6552"/>
+          <a:stretch/>
+        </p:blipFill>
+        <p:spPr bwMode="auto">
+          <a:xfrm>
+            <a:off x="7586661" y="3260248"/>
+            <a:ext cx="3894489" cy="3283426"/>
+          </a:xfrm>
+          <a:prstGeom prst="rect">
+            <a:avLst/>
+          </a:prstGeom>
+          <a:ln w="9525" cap="flat" cmpd="sng" algn="ctr">
+            <a:solidFill>
+              <a:sysClr val="windowText" lastClr="000000"/>
+            </a:solidFill>
+            <a:prstDash val="solid"/>
+            <a:round/>
+            <a:headEnd type="none" w="med" len="med"/>
+            <a:tailEnd type="none" w="med" len="med"/>
+          </a:ln>
+          <a:effectLst>
+            <a:reflection endPos="0" dist="50800" dir="5400000" sy="-100000" algn="bl" rotWithShape="0"/>
+          </a:effectLst>
+          <a:extLst>
+            <a:ext uri="{53640926-AAD7-44D8-BBD7-CCE9431645EC}">
+              <a14:shadowObscured xmlns:a14="http://schemas.microsoft.com/office/drawing/2010/main"/>
+            </a:ext>
+          </a:extLst>
+        </p:spPr>
+      </p:pic>
     </p:spTree>
     <p:extLst>
       <p:ext uri="{BB962C8B-B14F-4D97-AF65-F5344CB8AC3E}">
-        <p14:creationId xmlns:p14="http://schemas.microsoft.com/office/powerpoint/2010/main" val="286539850"/>
+        <p14:creationId xmlns:p14="http://schemas.microsoft.com/office/powerpoint/2010/main" val="2556008232"/>
       </p:ext>
     </p:extLst>
   </p:cSld>
